--- a/workshop/docs/slides/VibeCoding_Workshop.pptx
+++ b/workshop/docs/slides/VibeCoding_Workshop.pptx
@@ -1450,7 +1450,7 @@
           <a:lstStyle/>
           <a:p>
             <a:r>
-              <a:t>核心觀念：人類主導、AI 輔助。/plan 後一定要人類確認。</a:t>
+              <a:t>v5.3 新增任務分級。小修改走 quick 不被綡住，核心邏輯走 critical 加倍嚴謹。/verify 依模式自動選 profile。</a:t>
             </a:r>
           </a:p>
         </p:txBody>
@@ -6961,7 +6961,7 @@
                 </a:solidFill>
                 <a:latin typeface="Microsoft JhengHei UI"/>
               </a:rPr>
-              <a:t>開發循環全貌</a:t>
+              <a:t>開發循環全貌（依任務模式分流）</a:t>
             </a:r>
           </a:p>
         </p:txBody>
@@ -7041,203 +7041,260 @@
               </a:spcAft>
             </a:pPr>
             <a:r>
-              <a:rPr sz="2200" b="0" i="0">
-                <a:solidFill>
-                  <a:srgbClr val="1A1A1A"/>
-                </a:solidFill>
-                <a:latin typeface="Microsoft JhengHei UI"/>
-              </a:rPr>
-              <a:t>/task-next      取得下一個任務</a:t>
-            </a:r>
-          </a:p>
-          <a:p>
-            <a:pPr algn="l">
-              <a:spcBef>
-                <a:spcPts val="0"/>
-              </a:spcBef>
-              <a:spcAft>
-                <a:spcPts val="800"/>
-              </a:spcAft>
-            </a:pPr>
-            <a:r>
-              <a:rPr sz="1600" b="0" i="0">
-                <a:solidFill>
-                  <a:srgbClr val="A0A0AA"/>
-                </a:solidFill>
-                <a:latin typeface="Microsoft JhengHei UI"/>
-              </a:rPr>
-              <a:t>      ↓</a:t>
-            </a:r>
-          </a:p>
-          <a:p>
-            <a:pPr algn="l">
-              <a:spcBef>
-                <a:spcPts val="0"/>
-              </a:spcBef>
-              <a:spcAft>
-                <a:spcPts val="800"/>
-              </a:spcAft>
-            </a:pPr>
-            <a:r>
-              <a:rPr sz="2200" b="0" i="0">
-                <a:solidFill>
-                  <a:srgbClr val="1A1A1A"/>
-                </a:solidFill>
-                <a:latin typeface="Microsoft JhengHei UI"/>
-              </a:rPr>
-              <a:t>/plan               planner agent (Opus) 建立計畫</a:t>
-            </a:r>
-          </a:p>
-          <a:p>
-            <a:pPr algn="l">
-              <a:spcBef>
-                <a:spcPts val="0"/>
-              </a:spcBef>
-              <a:spcAft>
-                <a:spcPts val="800"/>
-              </a:spcAft>
-            </a:pPr>
-            <a:r>
-              <a:rPr sz="1600" b="0" i="0">
+              <a:rPr sz="2000" b="0" i="0">
+                <a:solidFill>
+                  <a:srgbClr val="1A1A1A"/>
+                </a:solidFill>
+                <a:latin typeface="Microsoft JhengHei UI"/>
+              </a:rPr>
+              <a:t>/task-next   取任務 + 選模式（quick / standard / critical）</a:t>
+            </a:r>
+          </a:p>
+          <a:p>
+            <a:pPr algn="l">
+              <a:spcBef>
+                <a:spcPts val="0"/>
+              </a:spcBef>
+              <a:spcAft>
+                <a:spcPts val="800"/>
+              </a:spcAft>
+            </a:pPr>
+            <a:r>
+              <a:rPr sz="800" b="0" i="0">
+                <a:solidFill>
+                  <a:srgbClr val="1A1A1A"/>
+                </a:solidFill>
+                <a:latin typeface="Microsoft JhengHei UI"/>
+              </a:rPr>
+              <a:t/>
+            </a:r>
+          </a:p>
+          <a:p>
+            <a:pPr algn="l">
+              <a:spcBef>
+                <a:spcPts val="0"/>
+              </a:spcBef>
+              <a:spcAft>
+                <a:spcPts val="800"/>
+              </a:spcAft>
+            </a:pPr>
+            <a:r>
+              <a:rPr sz="2000" b="0" i="0">
+                <a:solidFill>
+                  <a:srgbClr val="1B8C4E"/>
+                </a:solidFill>
+                <a:latin typeface="Microsoft JhengHei UI"/>
+              </a:rPr>
+              <a:t>─── quick ───     直接寫 → /verify (auto: quick)</a:t>
+            </a:r>
+          </a:p>
+          <a:p>
+            <a:pPr algn="l">
+              <a:spcBef>
+                <a:spcPts val="0"/>
+              </a:spcBef>
+              <a:spcAft>
+                <a:spcPts val="800"/>
+              </a:spcAft>
+            </a:pPr>
+            <a:r>
+              <a:rPr sz="1500" b="0" i="0">
+                <a:solidFill>
+                  <a:srgbClr val="6B6B76"/>
+                </a:solidFill>
+                <a:latin typeface="Microsoft JhengHei UI"/>
+              </a:rPr>
+              <a:t>                          適合：&lt; 30min 單檔修改</a:t>
+            </a:r>
+          </a:p>
+          <a:p>
+            <a:pPr algn="l">
+              <a:spcBef>
+                <a:spcPts val="0"/>
+              </a:spcBef>
+              <a:spcAft>
+                <a:spcPts val="800"/>
+              </a:spcAft>
+            </a:pPr>
+            <a:r>
+              <a:rPr sz="600" b="0" i="0">
+                <a:solidFill>
+                  <a:srgbClr val="1A1A1A"/>
+                </a:solidFill>
+                <a:latin typeface="Microsoft JhengHei UI"/>
+              </a:rPr>
+              <a:t/>
+            </a:r>
+          </a:p>
+          <a:p>
+            <a:pPr algn="l">
+              <a:spcBef>
+                <a:spcPts val="0"/>
+              </a:spcBef>
+              <a:spcAft>
+                <a:spcPts val="800"/>
+              </a:spcAft>
+            </a:pPr>
+            <a:r>
+              <a:rPr sz="2000" b="0" i="0">
+                <a:solidFill>
+                  <a:srgbClr val="1A1A1A"/>
+                </a:solidFill>
+                <a:latin typeface="Microsoft JhengHei UI"/>
+              </a:rPr>
+              <a:t>─── standard ───  /plan → /tdd (80%) → /review-code</a:t>
+            </a:r>
+          </a:p>
+          <a:p>
+            <a:pPr algn="l">
+              <a:spcBef>
+                <a:spcPts val="0"/>
+              </a:spcBef>
+              <a:spcAft>
+                <a:spcPts val="800"/>
+              </a:spcAft>
+            </a:pPr>
+            <a:r>
+              <a:rPr sz="1800" b="0" i="0">
+                <a:solidFill>
+                  <a:srgbClr val="1A1A1A"/>
+                </a:solidFill>
+                <a:latin typeface="Microsoft JhengHei UI"/>
+              </a:rPr>
+              <a:t>                          → /verify (auto: full)</a:t>
+            </a:r>
+          </a:p>
+          <a:p>
+            <a:pPr algn="l">
+              <a:spcBef>
+                <a:spcPts val="0"/>
+              </a:spcBef>
+              <a:spcAft>
+                <a:spcPts val="800"/>
+              </a:spcAft>
+            </a:pPr>
+            <a:r>
+              <a:rPr sz="1500" b="0" i="0">
+                <a:solidFill>
+                  <a:srgbClr val="6B6B76"/>
+                </a:solidFill>
+                <a:latin typeface="Microsoft JhengHei UI"/>
+              </a:rPr>
+              <a:t>                          適合：1-4h 新功能 / 重構</a:t>
+            </a:r>
+          </a:p>
+          <a:p>
+            <a:pPr algn="l">
+              <a:spcBef>
+                <a:spcPts val="0"/>
+              </a:spcBef>
+              <a:spcAft>
+                <a:spcPts val="800"/>
+              </a:spcAft>
+            </a:pPr>
+            <a:r>
+              <a:rPr sz="600" b="0" i="0">
+                <a:solidFill>
+                  <a:srgbClr val="1A1A1A"/>
+                </a:solidFill>
+                <a:latin typeface="Microsoft JhengHei UI"/>
+              </a:rPr>
+              <a:t/>
+            </a:r>
+          </a:p>
+          <a:p>
+            <a:pPr algn="l">
+              <a:spcBef>
+                <a:spcPts val="0"/>
+              </a:spcBef>
+              <a:spcAft>
+                <a:spcPts val="800"/>
+              </a:spcAft>
+            </a:pPr>
+            <a:r>
+              <a:rPr sz="2000" b="0" i="0">
                 <a:solidFill>
                   <a:srgbClr val="C48A0A"/>
                 </a:solidFill>
                 <a:latin typeface="Microsoft JhengHei UI"/>
               </a:rPr>
-              <a:t>      ↓            → 人類審核 → 確認</a:t>
-            </a:r>
-          </a:p>
-          <a:p>
-            <a:pPr algn="l">
-              <a:spcBef>
-                <a:spcPts val="0"/>
-              </a:spcBef>
-              <a:spcAft>
-                <a:spcPts val="800"/>
-              </a:spcAft>
-            </a:pPr>
-            <a:r>
-              <a:rPr sz="2200" b="0" i="0">
-                <a:solidFill>
-                  <a:srgbClr val="1A1A1A"/>
-                </a:solidFill>
-                <a:latin typeface="Microsoft JhengHei UI"/>
-              </a:rPr>
-              <a:t>/tdd                tdd-guide agent — RED → GREEN → IMPROVE</a:t>
-            </a:r>
-          </a:p>
-          <a:p>
-            <a:pPr algn="l">
-              <a:spcBef>
-                <a:spcPts val="0"/>
-              </a:spcBef>
-              <a:spcAft>
-                <a:spcPts val="800"/>
-              </a:spcAft>
-            </a:pPr>
-            <a:r>
-              <a:rPr sz="1600" b="0" i="0">
-                <a:solidFill>
-                  <a:srgbClr val="A0A0AA"/>
-                </a:solidFill>
-                <a:latin typeface="Microsoft JhengHei UI"/>
-              </a:rPr>
-              <a:t>      ↓</a:t>
-            </a:r>
-          </a:p>
-          <a:p>
-            <a:pPr algn="l">
-              <a:spcBef>
-                <a:spcPts val="0"/>
-              </a:spcBef>
-              <a:spcAft>
-                <a:spcPts val="800"/>
-              </a:spcAft>
-            </a:pPr>
-            <a:r>
-              <a:rPr sz="2200" b="0" i="0">
-                <a:solidFill>
-                  <a:srgbClr val="1A1A1A"/>
-                </a:solidFill>
-                <a:latin typeface="Microsoft JhengHei UI"/>
-              </a:rPr>
-              <a:t>/review-code   code-quality agent 審查</a:t>
-            </a:r>
-          </a:p>
-          <a:p>
-            <a:pPr algn="l">
-              <a:spcBef>
-                <a:spcPts val="0"/>
-              </a:spcBef>
-              <a:spcAft>
-                <a:spcPts val="800"/>
-              </a:spcAft>
-            </a:pPr>
-            <a:r>
-              <a:rPr sz="1600" b="0" i="0">
+              <a:t>─── critical ───   /plan → /tdd (100%) → /review-code</a:t>
+            </a:r>
+          </a:p>
+          <a:p>
+            <a:pPr algn="l">
+              <a:spcBef>
+                <a:spcPts val="0"/>
+              </a:spcBef>
+              <a:spcAft>
+                <a:spcPts val="800"/>
+              </a:spcAft>
+            </a:pPr>
+            <a:r>
+              <a:rPr sz="1800" b="0" i="0">
                 <a:solidFill>
                   <a:srgbClr val="C48A0A"/>
                 </a:solidFill>
                 <a:latin typeface="Microsoft JhengHei UI"/>
               </a:rPr>
-              <a:t>      ↓            → 修復 CRITICAL / HIGH</a:t>
-            </a:r>
-          </a:p>
-          <a:p>
-            <a:pPr algn="l">
-              <a:spcBef>
-                <a:spcPts val="0"/>
-              </a:spcBef>
-              <a:spcAft>
-                <a:spcPts val="800"/>
-              </a:spcAft>
-            </a:pPr>
-            <a:r>
-              <a:rPr sz="2200" b="0" i="0">
-                <a:solidFill>
-                  <a:srgbClr val="1A1A1A"/>
-                </a:solidFill>
-                <a:latin typeface="Microsoft JhengHei UI"/>
-              </a:rPr>
-              <a:t>git commit        conventional commits 格式</a:t>
-            </a:r>
-          </a:p>
-          <a:p>
-            <a:pPr algn="l">
-              <a:spcBef>
-                <a:spcPts val="0"/>
-              </a:spcBef>
-              <a:spcAft>
-                <a:spcPts val="800"/>
-              </a:spcAft>
-            </a:pPr>
-            <a:r>
-              <a:rPr sz="1600" b="0" i="0">
-                <a:solidFill>
-                  <a:srgbClr val="A0A0AA"/>
-                </a:solidFill>
-                <a:latin typeface="Microsoft JhengHei UI"/>
-              </a:rPr>
-              <a:t>      ↓</a:t>
-            </a:r>
-          </a:p>
-          <a:p>
-            <a:pPr algn="l">
-              <a:spcBef>
-                <a:spcPts val="0"/>
-              </a:spcBef>
-              <a:spcAft>
-                <a:spcPts val="800"/>
-              </a:spcAft>
-            </a:pPr>
-            <a:r>
-              <a:rPr sz="1800" b="1" i="0">
+              <a:t>                          → /verify (auto: pre-pr + 安全掃描)</a:t>
+            </a:r>
+          </a:p>
+          <a:p>
+            <a:pPr algn="l">
+              <a:spcBef>
+                <a:spcPts val="0"/>
+              </a:spcBef>
+              <a:spcAft>
+                <a:spcPts val="800"/>
+              </a:spcAft>
+            </a:pPr>
+            <a:r>
+              <a:rPr sz="1500" b="0" i="0">
+                <a:solidFill>
+                  <a:srgbClr val="6B6B76"/>
+                </a:solidFill>
+                <a:latin typeface="Microsoft JhengHei UI"/>
+              </a:rPr>
+              <a:t>                          適合：金流 / 認證 / 安全 / 核心</a:t>
+            </a:r>
+          </a:p>
+          <a:p>
+            <a:pPr algn="l">
+              <a:spcBef>
+                <a:spcPts val="0"/>
+              </a:spcBef>
+              <a:spcAft>
+                <a:spcPts val="800"/>
+              </a:spcAft>
+            </a:pPr>
+            <a:r>
+              <a:rPr sz="600" b="0" i="0">
+                <a:solidFill>
+                  <a:srgbClr val="1A1A1A"/>
+                </a:solidFill>
+                <a:latin typeface="Microsoft JhengHei UI"/>
+              </a:rPr>
+              <a:t/>
+            </a:r>
+          </a:p>
+          <a:p>
+            <a:pPr algn="l">
+              <a:spcBef>
+                <a:spcPts val="0"/>
+              </a:spcBef>
+              <a:spcAft>
+                <a:spcPts val="800"/>
+              </a:spcAft>
+            </a:pPr>
+            <a:r>
+              <a:rPr sz="1600" b="1" i="0">
                 <a:solidFill>
                   <a:srgbClr val="1A6BE5"/>
                 </a:solidFill>
                 <a:latin typeface="Microsoft JhengHei UI"/>
               </a:rPr>
-              <a:t>─── 還有任務？→ 回到 /task-next ───</a:t>
+              <a:t>─── 完成 → 回到 /task-next 接力下一個 ───</a:t>
             </a:r>
           </a:p>
         </p:txBody>
@@ -9777,7 +9834,7 @@
                 </a:solidFill>
                 <a:latin typeface="Microsoft JhengHei UI"/>
               </a:rPr>
-              <a:t>Chapter 3 小結 — 3 輪循環完成</a:t>
+              <a:t>Chapter 3 小結 — 3 種 Lane 完成</a:t>
             </a:r>
           </a:p>
         </p:txBody>
@@ -9863,7 +9920,7 @@
                 </a:solidFill>
                 <a:latin typeface="Microsoft JhengHei UI"/>
               </a:rPr>
-              <a:t>第 1 輪:  後端 API    FastAPI + pytest</a:t>
+              <a:t>第 1 輪:  後端 API    (standard) FastAPI + pytest</a:t>
             </a:r>
           </a:p>
           <a:p>
@@ -9882,7 +9939,7 @@
                 </a:solidFill>
                 <a:latin typeface="Microsoft JhengHei UI"/>
               </a:rPr>
-              <a:t>第 2 輪:  前端 UI     React + Vitest</a:t>
+              <a:t>第 2 輪:  前端 UI     (standard) React + Vitest</a:t>
             </a:r>
           </a:p>
           <a:p>
@@ -9901,7 +9958,7 @@
                 </a:solidFill>
                 <a:latin typeface="Microsoft JhengHei UI"/>
               </a:rPr>
-              <a:t>第 3 輪:  Bug 修復   /build-fix</a:t>
+              <a:t>第 3 輪:  Bug 修復   (quick) 直接寫 + /verify</a:t>
             </a:r>
           </a:p>
           <a:p>
@@ -9939,26 +9996,64 @@
                 </a:solidFill>
                 <a:latin typeface="Microsoft JhengHei UI"/>
               </a:rPr>
-              <a:t>核心流程：</a:t>
-            </a:r>
-          </a:p>
-          <a:p>
-            <a:pPr algn="l">
-              <a:spcBef>
-                <a:spcPts val="0"/>
-              </a:spcBef>
-              <a:spcAft>
-                <a:spcPts val="800"/>
-              </a:spcAft>
-            </a:pPr>
-            <a:r>
-              <a:rPr sz="2200" b="0" i="0">
-                <a:solidFill>
-                  <a:srgbClr val="1A6BE5"/>
-                </a:solidFill>
-                <a:latin typeface="Microsoft JhengHei UI"/>
-              </a:rPr>
-              <a:t>/task-next → /plan → /tdd → /review-code → commit</a:t>
+              <a:t>核心流程（依模式分流）：</a:t>
+            </a:r>
+          </a:p>
+          <a:p>
+            <a:pPr algn="l">
+              <a:spcBef>
+                <a:spcPts val="0"/>
+              </a:spcBef>
+              <a:spcAft>
+                <a:spcPts val="800"/>
+              </a:spcAft>
+            </a:pPr>
+            <a:r>
+              <a:rPr sz="2000" b="0" i="0">
+                <a:solidFill>
+                  <a:srgbClr val="1B8C4E"/>
+                </a:solidFill>
+                <a:latin typeface="Microsoft JhengHei UI"/>
+              </a:rPr>
+              <a:t>quick     →  直接寫 → /verify</a:t>
+            </a:r>
+          </a:p>
+          <a:p>
+            <a:pPr algn="l">
+              <a:spcBef>
+                <a:spcPts val="0"/>
+              </a:spcBef>
+              <a:spcAft>
+                <a:spcPts val="800"/>
+              </a:spcAft>
+            </a:pPr>
+            <a:r>
+              <a:rPr sz="2000" b="0" i="0">
+                <a:solidFill>
+                  <a:srgbClr val="1A1A1A"/>
+                </a:solidFill>
+                <a:latin typeface="Microsoft JhengHei UI"/>
+              </a:rPr>
+              <a:t>standard  →  /plan → /tdd (80%) → /review-code → /verify</a:t>
+            </a:r>
+          </a:p>
+          <a:p>
+            <a:pPr algn="l">
+              <a:spcBef>
+                <a:spcPts val="0"/>
+              </a:spcBef>
+              <a:spcAft>
+                <a:spcPts val="800"/>
+              </a:spcAft>
+            </a:pPr>
+            <a:r>
+              <a:rPr sz="2000" b="0" i="0">
+                <a:solidFill>
+                  <a:srgbClr val="C48A0A"/>
+                </a:solidFill>
+                <a:latin typeface="Microsoft JhengHei UI"/>
+              </a:rPr>
+              <a:t>critical  →  /plan → /tdd (100%) → /review-code → /verify</a:t>
             </a:r>
           </a:p>
           <a:p>
@@ -9990,7 +10085,7 @@
               </a:spcAft>
             </a:pPr>
             <a:r>
-              <a:rPr sz="2000" b="1" i="0">
+              <a:rPr sz="1800" b="1" i="0">
                 <a:solidFill>
                   <a:srgbClr val="1B8C4E"/>
                 </a:solidFill>
@@ -10009,7 +10104,7 @@
               </a:spcAft>
             </a:pPr>
             <a:r>
-              <a:rPr sz="1600" b="0" i="0">
+              <a:rPr sz="1500" b="0" i="0">
                 <a:solidFill>
                   <a:srgbClr val="37373C"/>
                 </a:solidFill>
@@ -10431,7 +10526,7 @@
                 </a:solidFill>
                 <a:latin typeface="Microsoft JhengHei UI"/>
               </a:rPr>
-              <a:t>/verify — 三道品質門</a:t>
+              <a:t>/verify — 三道品質門（依模式自動）</a:t>
             </a:r>
           </a:p>
         </p:txBody>

--- a/workshop/docs/slides/VibeCoding_Workshop.pptx
+++ b/workshop/docs/slides/VibeCoding_Workshop.pptx
@@ -4522,7 +4522,7 @@
     <p:bg>
       <p:bgPr>
         <a:solidFill>
-          <a:srgbClr val="FAFAFC"/>
+          <a:srgbClr val="F7F4ED"/>
         </a:solidFill>
         <a:effectLst/>
       </p:bgPr>
@@ -4560,9 +4560,9 @@
             <a:r>
               <a:rPr sz="4400" b="1" i="0">
                 <a:solidFill>
-                  <a:srgbClr val="1A1A1A"/>
-                </a:solidFill>
-                <a:latin typeface="Microsoft JhengHei UI"/>
+                  <a:srgbClr val="1C1C1C"/>
+                </a:solidFill>
+                <a:latin typeface="Segoe UI"/>
               </a:rPr>
               <a:t>VibeCoding 模板實戰 Workshop</a:t>
             </a:r>
@@ -4579,9 +4579,9 @@
             <a:r>
               <a:rPr sz="2200" b="0" i="0">
                 <a:solidFill>
-                  <a:srgbClr val="6B6B76"/>
-                </a:solidFill>
-                <a:latin typeface="Microsoft JhengHei UI"/>
+                  <a:srgbClr val="5F5F5D"/>
+                </a:solidFill>
+                <a:latin typeface="Segoe UI"/>
               </a:rPr>
               <a:t>用 Claude Code 跑完一個專案的開發工作流</a:t>
             </a:r>
@@ -4603,7 +4603,7 @@
             <a:avLst/>
           </a:prstGeom>
           <a:solidFill>
-            <a:srgbClr val="1A6BE5"/>
+            <a:srgbClr val="1C1C1C"/>
           </a:solidFill>
           <a:ln>
             <a:noFill/>
@@ -4645,7 +4645,7 @@
     <p:bg>
       <p:bgPr>
         <a:solidFill>
-          <a:srgbClr val="FAFAFC"/>
+          <a:srgbClr val="F7F4ED"/>
         </a:solidFill>
         <a:effectLst/>
       </p:bgPr>
@@ -4682,9 +4682,9 @@
             <a:r>
               <a:rPr sz="3200" b="1" i="0">
                 <a:solidFill>
-                  <a:srgbClr val="1A1A1A"/>
-                </a:solidFill>
-                <a:latin typeface="Microsoft JhengHei UI"/>
+                  <a:srgbClr val="1C1C1C"/>
+                </a:solidFill>
+                <a:latin typeface="Segoe UI"/>
               </a:rPr>
               <a:t>今天的旅程</a:t>
             </a:r>
@@ -4706,7 +4706,7 @@
             <a:avLst/>
           </a:prstGeom>
           <a:solidFill>
-            <a:srgbClr val="1A6BE5"/>
+            <a:srgbClr val="1C1C1C"/>
           </a:solidFill>
           <a:ln>
             <a:noFill/>
@@ -4768,9 +4768,9 @@
             <a:r>
               <a:rPr sz="2200" b="1" i="0">
                 <a:solidFill>
-                  <a:srgbClr val="1A6BE5"/>
-                </a:solidFill>
-                <a:latin typeface="Microsoft JhengHei UI"/>
+                  <a:srgbClr val="1C1C1C"/>
+                </a:solidFill>
+                <a:latin typeface="Segoe UI"/>
               </a:rPr>
               <a:t>Ch1   認識模板                10 min  ← 你在這裡</a:t>
             </a:r>
@@ -4787,9 +4787,9 @@
             <a:r>
               <a:rPr sz="2200" b="0" i="0">
                 <a:solidFill>
-                  <a:srgbClr val="1A1A1A"/>
-                </a:solidFill>
-                <a:latin typeface="Microsoft JhengHei UI"/>
+                  <a:srgbClr val="1C1C1C"/>
+                </a:solidFill>
+                <a:latin typeface="Segoe UI"/>
               </a:rPr>
               <a:t>Ch2   專案初始化             15 min</a:t>
             </a:r>
@@ -4806,9 +4806,9 @@
             <a:r>
               <a:rPr sz="2200" b="1" i="0">
                 <a:solidFill>
-                  <a:srgbClr val="C48A0A"/>
-                </a:solidFill>
-                <a:latin typeface="Microsoft JhengHei UI"/>
+                  <a:srgbClr val="9A7B3A"/>
+                </a:solidFill>
+                <a:latin typeface="Segoe UI"/>
               </a:rPr>
               <a:t>Ch3   開發循環 x3            25 min   ⭐ 核心</a:t>
             </a:r>
@@ -4825,9 +4825,9 @@
             <a:r>
               <a:rPr sz="2200" b="0" i="0">
                 <a:solidFill>
-                  <a:srgbClr val="1A1A1A"/>
-                </a:solidFill>
-                <a:latin typeface="Microsoft JhengHei UI"/>
+                  <a:srgbClr val="1C1C1C"/>
+                </a:solidFill>
+                <a:latin typeface="Segoe UI"/>
               </a:rPr>
               <a:t>Ch4   品質驗證                10 min</a:t>
             </a:r>
@@ -4844,9 +4844,9 @@
             <a:r>
               <a:rPr sz="2200" b="0" i="0">
                 <a:solidFill>
-                  <a:srgbClr val="1A1A1A"/>
-                </a:solidFill>
-                <a:latin typeface="Microsoft JhengHei UI"/>
+                  <a:srgbClr val="1C1C1C"/>
+                </a:solidFill>
+                <a:latin typeface="Segoe UI"/>
               </a:rPr>
               <a:t>Ch5   進階 + Q&amp;A             10 min</a:t>
             </a:r>
@@ -4863,9 +4863,9 @@
             <a:r>
               <a:rPr sz="1200" b="0" i="0">
                 <a:solidFill>
-                  <a:srgbClr val="1A1A1A"/>
-                </a:solidFill>
-                <a:latin typeface="Microsoft JhengHei UI"/>
+                  <a:srgbClr val="1C1C1C"/>
+                </a:solidFill>
+                <a:latin typeface="Segoe UI"/>
               </a:rPr>
               <a:t/>
             </a:r>
@@ -4882,9 +4882,9 @@
             <a:r>
               <a:rPr sz="2000" b="1" i="0">
                 <a:solidFill>
-                  <a:srgbClr val="1B8C4E"/>
-                </a:solidFill>
-                <a:latin typeface="Microsoft JhengHei UI"/>
+                  <a:srgbClr val="5B7A52"/>
+                </a:solidFill>
+                <a:latin typeface="Segoe UI"/>
               </a:rPr>
               <a:t>→  70 分鐘後，你會了一套 AI 開發工作流</a:t>
             </a:r>
@@ -4905,7 +4905,7 @@
     <p:bg>
       <p:bgPr>
         <a:solidFill>
-          <a:srgbClr val="FAFAFC"/>
+          <a:srgbClr val="F7F4ED"/>
         </a:solidFill>
         <a:effectLst/>
       </p:bgPr>
@@ -4943,9 +4943,9 @@
             <a:r>
               <a:rPr sz="2000" b="0" i="0">
                 <a:solidFill>
-                  <a:srgbClr val="1A6BE5"/>
-                </a:solidFill>
-                <a:latin typeface="Microsoft JhengHei UI"/>
+                  <a:srgbClr val="1C1C1C"/>
+                </a:solidFill>
+                <a:latin typeface="Segoe UI"/>
               </a:rPr>
               <a:t>Chapter 2</a:t>
             </a:r>
@@ -4978,9 +4978,9 @@
             <a:r>
               <a:rPr sz="4000" b="1" i="0">
                 <a:solidFill>
-                  <a:srgbClr val="1A1A1A"/>
-                </a:solidFill>
-                <a:latin typeface="Microsoft JhengHei UI"/>
+                  <a:srgbClr val="1C1C1C"/>
+                </a:solidFill>
+                <a:latin typeface="Segoe UI"/>
               </a:rPr>
               <a:t>專案初始化</a:t>
             </a:r>
@@ -5001,7 +5001,7 @@
     <p:bg>
       <p:bgPr>
         <a:solidFill>
-          <a:srgbClr val="FAFAFC"/>
+          <a:srgbClr val="F7F4ED"/>
         </a:solidFill>
         <a:effectLst/>
       </p:bgPr>
@@ -5038,9 +5038,9 @@
             <a:r>
               <a:rPr sz="3200" b="1" i="0">
                 <a:solidFill>
-                  <a:srgbClr val="1A1A1A"/>
-                </a:solidFill>
-                <a:latin typeface="Microsoft JhengHei UI"/>
+                  <a:srgbClr val="1C1C1C"/>
+                </a:solidFill>
+                <a:latin typeface="Segoe UI"/>
               </a:rPr>
               <a:t>一切從 /task-init 開始</a:t>
             </a:r>
@@ -5062,7 +5062,7 @@
             <a:avLst/>
           </a:prstGeom>
           <a:solidFill>
-            <a:srgbClr val="1A6BE5"/>
+            <a:srgbClr val="1C1C1C"/>
           </a:solidFill>
           <a:ln>
             <a:noFill/>
@@ -5124,9 +5124,9 @@
             <a:r>
               <a:rPr sz="2400" b="1" i="0">
                 <a:solidFill>
-                  <a:srgbClr val="1A6BE5"/>
-                </a:solidFill>
-                <a:latin typeface="Microsoft JhengHei UI"/>
+                  <a:srgbClr val="1C1C1C"/>
+                </a:solidFill>
+                <a:latin typeface="Segoe UI"/>
               </a:rPr>
               <a:t>你輸入：  /task-init TaskFlow</a:t>
             </a:r>
@@ -5143,9 +5143,9 @@
             <a:r>
               <a:rPr sz="800" b="0" i="0">
                 <a:solidFill>
-                  <a:srgbClr val="1A1A1A"/>
-                </a:solidFill>
-                <a:latin typeface="Microsoft JhengHei UI"/>
+                  <a:srgbClr val="1C1C1C"/>
+                </a:solidFill>
+                <a:latin typeface="Segoe UI"/>
               </a:rPr>
               <a:t/>
             </a:r>
@@ -5162,9 +5162,9 @@
             <a:r>
               <a:rPr sz="2000" b="1" i="0">
                 <a:solidFill>
-                  <a:srgbClr val="1A1A1A"/>
-                </a:solidFill>
-                <a:latin typeface="Microsoft JhengHei UI"/>
+                  <a:srgbClr val="1C1C1C"/>
+                </a:solidFill>
+                <a:latin typeface="Segoe UI"/>
               </a:rPr>
               <a:t>AI 會做：</a:t>
             </a:r>
@@ -5181,9 +5181,9 @@
             <a:r>
               <a:rPr sz="2000" b="0" i="0">
                 <a:solidFill>
-                  <a:srgbClr val="1A1A1A"/>
-                </a:solidFill>
-                <a:latin typeface="Microsoft JhengHei UI"/>
+                  <a:srgbClr val="1C1C1C"/>
+                </a:solidFill>
+                <a:latin typeface="Segoe UI"/>
               </a:rPr>
               <a:t>  1.  問你一系列問題（互動式 Q&amp;A）</a:t>
             </a:r>
@@ -5200,9 +5200,9 @@
             <a:r>
               <a:rPr sz="1600" b="0" i="0">
                 <a:solidFill>
-                  <a:srgbClr val="6B6B76"/>
-                </a:solidFill>
-                <a:latin typeface="Microsoft JhengHei UI"/>
+                  <a:srgbClr val="5F5F5D"/>
+                </a:solidFill>
+                <a:latin typeface="Segoe UI"/>
               </a:rPr>
               <a:t>        • 專案做什麼？用什麼技術？範圍多大？</a:t>
             </a:r>
@@ -5219,9 +5219,9 @@
             <a:r>
               <a:rPr sz="2000" b="0" i="0">
                 <a:solidFill>
-                  <a:srgbClr val="1A1A1A"/>
-                </a:solidFill>
-                <a:latin typeface="Microsoft JhengHei UI"/>
+                  <a:srgbClr val="1C1C1C"/>
+                </a:solidFill>
+                <a:latin typeface="Segoe UI"/>
               </a:rPr>
               <a:t>  2.  根據回答自動產出：</a:t>
             </a:r>
@@ -5238,9 +5238,9 @@
             <a:r>
               <a:rPr sz="1800" b="0" i="0">
                 <a:solidFill>
-                  <a:srgbClr val="1B8C4E"/>
-                </a:solidFill>
-                <a:latin typeface="Microsoft JhengHei UI"/>
+                  <a:srgbClr val="5B7A52"/>
+                </a:solidFill>
+                <a:latin typeface="Segoe UI"/>
               </a:rPr>
               <a:t>        • CLAUDE.md  — 專案說明書</a:t>
             </a:r>
@@ -5257,9 +5257,9 @@
             <a:r>
               <a:rPr sz="1800" b="0" i="0">
                 <a:solidFill>
-                  <a:srgbClr val="1B8C4E"/>
-                </a:solidFill>
-                <a:latin typeface="Microsoft JhengHei UI"/>
+                  <a:srgbClr val="5B7A52"/>
+                </a:solidFill>
+                <a:latin typeface="Segoe UI"/>
               </a:rPr>
               <a:t>        • wbs.md     — 任務拆解</a:t>
             </a:r>
@@ -5276,9 +5276,9 @@
             <a:r>
               <a:rPr sz="2000" b="0" i="0">
                 <a:solidFill>
-                  <a:srgbClr val="1A1A1A"/>
-                </a:solidFill>
-                <a:latin typeface="Microsoft JhengHei UI"/>
+                  <a:srgbClr val="1C1C1C"/>
+                </a:solidFill>
+                <a:latin typeface="Segoe UI"/>
               </a:rPr>
               <a:t>  3.  從此 AI 每次對話都知道你的專案脈絡</a:t>
             </a:r>
@@ -5299,7 +5299,7 @@
     <p:bg>
       <p:bgPr>
         <a:solidFill>
-          <a:srgbClr val="FAFAFC"/>
+          <a:srgbClr val="F7F4ED"/>
         </a:solidFill>
         <a:effectLst/>
       </p:bgPr>
@@ -5336,9 +5336,9 @@
             <a:r>
               <a:rPr sz="3200" b="1" i="0">
                 <a:solidFill>
-                  <a:srgbClr val="1A1A1A"/>
-                </a:solidFill>
-                <a:latin typeface="Microsoft JhengHei UI"/>
+                  <a:srgbClr val="1C1C1C"/>
+                </a:solidFill>
+                <a:latin typeface="Segoe UI"/>
               </a:rPr>
               <a:t>MVP vs Complete 模式</a:t>
             </a:r>
@@ -5360,7 +5360,7 @@
             <a:avLst/>
           </a:prstGeom>
           <a:solidFill>
-            <a:srgbClr val="1A6BE5"/>
+            <a:srgbClr val="1C1C1C"/>
           </a:solidFill>
           <a:ln>
             <a:noFill/>
@@ -5413,9 +5413,9 @@
             <a:r>
               <a:rPr sz="2200" b="1" i="0">
                 <a:solidFill>
-                  <a:srgbClr val="1A6BE5"/>
-                </a:solidFill>
-                <a:latin typeface="Microsoft JhengHei UI"/>
+                  <a:srgbClr val="1C1C1C"/>
+                </a:solidFill>
+                <a:latin typeface="Segoe UI"/>
               </a:rPr>
               <a:t>MVP 模式  ← 今天用這個</a:t>
             </a:r>
@@ -5432,9 +5432,9 @@
             <a:r>
               <a:rPr sz="1800" b="0" i="0">
                 <a:solidFill>
-                  <a:srgbClr val="1A1A1A"/>
-                </a:solidFill>
-                <a:latin typeface="Microsoft JhengHei UI"/>
+                  <a:srgbClr val="1C1C1C"/>
+                </a:solidFill>
+                <a:latin typeface="Segoe UI"/>
               </a:rPr>
               <a:t>輕量 Tech Spec</a:t>
             </a:r>
@@ -5451,9 +5451,9 @@
             <a:r>
               <a:rPr sz="1800" b="0" i="0">
                 <a:solidFill>
-                  <a:srgbClr val="1A1A1A"/>
-                </a:solidFill>
-                <a:latin typeface="Microsoft JhengHei UI"/>
+                  <a:srgbClr val="1C1C1C"/>
+                </a:solidFill>
+                <a:latin typeface="Segoe UI"/>
               </a:rPr>
               <a:t>快速驗證想法</a:t>
             </a:r>
@@ -5470,9 +5470,9 @@
             <a:r>
               <a:rPr sz="1800" b="0" i="0">
                 <a:solidFill>
-                  <a:srgbClr val="1A1A1A"/>
-                </a:solidFill>
-                <a:latin typeface="Microsoft JhengHei UI"/>
+                  <a:srgbClr val="1C1C1C"/>
+                </a:solidFill>
+                <a:latin typeface="Segoe UI"/>
               </a:rPr>
               <a:t>1-2 人小專案</a:t>
             </a:r>
@@ -5489,9 +5489,9 @@
             <a:r>
               <a:rPr sz="1800" b="0" i="0">
                 <a:solidFill>
-                  <a:srgbClr val="1A1A1A"/>
-                </a:solidFill>
-                <a:latin typeface="Microsoft JhengHei UI"/>
+                  <a:srgbClr val="1C1C1C"/>
+                </a:solidFill>
+                <a:latin typeface="Segoe UI"/>
               </a:rPr>
               <a:t>原型 / POC</a:t>
             </a:r>
@@ -5508,9 +5508,9 @@
             <a:r>
               <a:rPr sz="1800" b="0" i="0">
                 <a:solidFill>
-                  <a:srgbClr val="1A1A1A"/>
-                </a:solidFill>
-                <a:latin typeface="Microsoft JhengHei UI"/>
+                  <a:srgbClr val="1C1C1C"/>
+                </a:solidFill>
+                <a:latin typeface="Segoe UI"/>
               </a:rPr>
               <a:t/>
             </a:r>
@@ -5527,9 +5527,9 @@
             <a:r>
               <a:rPr sz="1800" b="0" i="0">
                 <a:solidFill>
-                  <a:srgbClr val="6B6B76"/>
-                </a:solidFill>
-                <a:latin typeface="Microsoft JhengHei UI"/>
+                  <a:srgbClr val="5F5F5D"/>
+                </a:solidFill>
+                <a:latin typeface="Segoe UI"/>
               </a:rPr>
               <a:t>隨時可升級為 Complete</a:t>
             </a:r>
@@ -5561,9 +5561,9 @@
             <a:r>
               <a:rPr sz="2200" b="1" i="0">
                 <a:solidFill>
-                  <a:srgbClr val="1B8C4E"/>
-                </a:solidFill>
-                <a:latin typeface="Microsoft JhengHei UI"/>
+                  <a:srgbClr val="5B7A52"/>
+                </a:solidFill>
+                <a:latin typeface="Segoe UI"/>
               </a:rPr>
               <a:t>Complete 模式</a:t>
             </a:r>
@@ -5580,9 +5580,9 @@
             <a:r>
               <a:rPr sz="1800" b="0" i="0">
                 <a:solidFill>
-                  <a:srgbClr val="1A1A1A"/>
-                </a:solidFill>
-                <a:latin typeface="Microsoft JhengHei UI"/>
+                  <a:srgbClr val="1C1C1C"/>
+                </a:solidFill>
+                <a:latin typeface="Segoe UI"/>
               </a:rPr>
               <a:t>完整 16 份文件</a:t>
             </a:r>
@@ -5599,9 +5599,9 @@
             <a:r>
               <a:rPr sz="1800" b="0" i="0">
                 <a:solidFill>
-                  <a:srgbClr val="1A1A1A"/>
-                </a:solidFill>
-                <a:latin typeface="Microsoft JhengHei UI"/>
+                  <a:srgbClr val="1C1C1C"/>
+                </a:solidFill>
+                <a:latin typeface="Segoe UI"/>
               </a:rPr>
               <a:t>每個決策有文件記錄</a:t>
             </a:r>
@@ -5618,9 +5618,9 @@
             <a:r>
               <a:rPr sz="1800" b="0" i="0">
                 <a:solidFill>
-                  <a:srgbClr val="1A1A1A"/>
-                </a:solidFill>
-                <a:latin typeface="Microsoft JhengHei UI"/>
+                  <a:srgbClr val="1C1C1C"/>
+                </a:solidFill>
+                <a:latin typeface="Segoe UI"/>
               </a:rPr>
               <a:t>3+ 人團隊專案</a:t>
             </a:r>
@@ -5637,9 +5637,9 @@
             <a:r>
               <a:rPr sz="1800" b="0" i="0">
                 <a:solidFill>
-                  <a:srgbClr val="1A1A1A"/>
-                </a:solidFill>
-                <a:latin typeface="Microsoft JhengHei UI"/>
+                  <a:srgbClr val="1C1C1C"/>
+                </a:solidFill>
+                <a:latin typeface="Segoe UI"/>
               </a:rPr>
               <a:t>正式產品 / 合規需求</a:t>
             </a:r>
@@ -5656,9 +5656,9 @@
             <a:r>
               <a:rPr sz="1800" b="0" i="0">
                 <a:solidFill>
-                  <a:srgbClr val="1A1A1A"/>
-                </a:solidFill>
-                <a:latin typeface="Microsoft JhengHei UI"/>
+                  <a:srgbClr val="1C1C1C"/>
+                </a:solidFill>
+                <a:latin typeface="Segoe UI"/>
               </a:rPr>
               <a:t/>
             </a:r>
@@ -5675,9 +5675,9 @@
             <a:r>
               <a:rPr sz="1800" b="0" i="0">
                 <a:solidFill>
-                  <a:srgbClr val="6B6B76"/>
-                </a:solidFill>
-                <a:latin typeface="Microsoft JhengHei UI"/>
+                  <a:srgbClr val="5F5F5D"/>
+                </a:solidFill>
+                <a:latin typeface="Segoe UI"/>
               </a:rPr>
               <a:t>大專案、正式產品用這個</a:t>
             </a:r>
@@ -5698,7 +5698,7 @@
     <p:bg>
       <p:bgPr>
         <a:solidFill>
-          <a:srgbClr val="FAFAFC"/>
+          <a:srgbClr val="F7F4ED"/>
         </a:solidFill>
         <a:effectLst/>
       </p:bgPr>
@@ -5735,9 +5735,9 @@
             <a:r>
               <a:rPr sz="3200" b="1" i="0">
                 <a:solidFill>
-                  <a:srgbClr val="1A1A1A"/>
-                </a:solidFill>
-                <a:latin typeface="Microsoft JhengHei UI"/>
+                  <a:srgbClr val="1C1C1C"/>
+                </a:solidFill>
+                <a:latin typeface="Segoe UI"/>
               </a:rPr>
               <a:t>CLAUDE.md = 專案的「身分證」</a:t>
             </a:r>
@@ -5759,7 +5759,7 @@
             <a:avLst/>
           </a:prstGeom>
           <a:solidFill>
-            <a:srgbClr val="1A6BE5"/>
+            <a:srgbClr val="1C1C1C"/>
           </a:solidFill>
           <a:ln>
             <a:noFill/>
@@ -5821,9 +5821,9 @@
             <a:r>
               <a:rPr sz="2000" b="1" i="0">
                 <a:solidFill>
-                  <a:srgbClr val="1A6BE5"/>
-                </a:solidFill>
-                <a:latin typeface="Microsoft JhengHei UI"/>
+                  <a:srgbClr val="1C1C1C"/>
+                </a:solidFill>
+                <a:latin typeface="Segoe UI"/>
               </a:rPr>
               <a:t>AI 每次對話都會自動讀取這份檔案</a:t>
             </a:r>
@@ -5840,9 +5840,9 @@
             <a:r>
               <a:rPr sz="800" b="0" i="0">
                 <a:solidFill>
-                  <a:srgbClr val="1A1A1A"/>
-                </a:solidFill>
-                <a:latin typeface="Microsoft JhengHei UI"/>
+                  <a:srgbClr val="1C1C1C"/>
+                </a:solidFill>
+                <a:latin typeface="Segoe UI"/>
               </a:rPr>
               <a:t/>
             </a:r>
@@ -5859,9 +5859,9 @@
             <a:r>
               <a:rPr sz="2000" b="0" i="0">
                 <a:solidFill>
-                  <a:srgbClr val="1A1A1A"/>
-                </a:solidFill>
-                <a:latin typeface="Microsoft JhengHei UI"/>
+                  <a:srgbClr val="1C1C1C"/>
+                </a:solidFill>
+                <a:latin typeface="Segoe UI"/>
               </a:rPr>
               <a:t>•  知道專案用什麼技術棧</a:t>
             </a:r>
@@ -5878,9 +5878,9 @@
             <a:r>
               <a:rPr sz="2000" b="0" i="0">
                 <a:solidFill>
-                  <a:srgbClr val="1A1A1A"/>
-                </a:solidFill>
-                <a:latin typeface="Microsoft JhengHei UI"/>
+                  <a:srgbClr val="1C1C1C"/>
+                </a:solidFill>
+                <a:latin typeface="Segoe UI"/>
               </a:rPr>
               <a:t>•  知道程式碼規範（命名、風格）</a:t>
             </a:r>
@@ -5897,9 +5897,9 @@
             <a:r>
               <a:rPr sz="2000" b="0" i="0">
                 <a:solidFill>
-                  <a:srgbClr val="1A1A1A"/>
-                </a:solidFill>
-                <a:latin typeface="Microsoft JhengHei UI"/>
+                  <a:srgbClr val="1C1C1C"/>
+                </a:solidFill>
+                <a:latin typeface="Segoe UI"/>
               </a:rPr>
               <a:t>•  知道目錄結構</a:t>
             </a:r>
@@ -5916,9 +5916,9 @@
             <a:r>
               <a:rPr sz="2000" b="0" i="0">
                 <a:solidFill>
-                  <a:srgbClr val="1A1A1A"/>
-                </a:solidFill>
-                <a:latin typeface="Microsoft JhengHei UI"/>
+                  <a:srgbClr val="1C1C1C"/>
+                </a:solidFill>
+                <a:latin typeface="Segoe UI"/>
               </a:rPr>
               <a:t>•  知道測試策略</a:t>
             </a:r>
@@ -5935,9 +5935,9 @@
             <a:r>
               <a:rPr sz="2000" b="0" i="0">
                 <a:solidFill>
-                  <a:srgbClr val="1A1A1A"/>
-                </a:solidFill>
-                <a:latin typeface="Microsoft JhengHei UI"/>
+                  <a:srgbClr val="1C1C1C"/>
+                </a:solidFill>
+                <a:latin typeface="Segoe UI"/>
               </a:rPr>
               <a:t>•  知道部署方式</a:t>
             </a:r>
@@ -5954,9 +5954,9 @@
             <a:r>
               <a:rPr sz="1200" b="0" i="0">
                 <a:solidFill>
-                  <a:srgbClr val="1A1A1A"/>
-                </a:solidFill>
-                <a:latin typeface="Microsoft JhengHei UI"/>
+                  <a:srgbClr val="1C1C1C"/>
+                </a:solidFill>
+                <a:latin typeface="Segoe UI"/>
               </a:rPr>
               <a:t/>
             </a:r>
@@ -5973,9 +5973,9 @@
             <a:r>
               <a:rPr sz="2000" b="0" i="0">
                 <a:solidFill>
-                  <a:srgbClr val="1B8C4E"/>
-                </a:solidFill>
-                <a:latin typeface="Microsoft JhengHei UI"/>
+                  <a:srgbClr val="5B7A52"/>
+                </a:solidFill>
+                <a:latin typeface="Segoe UI"/>
               </a:rPr>
               <a:t>→  你不需要每次重新解釋</a:t>
             </a:r>
@@ -5992,9 +5992,9 @@
             <a:r>
               <a:rPr sz="2000" b="0" i="0">
                 <a:solidFill>
-                  <a:srgbClr val="1B8C4E"/>
-                </a:solidFill>
-                <a:latin typeface="Microsoft JhengHei UI"/>
+                  <a:srgbClr val="5B7A52"/>
+                </a:solidFill>
+                <a:latin typeface="Segoe UI"/>
               </a:rPr>
               <a:t>→  團隊成員接手也能立刻上手</a:t>
             </a:r>
@@ -6015,7 +6015,7 @@
     <p:bg>
       <p:bgPr>
         <a:solidFill>
-          <a:srgbClr val="FAFAFC"/>
+          <a:srgbClr val="F7F4ED"/>
         </a:solidFill>
         <a:effectLst/>
       </p:bgPr>
@@ -6052,9 +6052,9 @@
             <a:r>
               <a:rPr sz="3000" b="1" i="0">
                 <a:solidFill>
-                  <a:srgbClr val="1A1A1A"/>
-                </a:solidFill>
-                <a:latin typeface="Microsoft JhengHei UI"/>
+                  <a:srgbClr val="1C1C1C"/>
+                </a:solidFill>
+                <a:latin typeface="Segoe UI"/>
               </a:rPr>
               <a:t>WBS = 自動拆解的任務清單</a:t>
             </a:r>
@@ -6076,11 +6076,11 @@
             <a:avLst/>
           </a:prstGeom>
           <a:solidFill>
-            <a:srgbClr val="F0F2F5"/>
+            <a:srgbClr val="ECEAE4"/>
           </a:solidFill>
           <a:ln w="12700">
             <a:solidFill>
-              <a:srgbClr val="D8DAE0"/>
+              <a:srgbClr val="ECEAE4"/>
             </a:solidFill>
           </a:ln>
           <a:effectLst/>
@@ -6140,9 +6140,9 @@
             <a:r>
               <a:rPr sz="1600" b="0" i="0">
                 <a:solidFill>
-                  <a:srgbClr val="1A6BE5"/>
-                </a:solidFill>
-                <a:latin typeface="Microsoft JhengHei UI"/>
+                  <a:srgbClr val="1C1C1C"/>
+                </a:solidFill>
+                <a:latin typeface="Consolas"/>
               </a:rPr>
               <a:t>1.0 專案管理</a:t>
             </a:r>
@@ -6159,9 +6159,9 @@
             <a:r>
               <a:rPr sz="1600" b="0" i="0">
                 <a:solidFill>
-                  <a:srgbClr val="37373C"/>
-                </a:solidFill>
-                <a:latin typeface="Microsoft JhengHei UI"/>
+                  <a:srgbClr val="3D3D3D"/>
+                </a:solidFill>
+                <a:latin typeface="Consolas"/>
               </a:rPr>
               <a:t>├── 1.1 需求分析          ← /task-init 產出</a:t>
             </a:r>
@@ -6178,9 +6178,9 @@
             <a:r>
               <a:rPr sz="1600" b="0" i="0">
                 <a:solidFill>
-                  <a:srgbClr val="37373C"/>
-                </a:solidFill>
-                <a:latin typeface="Microsoft JhengHei UI"/>
+                  <a:srgbClr val="3D3D3D"/>
+                </a:solidFill>
+                <a:latin typeface="Consolas"/>
               </a:rPr>
               <a:t>└── 1.2 架構設計</a:t>
             </a:r>
@@ -6197,9 +6197,9 @@
             <a:r>
               <a:rPr sz="1600" b="0" i="0">
                 <a:solidFill>
-                  <a:srgbClr val="A0A0AA"/>
-                </a:solidFill>
-                <a:latin typeface="Microsoft JhengHei UI"/>
+                  <a:srgbClr val="A8A6A0"/>
+                </a:solidFill>
+                <a:latin typeface="Consolas"/>
               </a:rPr>
               <a:t/>
             </a:r>
@@ -6216,9 +6216,9 @@
             <a:r>
               <a:rPr sz="1600" b="0" i="0">
                 <a:solidFill>
-                  <a:srgbClr val="1A6BE5"/>
-                </a:solidFill>
-                <a:latin typeface="Microsoft JhengHei UI"/>
+                  <a:srgbClr val="1C1C1C"/>
+                </a:solidFill>
+                <a:latin typeface="Consolas"/>
               </a:rPr>
               <a:t>2.0 後端開發</a:t>
             </a:r>
@@ -6235,9 +6235,9 @@
             <a:r>
               <a:rPr sz="1600" b="0" i="0">
                 <a:solidFill>
-                  <a:srgbClr val="1B8C4E"/>
-                </a:solidFill>
-                <a:latin typeface="Microsoft JhengHei UI"/>
+                  <a:srgbClr val="5B7A52"/>
+                </a:solidFill>
+                <a:latin typeface="Consolas"/>
               </a:rPr>
               <a:t>├── 2.1 基礎架構          ← /task-next 會指派</a:t>
             </a:r>
@@ -6254,9 +6254,9 @@
             <a:r>
               <a:rPr sz="1600" b="0" i="0">
                 <a:solidFill>
-                  <a:srgbClr val="37373C"/>
-                </a:solidFill>
-                <a:latin typeface="Microsoft JhengHei UI"/>
+                  <a:srgbClr val="3D3D3D"/>
+                </a:solidFill>
+                <a:latin typeface="Consolas"/>
               </a:rPr>
               <a:t>├── 2.2 CRUD API</a:t>
             </a:r>
@@ -6273,9 +6273,9 @@
             <a:r>
               <a:rPr sz="1600" b="0" i="0">
                 <a:solidFill>
-                  <a:srgbClr val="37373C"/>
-                </a:solidFill>
-                <a:latin typeface="Microsoft JhengHei UI"/>
+                  <a:srgbClr val="3D3D3D"/>
+                </a:solidFill>
+                <a:latin typeface="Consolas"/>
               </a:rPr>
               <a:t>└── 2.3 篩選功能</a:t>
             </a:r>
@@ -6292,9 +6292,9 @@
             <a:r>
               <a:rPr sz="1600" b="0" i="0">
                 <a:solidFill>
-                  <a:srgbClr val="A0A0AA"/>
-                </a:solidFill>
-                <a:latin typeface="Microsoft JhengHei UI"/>
+                  <a:srgbClr val="A8A6A0"/>
+                </a:solidFill>
+                <a:latin typeface="Consolas"/>
               </a:rPr>
               <a:t/>
             </a:r>
@@ -6311,9 +6311,9 @@
             <a:r>
               <a:rPr sz="1600" b="0" i="0">
                 <a:solidFill>
-                  <a:srgbClr val="1A6BE5"/>
-                </a:solidFill>
-                <a:latin typeface="Microsoft JhengHei UI"/>
+                  <a:srgbClr val="1C1C1C"/>
+                </a:solidFill>
+                <a:latin typeface="Consolas"/>
               </a:rPr>
               <a:t>3.0 前端開發</a:t>
             </a:r>
@@ -6330,9 +6330,9 @@
             <a:r>
               <a:rPr sz="1600" b="0" i="0">
                 <a:solidFill>
-                  <a:srgbClr val="37373C"/>
-                </a:solidFill>
-                <a:latin typeface="Microsoft JhengHei UI"/>
+                  <a:srgbClr val="3D3D3D"/>
+                </a:solidFill>
+                <a:latin typeface="Consolas"/>
               </a:rPr>
               <a:t>├── 3.1 元件開發</a:t>
             </a:r>
@@ -6349,9 +6349,9 @@
             <a:r>
               <a:rPr sz="1600" b="0" i="0">
                 <a:solidFill>
-                  <a:srgbClr val="37373C"/>
-                </a:solidFill>
-                <a:latin typeface="Microsoft JhengHei UI"/>
+                  <a:srgbClr val="3D3D3D"/>
+                </a:solidFill>
+                <a:latin typeface="Consolas"/>
               </a:rPr>
               <a:t>└── 3.2 互動功能</a:t>
             </a:r>
@@ -6368,9 +6368,9 @@
             <a:r>
               <a:rPr sz="1600" b="0" i="0">
                 <a:solidFill>
-                  <a:srgbClr val="A0A0AA"/>
-                </a:solidFill>
-                <a:latin typeface="Microsoft JhengHei UI"/>
+                  <a:srgbClr val="A8A6A0"/>
+                </a:solidFill>
+                <a:latin typeface="Consolas"/>
               </a:rPr>
               <a:t/>
             </a:r>
@@ -6387,9 +6387,9 @@
             <a:r>
               <a:rPr sz="1600" b="0" i="0">
                 <a:solidFill>
-                  <a:srgbClr val="6B6B76"/>
-                </a:solidFill>
-                <a:latin typeface="Microsoft JhengHei UI"/>
+                  <a:srgbClr val="5F5F5D"/>
+                </a:solidFill>
+                <a:latin typeface="Consolas"/>
               </a:rPr>
               <a:t>每個任務有：編號 │ 負責人 │ 狀態 │ 工時</a:t>
             </a:r>
@@ -6410,7 +6410,7 @@
     <p:bg>
       <p:bgPr>
         <a:solidFill>
-          <a:srgbClr val="FAFAFC"/>
+          <a:srgbClr val="F7F4ED"/>
         </a:solidFill>
         <a:effectLst/>
       </p:bgPr>
@@ -6447,9 +6447,9 @@
             <a:r>
               <a:rPr sz="3000" b="1" i="0">
                 <a:solidFill>
-                  <a:srgbClr val="1A1A1A"/>
-                </a:solidFill>
-                <a:latin typeface="Microsoft JhengHei UI"/>
+                  <a:srgbClr val="1C1C1C"/>
+                </a:solidFill>
+                <a:latin typeface="Segoe UI"/>
               </a:rPr>
               <a:t>⚡ 現場操作 — /task-init</a:t>
             </a:r>
@@ -6471,11 +6471,11 @@
             <a:avLst/>
           </a:prstGeom>
           <a:solidFill>
-            <a:srgbClr val="F0F2F5"/>
+            <a:srgbClr val="ECEAE4"/>
           </a:solidFill>
           <a:ln w="12700">
             <a:solidFill>
-              <a:srgbClr val="D8DAE0"/>
+              <a:srgbClr val="ECEAE4"/>
             </a:solidFill>
           </a:ln>
           <a:effectLst/>
@@ -6535,9 +6535,9 @@
             <a:r>
               <a:rPr sz="1600" b="0" i="0">
                 <a:solidFill>
-                  <a:srgbClr val="6B6B76"/>
-                </a:solidFill>
-                <a:latin typeface="Microsoft JhengHei UI"/>
+                  <a:srgbClr val="5F5F5D"/>
+                </a:solidFill>
+                <a:latin typeface="Consolas"/>
               </a:rPr>
               <a:t># 1. 打開終端機</a:t>
             </a:r>
@@ -6554,9 +6554,9 @@
             <a:r>
               <a:rPr sz="1600" b="0" i="0">
                 <a:solidFill>
-                  <a:srgbClr val="1A1A1A"/>
-                </a:solidFill>
-                <a:latin typeface="Microsoft JhengHei UI"/>
+                  <a:srgbClr val="1C1C1C"/>
+                </a:solidFill>
+                <a:latin typeface="Consolas"/>
               </a:rPr>
               <a:t>cd /your/workspace</a:t>
             </a:r>
@@ -6573,9 +6573,9 @@
             <a:r>
               <a:rPr sz="1600" b="0" i="0">
                 <a:solidFill>
-                  <a:srgbClr val="1A6BE5"/>
-                </a:solidFill>
-                <a:latin typeface="Microsoft JhengHei UI"/>
+                  <a:srgbClr val="1C1C1C"/>
+                </a:solidFill>
+                <a:latin typeface="Consolas"/>
               </a:rPr>
               <a:t>claude</a:t>
             </a:r>
@@ -6592,9 +6592,9 @@
             <a:r>
               <a:rPr sz="1600" b="0" i="0">
                 <a:solidFill>
-                  <a:srgbClr val="A0A0AA"/>
-                </a:solidFill>
-                <a:latin typeface="Microsoft JhengHei UI"/>
+                  <a:srgbClr val="A8A6A0"/>
+                </a:solidFill>
+                <a:latin typeface="Consolas"/>
               </a:rPr>
               <a:t/>
             </a:r>
@@ -6611,9 +6611,9 @@
             <a:r>
               <a:rPr sz="1600" b="0" i="0">
                 <a:solidFill>
-                  <a:srgbClr val="6B6B76"/>
-                </a:solidFill>
-                <a:latin typeface="Microsoft JhengHei UI"/>
+                  <a:srgbClr val="5F5F5D"/>
+                </a:solidFill>
+                <a:latin typeface="Consolas"/>
               </a:rPr>
               <a:t># 2. 執行初始化</a:t>
             </a:r>
@@ -6630,9 +6630,9 @@
             <a:r>
               <a:rPr sz="1600" b="0" i="0">
                 <a:solidFill>
-                  <a:srgbClr val="1A6BE5"/>
-                </a:solidFill>
-                <a:latin typeface="Microsoft JhengHei UI"/>
+                  <a:srgbClr val="1C1C1C"/>
+                </a:solidFill>
+                <a:latin typeface="Consolas"/>
               </a:rPr>
               <a:t>/task-init TaskFlow</a:t>
             </a:r>
@@ -6649,9 +6649,9 @@
             <a:r>
               <a:rPr sz="1600" b="0" i="0">
                 <a:solidFill>
-                  <a:srgbClr val="A0A0AA"/>
-                </a:solidFill>
-                <a:latin typeface="Microsoft JhengHei UI"/>
+                  <a:srgbClr val="A8A6A0"/>
+                </a:solidFill>
+                <a:latin typeface="Consolas"/>
               </a:rPr>
               <a:t/>
             </a:r>
@@ -6668,9 +6668,9 @@
             <a:r>
               <a:rPr sz="1600" b="0" i="0">
                 <a:solidFill>
-                  <a:srgbClr val="6B6B76"/>
-                </a:solidFill>
-                <a:latin typeface="Microsoft JhengHei UI"/>
+                  <a:srgbClr val="5F5F5D"/>
+                </a:solidFill>
+                <a:latin typeface="Consolas"/>
               </a:rPr>
               <a:t># 3. 回答 AI 的問題</a:t>
             </a:r>
@@ -6687,9 +6687,9 @@
             <a:r>
               <a:rPr sz="1600" b="0" i="0">
                 <a:solidFill>
-                  <a:srgbClr val="1A1A1A"/>
-                </a:solidFill>
-                <a:latin typeface="Microsoft JhengHei UI"/>
+                  <a:srgbClr val="1C1C1C"/>
+                </a:solidFill>
+                <a:latin typeface="Consolas"/>
               </a:rPr>
               <a:t>專案描述：極簡待辦清單應用</a:t>
             </a:r>
@@ -6706,9 +6706,9 @@
             <a:r>
               <a:rPr sz="1600" b="0" i="0">
                 <a:solidFill>
-                  <a:srgbClr val="1A1A1A"/>
-                </a:solidFill>
-                <a:latin typeface="Microsoft JhengHei UI"/>
+                  <a:srgbClr val="1C1C1C"/>
+                </a:solidFill>
+                <a:latin typeface="Consolas"/>
               </a:rPr>
               <a:t>技術棧：  Python FastAPI + React + SQLite</a:t>
             </a:r>
@@ -6725,9 +6725,9 @@
             <a:r>
               <a:rPr sz="1600" b="0" i="0">
                 <a:solidFill>
-                  <a:srgbClr val="1A1A1A"/>
-                </a:solidFill>
-                <a:latin typeface="Microsoft JhengHei UI"/>
+                  <a:srgbClr val="1C1C1C"/>
+                </a:solidFill>
+                <a:latin typeface="Consolas"/>
               </a:rPr>
               <a:t>模式：    MVP</a:t>
             </a:r>
@@ -6744,9 +6744,9 @@
             <a:r>
               <a:rPr sz="1600" b="0" i="0">
                 <a:solidFill>
-                  <a:srgbClr val="1A1A1A"/>
-                </a:solidFill>
-                <a:latin typeface="Microsoft JhengHei UI"/>
+                  <a:srgbClr val="1C1C1C"/>
+                </a:solidFill>
+                <a:latin typeface="Consolas"/>
               </a:rPr>
               <a:t>功能：    CRUD + 分類篩選</a:t>
             </a:r>
@@ -6763,9 +6763,9 @@
             <a:r>
               <a:rPr sz="1600" b="0" i="0">
                 <a:solidFill>
-                  <a:srgbClr val="A0A0AA"/>
-                </a:solidFill>
-                <a:latin typeface="Microsoft JhengHei UI"/>
+                  <a:srgbClr val="A8A6A0"/>
+                </a:solidFill>
+                <a:latin typeface="Consolas"/>
               </a:rPr>
               <a:t/>
             </a:r>
@@ -6782,9 +6782,9 @@
             <a:r>
               <a:rPr sz="1600" b="0" i="0">
                 <a:solidFill>
-                  <a:srgbClr val="6B6B76"/>
-                </a:solidFill>
-                <a:latin typeface="Microsoft JhengHei UI"/>
+                  <a:srgbClr val="5F5F5D"/>
+                </a:solidFill>
+                <a:latin typeface="Consolas"/>
               </a:rPr>
               <a:t># 4. 檢查產出</a:t>
             </a:r>
@@ -6801,9 +6801,9 @@
             <a:r>
               <a:rPr sz="1600" b="0" i="0">
                 <a:solidFill>
-                  <a:srgbClr val="1A6BE5"/>
-                </a:solidFill>
-                <a:latin typeface="Microsoft JhengHei UI"/>
+                  <a:srgbClr val="1C1C1C"/>
+                </a:solidFill>
+                <a:latin typeface="Consolas"/>
               </a:rPr>
               <a:t>/task-status</a:t>
             </a:r>
@@ -6824,7 +6824,7 @@
     <p:bg>
       <p:bgPr>
         <a:solidFill>
-          <a:srgbClr val="FAFAFC"/>
+          <a:srgbClr val="F7F4ED"/>
         </a:solidFill>
         <a:effectLst/>
       </p:bgPr>
@@ -6862,9 +6862,9 @@
             <a:r>
               <a:rPr sz="2000" b="0" i="0">
                 <a:solidFill>
-                  <a:srgbClr val="1A6BE5"/>
-                </a:solidFill>
-                <a:latin typeface="Microsoft JhengHei UI"/>
+                  <a:srgbClr val="1C1C1C"/>
+                </a:solidFill>
+                <a:latin typeface="Segoe UI"/>
               </a:rPr>
               <a:t>Chapter 3</a:t>
             </a:r>
@@ -6897,9 +6897,9 @@
             <a:r>
               <a:rPr sz="4000" b="1" i="0">
                 <a:solidFill>
-                  <a:srgbClr val="1A1A1A"/>
-                </a:solidFill>
-                <a:latin typeface="Microsoft JhengHei UI"/>
+                  <a:srgbClr val="1C1C1C"/>
+                </a:solidFill>
+                <a:latin typeface="Segoe UI"/>
               </a:rPr>
               <a:t>開發循環</a:t>
             </a:r>
@@ -6920,7 +6920,7 @@
     <p:bg>
       <p:bgPr>
         <a:solidFill>
-          <a:srgbClr val="FAFAFC"/>
+          <a:srgbClr val="F7F4ED"/>
         </a:solidFill>
         <a:effectLst/>
       </p:bgPr>
@@ -6957,9 +6957,9 @@
             <a:r>
               <a:rPr sz="3200" b="1" i="0">
                 <a:solidFill>
-                  <a:srgbClr val="1A1A1A"/>
-                </a:solidFill>
-                <a:latin typeface="Microsoft JhengHei UI"/>
+                  <a:srgbClr val="1C1C1C"/>
+                </a:solidFill>
+                <a:latin typeface="Segoe UI"/>
               </a:rPr>
               <a:t>開發循環全貌（依任務模式分流）</a:t>
             </a:r>
@@ -6981,7 +6981,7 @@
             <a:avLst/>
           </a:prstGeom>
           <a:solidFill>
-            <a:srgbClr val="1A6BE5"/>
+            <a:srgbClr val="1C1C1C"/>
           </a:solidFill>
           <a:ln>
             <a:noFill/>
@@ -7043,9 +7043,9 @@
             <a:r>
               <a:rPr sz="2000" b="0" i="0">
                 <a:solidFill>
-                  <a:srgbClr val="1A1A1A"/>
-                </a:solidFill>
-                <a:latin typeface="Microsoft JhengHei UI"/>
+                  <a:srgbClr val="1C1C1C"/>
+                </a:solidFill>
+                <a:latin typeface="Segoe UI"/>
               </a:rPr>
               <a:t>/task-next   取任務 + 選模式（quick / standard / critical）</a:t>
             </a:r>
@@ -7062,9 +7062,9 @@
             <a:r>
               <a:rPr sz="800" b="0" i="0">
                 <a:solidFill>
-                  <a:srgbClr val="1A1A1A"/>
-                </a:solidFill>
-                <a:latin typeface="Microsoft JhengHei UI"/>
+                  <a:srgbClr val="1C1C1C"/>
+                </a:solidFill>
+                <a:latin typeface="Segoe UI"/>
               </a:rPr>
               <a:t/>
             </a:r>
@@ -7081,9 +7081,9 @@
             <a:r>
               <a:rPr sz="2000" b="0" i="0">
                 <a:solidFill>
-                  <a:srgbClr val="1B8C4E"/>
-                </a:solidFill>
-                <a:latin typeface="Microsoft JhengHei UI"/>
+                  <a:srgbClr val="5B7A52"/>
+                </a:solidFill>
+                <a:latin typeface="Segoe UI"/>
               </a:rPr>
               <a:t>─── quick ───     直接寫 → /verify (auto: quick)</a:t>
             </a:r>
@@ -7100,9 +7100,9 @@
             <a:r>
               <a:rPr sz="1500" b="0" i="0">
                 <a:solidFill>
-                  <a:srgbClr val="6B6B76"/>
-                </a:solidFill>
-                <a:latin typeface="Microsoft JhengHei UI"/>
+                  <a:srgbClr val="5F5F5D"/>
+                </a:solidFill>
+                <a:latin typeface="Segoe UI"/>
               </a:rPr>
               <a:t>                          適合：&lt; 30min 單檔修改</a:t>
             </a:r>
@@ -7119,9 +7119,9 @@
             <a:r>
               <a:rPr sz="600" b="0" i="0">
                 <a:solidFill>
-                  <a:srgbClr val="1A1A1A"/>
-                </a:solidFill>
-                <a:latin typeface="Microsoft JhengHei UI"/>
+                  <a:srgbClr val="1C1C1C"/>
+                </a:solidFill>
+                <a:latin typeface="Segoe UI"/>
               </a:rPr>
               <a:t/>
             </a:r>
@@ -7138,9 +7138,9 @@
             <a:r>
               <a:rPr sz="2000" b="0" i="0">
                 <a:solidFill>
-                  <a:srgbClr val="1A1A1A"/>
-                </a:solidFill>
-                <a:latin typeface="Microsoft JhengHei UI"/>
+                  <a:srgbClr val="1C1C1C"/>
+                </a:solidFill>
+                <a:latin typeface="Segoe UI"/>
               </a:rPr>
               <a:t>─── standard ───  /plan → /tdd (80%) → /review-code</a:t>
             </a:r>
@@ -7157,9 +7157,9 @@
             <a:r>
               <a:rPr sz="1800" b="0" i="0">
                 <a:solidFill>
-                  <a:srgbClr val="1A1A1A"/>
-                </a:solidFill>
-                <a:latin typeface="Microsoft JhengHei UI"/>
+                  <a:srgbClr val="1C1C1C"/>
+                </a:solidFill>
+                <a:latin typeface="Segoe UI"/>
               </a:rPr>
               <a:t>                          → /verify (auto: full)</a:t>
             </a:r>
@@ -7176,9 +7176,9 @@
             <a:r>
               <a:rPr sz="1500" b="0" i="0">
                 <a:solidFill>
-                  <a:srgbClr val="6B6B76"/>
-                </a:solidFill>
-                <a:latin typeface="Microsoft JhengHei UI"/>
+                  <a:srgbClr val="5F5F5D"/>
+                </a:solidFill>
+                <a:latin typeface="Segoe UI"/>
               </a:rPr>
               <a:t>                          適合：1-4h 新功能 / 重構</a:t>
             </a:r>
@@ -7195,9 +7195,9 @@
             <a:r>
               <a:rPr sz="600" b="0" i="0">
                 <a:solidFill>
-                  <a:srgbClr val="1A1A1A"/>
-                </a:solidFill>
-                <a:latin typeface="Microsoft JhengHei UI"/>
+                  <a:srgbClr val="1C1C1C"/>
+                </a:solidFill>
+                <a:latin typeface="Segoe UI"/>
               </a:rPr>
               <a:t/>
             </a:r>
@@ -7214,9 +7214,9 @@
             <a:r>
               <a:rPr sz="2000" b="0" i="0">
                 <a:solidFill>
-                  <a:srgbClr val="C48A0A"/>
-                </a:solidFill>
-                <a:latin typeface="Microsoft JhengHei UI"/>
+                  <a:srgbClr val="9A7B3A"/>
+                </a:solidFill>
+                <a:latin typeface="Segoe UI"/>
               </a:rPr>
               <a:t>─── critical ───   /plan → /tdd (100%) → /review-code</a:t>
             </a:r>
@@ -7233,9 +7233,9 @@
             <a:r>
               <a:rPr sz="1800" b="0" i="0">
                 <a:solidFill>
-                  <a:srgbClr val="C48A0A"/>
-                </a:solidFill>
-                <a:latin typeface="Microsoft JhengHei UI"/>
+                  <a:srgbClr val="9A7B3A"/>
+                </a:solidFill>
+                <a:latin typeface="Segoe UI"/>
               </a:rPr>
               <a:t>                          → /verify (auto: pre-pr + 安全掃描)</a:t>
             </a:r>
@@ -7252,9 +7252,9 @@
             <a:r>
               <a:rPr sz="1500" b="0" i="0">
                 <a:solidFill>
-                  <a:srgbClr val="6B6B76"/>
-                </a:solidFill>
-                <a:latin typeface="Microsoft JhengHei UI"/>
+                  <a:srgbClr val="5F5F5D"/>
+                </a:solidFill>
+                <a:latin typeface="Segoe UI"/>
               </a:rPr>
               <a:t>                          適合：金流 / 認證 / 安全 / 核心</a:t>
             </a:r>
@@ -7271,9 +7271,9 @@
             <a:r>
               <a:rPr sz="600" b="0" i="0">
                 <a:solidFill>
-                  <a:srgbClr val="1A1A1A"/>
-                </a:solidFill>
-                <a:latin typeface="Microsoft JhengHei UI"/>
+                  <a:srgbClr val="1C1C1C"/>
+                </a:solidFill>
+                <a:latin typeface="Segoe UI"/>
               </a:rPr>
               <a:t/>
             </a:r>
@@ -7290,9 +7290,9 @@
             <a:r>
               <a:rPr sz="1600" b="1" i="0">
                 <a:solidFill>
-                  <a:srgbClr val="1A6BE5"/>
-                </a:solidFill>
-                <a:latin typeface="Microsoft JhengHei UI"/>
+                  <a:srgbClr val="1C1C1C"/>
+                </a:solidFill>
+                <a:latin typeface="Segoe UI"/>
               </a:rPr>
               <a:t>─── 完成 → 回到 /task-next 接力下一個 ───</a:t>
             </a:r>
@@ -7313,7 +7313,7 @@
     <p:bg>
       <p:bgPr>
         <a:solidFill>
-          <a:srgbClr val="FAFAFC"/>
+          <a:srgbClr val="F7F4ED"/>
         </a:solidFill>
         <a:effectLst/>
       </p:bgPr>
@@ -7351,9 +7351,9 @@
             <a:r>
               <a:rPr sz="2000" b="0" i="0">
                 <a:solidFill>
-                  <a:srgbClr val="1A6BE5"/>
-                </a:solidFill>
-                <a:latin typeface="Microsoft JhengHei UI"/>
+                  <a:srgbClr val="1C1C1C"/>
+                </a:solidFill>
+                <a:latin typeface="Segoe UI"/>
               </a:rPr>
               <a:t>第 1 輪（詳細）</a:t>
             </a:r>
@@ -7386,9 +7386,9 @@
             <a:r>
               <a:rPr sz="4000" b="1" i="0">
                 <a:solidFill>
-                  <a:srgbClr val="1A1A1A"/>
-                </a:solidFill>
-                <a:latin typeface="Microsoft JhengHei UI"/>
+                  <a:srgbClr val="1C1C1C"/>
+                </a:solidFill>
+                <a:latin typeface="Segoe UI"/>
               </a:rPr>
               <a:t>後端 API — FastAPI + pytest</a:t>
             </a:r>
@@ -7409,7 +7409,7 @@
     <p:bg>
       <p:bgPr>
         <a:solidFill>
-          <a:srgbClr val="FAFAFC"/>
+          <a:srgbClr val="F7F4ED"/>
         </a:solidFill>
         <a:effectLst/>
       </p:bgPr>
@@ -7447,9 +7447,9 @@
             <a:r>
               <a:rPr sz="2000" b="0" i="0">
                 <a:solidFill>
-                  <a:srgbClr val="1A6BE5"/>
-                </a:solidFill>
-                <a:latin typeface="Microsoft JhengHei UI"/>
+                  <a:srgbClr val="1C1C1C"/>
+                </a:solidFill>
+                <a:latin typeface="Segoe UI"/>
               </a:rPr>
               <a:t>Chapter 1</a:t>
             </a:r>
@@ -7482,9 +7482,9 @@
             <a:r>
               <a:rPr sz="4000" b="1" i="0">
                 <a:solidFill>
-                  <a:srgbClr val="1A1A1A"/>
-                </a:solidFill>
-                <a:latin typeface="Microsoft JhengHei UI"/>
+                  <a:srgbClr val="1C1C1C"/>
+                </a:solidFill>
+                <a:latin typeface="Segoe UI"/>
               </a:rPr>
               <a:t>認識 VibeCoding 模板</a:t>
             </a:r>
@@ -7505,7 +7505,7 @@
     <p:bg>
       <p:bgPr>
         <a:solidFill>
-          <a:srgbClr val="FAFAFC"/>
+          <a:srgbClr val="F7F4ED"/>
         </a:solidFill>
         <a:effectLst/>
       </p:bgPr>
@@ -7542,9 +7542,9 @@
             <a:r>
               <a:rPr sz="3000" b="1" i="0">
                 <a:solidFill>
-                  <a:srgbClr val="1A1A1A"/>
-                </a:solidFill>
-                <a:latin typeface="Microsoft JhengHei UI"/>
+                  <a:srgbClr val="1C1C1C"/>
+                </a:solidFill>
+                <a:latin typeface="Segoe UI"/>
               </a:rPr>
               <a:t>/plan — AI 先想清楚再動手</a:t>
             </a:r>
@@ -7566,11 +7566,11 @@
             <a:avLst/>
           </a:prstGeom>
           <a:solidFill>
-            <a:srgbClr val="F0F2F5"/>
+            <a:srgbClr val="ECEAE4"/>
           </a:solidFill>
           <a:ln w="12700">
             <a:solidFill>
-              <a:srgbClr val="D8DAE0"/>
+              <a:srgbClr val="ECEAE4"/>
             </a:solidFill>
           </a:ln>
           <a:effectLst/>
@@ -7630,9 +7630,9 @@
             <a:r>
               <a:rPr sz="1600" b="0" i="0">
                 <a:solidFill>
-                  <a:srgbClr val="1A6BE5"/>
-                </a:solidFill>
-                <a:latin typeface="Microsoft JhengHei UI"/>
+                  <a:srgbClr val="1C1C1C"/>
+                </a:solidFill>
+                <a:latin typeface="Consolas"/>
               </a:rPr>
               <a:t>📋 實作計畫                            planner agent (Opus)</a:t>
             </a:r>
@@ -7649,9 +7649,9 @@
             <a:r>
               <a:rPr sz="1600" b="0" i="0">
                 <a:solidFill>
-                  <a:srgbClr val="A0A0AA"/>
-                </a:solidFill>
-                <a:latin typeface="Microsoft JhengHei UI"/>
+                  <a:srgbClr val="A8A6A0"/>
+                </a:solidFill>
+                <a:latin typeface="Consolas"/>
               </a:rPr>
               <a:t/>
             </a:r>
@@ -7668,9 +7668,9 @@
             <a:r>
               <a:rPr sz="1600" b="0" i="0">
                 <a:solidFill>
-                  <a:srgbClr val="1A1A1A"/>
-                </a:solidFill>
-                <a:latin typeface="Microsoft JhengHei UI"/>
+                  <a:srgbClr val="1C1C1C"/>
+                </a:solidFill>
+                <a:latin typeface="Consolas"/>
               </a:rPr>
               <a:t>步驟 1: 建立專案結構</a:t>
             </a:r>
@@ -7687,9 +7687,9 @@
             <a:r>
               <a:rPr sz="1600" b="0" i="0">
                 <a:solidFill>
-                  <a:srgbClr val="37373C"/>
-                </a:solidFill>
-                <a:latin typeface="Microsoft JhengHei UI"/>
+                  <a:srgbClr val="3D3D3D"/>
+                </a:solidFill>
+                <a:latin typeface="Consolas"/>
               </a:rPr>
               <a:t>  - pyproject.toml (dependencies)</a:t>
             </a:r>
@@ -7706,9 +7706,9 @@
             <a:r>
               <a:rPr sz="1600" b="0" i="0">
                 <a:solidFill>
-                  <a:srgbClr val="37373C"/>
-                </a:solidFill>
-                <a:latin typeface="Microsoft JhengHei UI"/>
+                  <a:srgbClr val="3D3D3D"/>
+                </a:solidFill>
+                <a:latin typeface="Consolas"/>
               </a:rPr>
               <a:t>  - app/main.py    (FastAPI entry)</a:t>
             </a:r>
@@ -7725,9 +7725,9 @@
             <a:r>
               <a:rPr sz="1600" b="0" i="0">
                 <a:solidFill>
-                  <a:srgbClr val="37373C"/>
-                </a:solidFill>
-                <a:latin typeface="Microsoft JhengHei UI"/>
+                  <a:srgbClr val="3D3D3D"/>
+                </a:solidFill>
+                <a:latin typeface="Consolas"/>
               </a:rPr>
               <a:t>  - app/models.py  (SQLModel schemas)</a:t>
             </a:r>
@@ -7744,9 +7744,9 @@
             <a:r>
               <a:rPr sz="1600" b="0" i="0">
                 <a:solidFill>
-                  <a:srgbClr val="37373C"/>
-                </a:solidFill>
-                <a:latin typeface="Microsoft JhengHei UI"/>
+                  <a:srgbClr val="3D3D3D"/>
+                </a:solidFill>
+                <a:latin typeface="Consolas"/>
               </a:rPr>
               <a:t>  - app/database.py(SQLite connection)</a:t>
             </a:r>
@@ -7763,9 +7763,9 @@
             <a:r>
               <a:rPr sz="1600" b="0" i="0">
                 <a:solidFill>
-                  <a:srgbClr val="A0A0AA"/>
-                </a:solidFill>
-                <a:latin typeface="Microsoft JhengHei UI"/>
+                  <a:srgbClr val="A8A6A0"/>
+                </a:solidFill>
+                <a:latin typeface="Consolas"/>
               </a:rPr>
               <a:t/>
             </a:r>
@@ -7782,9 +7782,9 @@
             <a:r>
               <a:rPr sz="1600" b="0" i="0">
                 <a:solidFill>
-                  <a:srgbClr val="1A1A1A"/>
-                </a:solidFill>
-                <a:latin typeface="Microsoft JhengHei UI"/>
+                  <a:srgbClr val="1C1C1C"/>
+                </a:solidFill>
+                <a:latin typeface="Consolas"/>
               </a:rPr>
               <a:t>步驟 2: 定義 Todo 資料模型</a:t>
             </a:r>
@@ -7801,9 +7801,9 @@
             <a:r>
               <a:rPr sz="1600" b="0" i="0">
                 <a:solidFill>
-                  <a:srgbClr val="37373C"/>
-                </a:solidFill>
-                <a:latin typeface="Microsoft JhengHei UI"/>
+                  <a:srgbClr val="3D3D3D"/>
+                </a:solidFill>
+                <a:latin typeface="Consolas"/>
               </a:rPr>
               <a:t>  - id, title, category, done, created_at</a:t>
             </a:r>
@@ -7820,9 +7820,9 @@
             <a:r>
               <a:rPr sz="1600" b="0" i="0">
                 <a:solidFill>
-                  <a:srgbClr val="A0A0AA"/>
-                </a:solidFill>
-                <a:latin typeface="Microsoft JhengHei UI"/>
+                  <a:srgbClr val="A8A6A0"/>
+                </a:solidFill>
+                <a:latin typeface="Consolas"/>
               </a:rPr>
               <a:t/>
             </a:r>
@@ -7839,9 +7839,9 @@
             <a:r>
               <a:rPr sz="1600" b="0" i="0">
                 <a:solidFill>
-                  <a:srgbClr val="1A1A1A"/>
-                </a:solidFill>
-                <a:latin typeface="Microsoft JhengHei UI"/>
+                  <a:srgbClr val="1C1C1C"/>
+                </a:solidFill>
+                <a:latin typeface="Consolas"/>
               </a:rPr>
               <a:t>步驟 3: 實作 CRUD endpoints</a:t>
             </a:r>
@@ -7858,9 +7858,9 @@
             <a:r>
               <a:rPr sz="1600" b="0" i="0">
                 <a:solidFill>
-                  <a:srgbClr val="37373C"/>
-                </a:solidFill>
-                <a:latin typeface="Microsoft JhengHei UI"/>
+                  <a:srgbClr val="3D3D3D"/>
+                </a:solidFill>
+                <a:latin typeface="Consolas"/>
               </a:rPr>
               <a:t>  - GET / POST / PUT / DELETE  /api/todos</a:t>
             </a:r>
@@ -7877,9 +7877,9 @@
             <a:r>
               <a:rPr sz="1600" b="0" i="0">
                 <a:solidFill>
-                  <a:srgbClr val="A0A0AA"/>
-                </a:solidFill>
-                <a:latin typeface="Microsoft JhengHei UI"/>
+                  <a:srgbClr val="A8A6A0"/>
+                </a:solidFill>
+                <a:latin typeface="Consolas"/>
               </a:rPr>
               <a:t/>
             </a:r>
@@ -7896,9 +7896,9 @@
             <a:r>
               <a:rPr sz="1600" b="0" i="0">
                 <a:solidFill>
-                  <a:srgbClr val="1B8C4E"/>
-                </a:solidFill>
-                <a:latin typeface="Microsoft JhengHei UI"/>
+                  <a:srgbClr val="5B7A52"/>
+                </a:solidFill>
+                <a:latin typeface="Consolas"/>
               </a:rPr>
               <a:t>風險: 無（標準 CRUD，低複雜度）</a:t>
             </a:r>
@@ -7919,7 +7919,7 @@
     <p:bg>
       <p:bgPr>
         <a:solidFill>
-          <a:srgbClr val="FAFAFC"/>
+          <a:srgbClr val="F7F4ED"/>
         </a:solidFill>
         <a:effectLst/>
       </p:bgPr>
@@ -7956,9 +7956,9 @@
             <a:r>
               <a:rPr sz="3200" b="1" i="0">
                 <a:solidFill>
-                  <a:srgbClr val="1A1A1A"/>
-                </a:solidFill>
-                <a:latin typeface="Microsoft JhengHei UI"/>
+                  <a:srgbClr val="1C1C1C"/>
+                </a:solidFill>
+                <a:latin typeface="Segoe UI"/>
               </a:rPr>
               <a:t>/tdd — 先寫測試，再寫實作</a:t>
             </a:r>
@@ -7980,7 +7980,7 @@
             <a:avLst/>
           </a:prstGeom>
           <a:solidFill>
-            <a:srgbClr val="1A6BE5"/>
+            <a:srgbClr val="1C1C1C"/>
           </a:solidFill>
           <a:ln>
             <a:noFill/>
@@ -8042,9 +8042,9 @@
             <a:r>
               <a:rPr sz="1800" b="0" i="0">
                 <a:solidFill>
-                  <a:srgbClr val="6B6B76"/>
-                </a:solidFill>
-                <a:latin typeface="Microsoft JhengHei UI"/>
+                  <a:srgbClr val="5F5F5D"/>
+                </a:solidFill>
+                <a:latin typeface="Segoe UI"/>
               </a:rPr>
               <a:t>tdd-guide agent (Sonnet) 強制執行：</a:t>
             </a:r>
@@ -8061,9 +8061,9 @@
             <a:r>
               <a:rPr sz="800" b="0" i="0">
                 <a:solidFill>
-                  <a:srgbClr val="1A1A1A"/>
-                </a:solidFill>
-                <a:latin typeface="Microsoft JhengHei UI"/>
+                  <a:srgbClr val="1C1C1C"/>
+                </a:solidFill>
+                <a:latin typeface="Segoe UI"/>
               </a:rPr>
               <a:t/>
             </a:r>
@@ -8080,9 +8080,9 @@
             <a:r>
               <a:rPr sz="2400" b="1" i="0">
                 <a:solidFill>
-                  <a:srgbClr val="D12E2E"/>
-                </a:solidFill>
-                <a:latin typeface="Microsoft JhengHei UI"/>
+                  <a:srgbClr val="A8453D"/>
+                </a:solidFill>
+                <a:latin typeface="Segoe UI"/>
               </a:rPr>
               <a:t>  RED          寫測試，執行 → 全部 FAIL</a:t>
             </a:r>
@@ -8099,9 +8099,9 @@
             <a:r>
               <a:rPr sz="1600" b="0" i="0">
                 <a:solidFill>
-                  <a:srgbClr val="6B6B76"/>
-                </a:solidFill>
-                <a:latin typeface="Microsoft JhengHei UI"/>
+                  <a:srgbClr val="5F5F5D"/>
+                </a:solidFill>
+                <a:latin typeface="Segoe UI"/>
               </a:rPr>
               <a:t>                     pytest → ❌ 紅色（這是對的！）</a:t>
             </a:r>
@@ -8118,9 +8118,9 @@
             <a:r>
               <a:rPr sz="800" b="0" i="0">
                 <a:solidFill>
-                  <a:srgbClr val="1A1A1A"/>
-                </a:solidFill>
-                <a:latin typeface="Microsoft JhengHei UI"/>
+                  <a:srgbClr val="1C1C1C"/>
+                </a:solidFill>
+                <a:latin typeface="Segoe UI"/>
               </a:rPr>
               <a:t/>
             </a:r>
@@ -8137,9 +8137,9 @@
             <a:r>
               <a:rPr sz="2400" b="1" i="0">
                 <a:solidFill>
-                  <a:srgbClr val="1B8C4E"/>
-                </a:solidFill>
-                <a:latin typeface="Microsoft JhengHei UI"/>
+                  <a:srgbClr val="5B7A52"/>
+                </a:solidFill>
+                <a:latin typeface="Segoe UI"/>
               </a:rPr>
               <a:t>  GREEN      寫最小實作，執行 → 全部 PASS</a:t>
             </a:r>
@@ -8156,9 +8156,9 @@
             <a:r>
               <a:rPr sz="1600" b="0" i="0">
                 <a:solidFill>
-                  <a:srgbClr val="6B6B76"/>
-                </a:solidFill>
-                <a:latin typeface="Microsoft JhengHei UI"/>
+                  <a:srgbClr val="5F5F5D"/>
+                </a:solidFill>
+                <a:latin typeface="Segoe UI"/>
               </a:rPr>
               <a:t>                     pytest → ✅ 綠色</a:t>
             </a:r>
@@ -8175,9 +8175,9 @@
             <a:r>
               <a:rPr sz="800" b="0" i="0">
                 <a:solidFill>
-                  <a:srgbClr val="1A1A1A"/>
-                </a:solidFill>
-                <a:latin typeface="Microsoft JhengHei UI"/>
+                  <a:srgbClr val="1C1C1C"/>
+                </a:solidFill>
+                <a:latin typeface="Segoe UI"/>
               </a:rPr>
               <a:t/>
             </a:r>
@@ -8194,9 +8194,9 @@
             <a:r>
               <a:rPr sz="2400" b="1" i="0">
                 <a:solidFill>
-                  <a:srgbClr val="1A6BE5"/>
-                </a:solidFill>
-                <a:latin typeface="Microsoft JhengHei UI"/>
+                  <a:srgbClr val="1C1C1C"/>
+                </a:solidFill>
+                <a:latin typeface="Segoe UI"/>
               </a:rPr>
               <a:t>  IMPROVE  重構，保持測試綠色</a:t>
             </a:r>
@@ -8213,9 +8213,9 @@
             <a:r>
               <a:rPr sz="1600" b="0" i="0">
                 <a:solidFill>
-                  <a:srgbClr val="6B6B76"/>
-                </a:solidFill>
-                <a:latin typeface="Microsoft JhengHei UI"/>
+                  <a:srgbClr val="5F5F5D"/>
+                </a:solidFill>
+                <a:latin typeface="Segoe UI"/>
               </a:rPr>
               <a:t>                     改善命名、抽取共用邏輯</a:t>
             </a:r>
@@ -8236,7 +8236,7 @@
     <p:bg>
       <p:bgPr>
         <a:solidFill>
-          <a:srgbClr val="FAFAFC"/>
+          <a:srgbClr val="F7F4ED"/>
         </a:solidFill>
         <a:effectLst/>
       </p:bgPr>
@@ -8273,9 +8273,9 @@
             <a:r>
               <a:rPr sz="3200" b="1" i="0">
                 <a:solidFill>
-                  <a:srgbClr val="1A1A1A"/>
-                </a:solidFill>
-                <a:latin typeface="Microsoft JhengHei UI"/>
+                  <a:srgbClr val="1C1C1C"/>
+                </a:solidFill>
+                <a:latin typeface="Segoe UI"/>
               </a:rPr>
               <a:t>FastAPI /docs — 免費的互動文檔</a:t>
             </a:r>
@@ -8297,7 +8297,7 @@
             <a:avLst/>
           </a:prstGeom>
           <a:solidFill>
-            <a:srgbClr val="1A6BE5"/>
+            <a:srgbClr val="1C1C1C"/>
           </a:solidFill>
           <a:ln>
             <a:noFill/>
@@ -8359,9 +8359,9 @@
             <a:r>
               <a:rPr sz="2400" b="1" i="0">
                 <a:solidFill>
-                  <a:srgbClr val="1A6BE5"/>
-                </a:solidFill>
-                <a:latin typeface="Microsoft JhengHei UI"/>
+                  <a:srgbClr val="1C1C1C"/>
+                </a:solidFill>
+                <a:latin typeface="Segoe UI"/>
               </a:rPr>
               <a:t>API 寫完，文檔就自動有了</a:t>
             </a:r>
@@ -8378,9 +8378,9 @@
             <a:r>
               <a:rPr sz="800" b="0" i="0">
                 <a:solidFill>
-                  <a:srgbClr val="1A1A1A"/>
-                </a:solidFill>
-                <a:latin typeface="Microsoft JhengHei UI"/>
+                  <a:srgbClr val="1C1C1C"/>
+                </a:solidFill>
+                <a:latin typeface="Segoe UI"/>
               </a:rPr>
               <a:t/>
             </a:r>
@@ -8397,9 +8397,9 @@
             <a:r>
               <a:rPr sz="2000" b="0" i="0">
                 <a:solidFill>
-                  <a:srgbClr val="1A1A1A"/>
-                </a:solidFill>
-                <a:latin typeface="Microsoft JhengHei UI"/>
+                  <a:srgbClr val="1C1C1C"/>
+                </a:solidFill>
+                <a:latin typeface="Segoe UI"/>
               </a:rPr>
               <a:t>uvicorn app.main:app --reload</a:t>
             </a:r>
@@ -8416,9 +8416,9 @@
             <a:r>
               <a:rPr sz="2000" b="0" i="0">
                 <a:solidFill>
-                  <a:srgbClr val="1B8C4E"/>
-                </a:solidFill>
-                <a:latin typeface="Microsoft JhengHei UI"/>
+                  <a:srgbClr val="5B7A52"/>
+                </a:solidFill>
+                <a:latin typeface="Segoe UI"/>
               </a:rPr>
               <a:t>打開 http://localhost:8000/docs</a:t>
             </a:r>
@@ -8435,9 +8435,9 @@
             <a:r>
               <a:rPr sz="1200" b="0" i="0">
                 <a:solidFill>
-                  <a:srgbClr val="1A1A1A"/>
-                </a:solidFill>
-                <a:latin typeface="Microsoft JhengHei UI"/>
+                  <a:srgbClr val="1C1C1C"/>
+                </a:solidFill>
+                <a:latin typeface="Segoe UI"/>
               </a:rPr>
               <a:t/>
             </a:r>
@@ -8454,9 +8454,9 @@
             <a:r>
               <a:rPr sz="2000" b="0" i="0">
                 <a:solidFill>
-                  <a:srgbClr val="1A1A1A"/>
-                </a:solidFill>
-                <a:latin typeface="Microsoft JhengHei UI"/>
+                  <a:srgbClr val="1C1C1C"/>
+                </a:solidFill>
+                <a:latin typeface="Segoe UI"/>
               </a:rPr>
               <a:t>•  Swagger UI 自動產生</a:t>
             </a:r>
@@ -8473,9 +8473,9 @@
             <a:r>
               <a:rPr sz="2000" b="0" i="0">
                 <a:solidFill>
-                  <a:srgbClr val="1A1A1A"/>
-                </a:solidFill>
-                <a:latin typeface="Microsoft JhengHei UI"/>
+                  <a:srgbClr val="1C1C1C"/>
+                </a:solidFill>
+                <a:latin typeface="Segoe UI"/>
               </a:rPr>
               <a:t>•  直接在瀏覽器中測試每個 API</a:t>
             </a:r>
@@ -8492,9 +8492,9 @@
             <a:r>
               <a:rPr sz="2000" b="0" i="0">
                 <a:solidFill>
-                  <a:srgbClr val="1A1A1A"/>
-                </a:solidFill>
-                <a:latin typeface="Microsoft JhengHei UI"/>
+                  <a:srgbClr val="1C1C1C"/>
+                </a:solidFill>
+                <a:latin typeface="Segoe UI"/>
               </a:rPr>
               <a:t>•  不需要 Postman 或其他工具</a:t>
             </a:r>
@@ -8511,9 +8511,9 @@
             <a:r>
               <a:rPr sz="1200" b="0" i="0">
                 <a:solidFill>
-                  <a:srgbClr val="1A1A1A"/>
-                </a:solidFill>
-                <a:latin typeface="Microsoft JhengHei UI"/>
+                  <a:srgbClr val="1C1C1C"/>
+                </a:solidFill>
+                <a:latin typeface="Segoe UI"/>
               </a:rPr>
               <a:t/>
             </a:r>
@@ -8530,9 +8530,9 @@
             <a:r>
               <a:rPr sz="1800" b="0" i="0">
                 <a:solidFill>
-                  <a:srgbClr val="6B6B76"/>
-                </a:solidFill>
-                <a:latin typeface="Microsoft JhengHei UI"/>
+                  <a:srgbClr val="5F5F5D"/>
+                </a:solidFill>
+                <a:latin typeface="Segoe UI"/>
               </a:rPr>
               <a:t>→  選 FastAPI 的額外好處</a:t>
             </a:r>
@@ -8553,7 +8553,7 @@
     <p:bg>
       <p:bgPr>
         <a:solidFill>
-          <a:srgbClr val="FAFAFC"/>
+          <a:srgbClr val="F7F4ED"/>
         </a:solidFill>
         <a:effectLst/>
       </p:bgPr>
@@ -8590,9 +8590,9 @@
             <a:r>
               <a:rPr sz="3000" b="1" i="0">
                 <a:solidFill>
-                  <a:srgbClr val="1A1A1A"/>
-                </a:solidFill>
-                <a:latin typeface="Microsoft JhengHei UI"/>
+                  <a:srgbClr val="1C1C1C"/>
+                </a:solidFill>
+                <a:latin typeface="Segoe UI"/>
               </a:rPr>
               <a:t>/review-code — AI 審查程式碼</a:t>
             </a:r>
@@ -8614,11 +8614,11 @@
             <a:avLst/>
           </a:prstGeom>
           <a:solidFill>
-            <a:srgbClr val="F0F2F5"/>
+            <a:srgbClr val="ECEAE4"/>
           </a:solidFill>
           <a:ln w="12700">
             <a:solidFill>
-              <a:srgbClr val="D8DAE0"/>
+              <a:srgbClr val="ECEAE4"/>
             </a:solidFill>
           </a:ln>
           <a:effectLst/>
@@ -8678,9 +8678,9 @@
             <a:r>
               <a:rPr sz="1600" b="0" i="0">
                 <a:solidFill>
-                  <a:srgbClr val="1A6BE5"/>
-                </a:solidFill>
-                <a:latin typeface="Microsoft JhengHei UI"/>
+                  <a:srgbClr val="1C1C1C"/>
+                </a:solidFill>
+                <a:latin typeface="Consolas"/>
               </a:rPr>
               <a:t>📋 程式碼審查報告          code-quality-specialist (Sonnet)</a:t>
             </a:r>
@@ -8697,9 +8697,9 @@
             <a:r>
               <a:rPr sz="1600" b="0" i="0">
                 <a:solidFill>
-                  <a:srgbClr val="A0A0AA"/>
-                </a:solidFill>
-                <a:latin typeface="Microsoft JhengHei UI"/>
+                  <a:srgbClr val="A8A6A0"/>
+                </a:solidFill>
+                <a:latin typeface="Consolas"/>
               </a:rPr>
               <a:t/>
             </a:r>
@@ -8716,9 +8716,9 @@
             <a:r>
               <a:rPr sz="1600" b="0" i="0">
                 <a:solidFill>
-                  <a:srgbClr val="1B8C4E"/>
-                </a:solidFill>
-                <a:latin typeface="Microsoft JhengHei UI"/>
+                  <a:srgbClr val="5B7A52"/>
+                </a:solidFill>
+                <a:latin typeface="Consolas"/>
               </a:rPr>
               <a:t>✅ PASS  命名規範</a:t>
             </a:r>
@@ -8735,9 +8735,9 @@
             <a:r>
               <a:rPr sz="1600" b="0" i="0">
                 <a:solidFill>
-                  <a:srgbClr val="1B8C4E"/>
-                </a:solidFill>
-                <a:latin typeface="Microsoft JhengHei UI"/>
+                  <a:srgbClr val="5B7A52"/>
+                </a:solidFill>
+                <a:latin typeface="Consolas"/>
               </a:rPr>
               <a:t>✅ PASS  函式長度 &lt; 50 行</a:t>
             </a:r>
@@ -8754,9 +8754,9 @@
             <a:r>
               <a:rPr sz="1600" b="0" i="0">
                 <a:solidFill>
-                  <a:srgbClr val="1B8C4E"/>
-                </a:solidFill>
-                <a:latin typeface="Microsoft JhengHei UI"/>
+                  <a:srgbClr val="5B7A52"/>
+                </a:solidFill>
+                <a:latin typeface="Consolas"/>
               </a:rPr>
               <a:t>✅ PASS  無硬編碼值</a:t>
             </a:r>
@@ -8773,9 +8773,9 @@
             <a:r>
               <a:rPr sz="1600" b="0" i="0">
                 <a:solidFill>
-                  <a:srgbClr val="C48A0A"/>
-                </a:solidFill>
-                <a:latin typeface="Microsoft JhengHei UI"/>
+                  <a:srgbClr val="9A7B3A"/>
+                </a:solidFill>
+                <a:latin typeface="Consolas"/>
               </a:rPr>
               <a:t>⚠️  WARN  缺少輸入驗證 (title 長度)</a:t>
             </a:r>
@@ -8792,9 +8792,9 @@
             <a:r>
               <a:rPr sz="1600" b="0" i="0">
                 <a:solidFill>
-                  <a:srgbClr val="1B8C4E"/>
-                </a:solidFill>
-                <a:latin typeface="Microsoft JhengHei UI"/>
+                  <a:srgbClr val="5B7A52"/>
+                </a:solidFill>
+                <a:latin typeface="Consolas"/>
               </a:rPr>
               <a:t>✅ PASS  錯誤處理</a:t>
             </a:r>
@@ -8811,9 +8811,9 @@
             <a:r>
               <a:rPr sz="1600" b="0" i="0">
                 <a:solidFill>
-                  <a:srgbClr val="1B8C4E"/>
-                </a:solidFill>
-                <a:latin typeface="Microsoft JhengHei UI"/>
+                  <a:srgbClr val="5B7A52"/>
+                </a:solidFill>
+                <a:latin typeface="Consolas"/>
               </a:rPr>
               <a:t>✅ PASS  不可變模式</a:t>
             </a:r>
@@ -8830,9 +8830,9 @@
             <a:r>
               <a:rPr sz="1600" b="0" i="0">
                 <a:solidFill>
-                  <a:srgbClr val="A0A0AA"/>
-                </a:solidFill>
-                <a:latin typeface="Microsoft JhengHei UI"/>
+                  <a:srgbClr val="A8A6A0"/>
+                </a:solidFill>
+                <a:latin typeface="Consolas"/>
               </a:rPr>
               <a:t/>
             </a:r>
@@ -8849,9 +8849,9 @@
             <a:r>
               <a:rPr sz="1600" b="0" i="0">
                 <a:solidFill>
-                  <a:srgbClr val="1A1A1A"/>
-                </a:solidFill>
-                <a:latin typeface="Microsoft JhengHei UI"/>
+                  <a:srgbClr val="1C1C1C"/>
+                </a:solidFill>
+                <a:latin typeface="Consolas"/>
               </a:rPr>
               <a:t>整體: 8.5/10</a:t>
             </a:r>
@@ -8868,9 +8868,9 @@
             <a:r>
               <a:rPr sz="1600" b="0" i="0">
                 <a:solidFill>
-                  <a:srgbClr val="C48A0A"/>
-                </a:solidFill>
-                <a:latin typeface="Microsoft JhengHei UI"/>
+                  <a:srgbClr val="9A7B3A"/>
+                </a:solidFill>
+                <a:latin typeface="Consolas"/>
               </a:rPr>
               <a:t>建議: 加上 title 的 max_length 驗證</a:t>
             </a:r>
@@ -8891,7 +8891,7 @@
     <p:bg>
       <p:bgPr>
         <a:solidFill>
-          <a:srgbClr val="FAFAFC"/>
+          <a:srgbClr val="F7F4ED"/>
         </a:solidFill>
         <a:effectLst/>
       </p:bgPr>
@@ -8929,9 +8929,9 @@
             <a:r>
               <a:rPr sz="2000" b="0" i="0">
                 <a:solidFill>
-                  <a:srgbClr val="1A6BE5"/>
-                </a:solidFill>
-                <a:latin typeface="Microsoft JhengHei UI"/>
+                  <a:srgbClr val="1C1C1C"/>
+                </a:solidFill>
+                <a:latin typeface="Segoe UI"/>
               </a:rPr>
               <a:t>第 2 輪（加速）</a:t>
             </a:r>
@@ -8964,9 +8964,9 @@
             <a:r>
               <a:rPr sz="4000" b="1" i="0">
                 <a:solidFill>
-                  <a:srgbClr val="1A1A1A"/>
-                </a:solidFill>
-                <a:latin typeface="Microsoft JhengHei UI"/>
+                  <a:srgbClr val="1C1C1C"/>
+                </a:solidFill>
+                <a:latin typeface="Segoe UI"/>
               </a:rPr>
               <a:t>前端 UI — React + Tailwind</a:t>
             </a:r>
@@ -8987,7 +8987,7 @@
     <p:bg>
       <p:bgPr>
         <a:solidFill>
-          <a:srgbClr val="FAFAFC"/>
+          <a:srgbClr val="F7F4ED"/>
         </a:solidFill>
         <a:effectLst/>
       </p:bgPr>
@@ -9024,9 +9024,9 @@
             <a:r>
               <a:rPr sz="3200" b="1" i="0">
                 <a:solidFill>
-                  <a:srgbClr val="1A1A1A"/>
-                </a:solidFill>
-                <a:latin typeface="Microsoft JhengHei UI"/>
+                  <a:srgbClr val="1C1C1C"/>
+                </a:solidFill>
+                <a:latin typeface="Segoe UI"/>
               </a:rPr>
               <a:t>第 2 輪：同樣的流程，加快節奏</a:t>
             </a:r>
@@ -9048,7 +9048,7 @@
             <a:avLst/>
           </a:prstGeom>
           <a:solidFill>
-            <a:srgbClr val="1A6BE5"/>
+            <a:srgbClr val="1C1C1C"/>
           </a:solidFill>
           <a:ln>
             <a:noFill/>
@@ -9110,9 +9110,9 @@
             <a:r>
               <a:rPr sz="2200" b="0" i="0">
                 <a:solidFill>
-                  <a:srgbClr val="1A1A1A"/>
-                </a:solidFill>
-                <a:latin typeface="Microsoft JhengHei UI"/>
+                  <a:srgbClr val="1C1C1C"/>
+                </a:solidFill>
+                <a:latin typeface="Segoe UI"/>
               </a:rPr>
               <a:t>/task-next      →  自動跳到前端任務</a:t>
             </a:r>
@@ -9129,9 +9129,9 @@
             <a:r>
               <a:rPr sz="2200" b="0" i="0">
                 <a:solidFill>
-                  <a:srgbClr val="1A1A1A"/>
-                </a:solidFill>
-                <a:latin typeface="Microsoft JhengHei UI"/>
+                  <a:srgbClr val="1C1C1C"/>
+                </a:solidFill>
+                <a:latin typeface="Segoe UI"/>
               </a:rPr>
               <a:t>/plan + /tdd   →  學員已熟悉，快速帶過</a:t>
             </a:r>
@@ -9148,9 +9148,9 @@
             <a:r>
               <a:rPr sz="800" b="0" i="0">
                 <a:solidFill>
-                  <a:srgbClr val="1A1A1A"/>
-                </a:solidFill>
-                <a:latin typeface="Microsoft JhengHei UI"/>
+                  <a:srgbClr val="1C1C1C"/>
+                </a:solidFill>
+                <a:latin typeface="Segoe UI"/>
               </a:rPr>
               <a:t/>
             </a:r>
@@ -9167,9 +9167,9 @@
             <a:r>
               <a:rPr sz="2200" b="1" i="0">
                 <a:solidFill>
-                  <a:srgbClr val="1A6BE5"/>
-                </a:solidFill>
-                <a:latin typeface="Microsoft JhengHei UI"/>
+                  <a:srgbClr val="1C1C1C"/>
+                </a:solidFill>
+                <a:latin typeface="Segoe UI"/>
               </a:rPr>
               <a:t>重點觀察：</a:t>
             </a:r>
@@ -9186,9 +9186,9 @@
             <a:r>
               <a:rPr sz="400" b="0" i="0">
                 <a:solidFill>
-                  <a:srgbClr val="1A1A1A"/>
-                </a:solidFill>
-                <a:latin typeface="Microsoft JhengHei UI"/>
+                  <a:srgbClr val="1C1C1C"/>
+                </a:solidFill>
+                <a:latin typeface="Segoe UI"/>
               </a:rPr>
               <a:t/>
             </a:r>
@@ -9205,9 +9205,9 @@
             <a:r>
               <a:rPr sz="2000" b="0" i="0">
                 <a:solidFill>
-                  <a:srgbClr val="1A1A1A"/>
-                </a:solidFill>
-                <a:latin typeface="Microsoft JhengHei UI"/>
+                  <a:srgbClr val="1C1C1C"/>
+                </a:solidFill>
+                <a:latin typeface="Segoe UI"/>
               </a:rPr>
               <a:t>•  UI 設計規則自動套用</a:t>
             </a:r>
@@ -9224,9 +9224,9 @@
             <a:r>
               <a:rPr sz="1600" b="0" i="0">
                 <a:solidFill>
-                  <a:srgbClr val="6B6B76"/>
-                </a:solidFill>
-                <a:latin typeface="Microsoft JhengHei UI"/>
+                  <a:srgbClr val="5F5F5D"/>
+                </a:solidFill>
+                <a:latin typeface="Segoe UI"/>
               </a:rPr>
               <a:t>     → 系統字型、圓角 12-16px、輕微陰影、大量留白</a:t>
             </a:r>
@@ -9243,9 +9243,9 @@
             <a:r>
               <a:rPr sz="400" b="0" i="0">
                 <a:solidFill>
-                  <a:srgbClr val="1A1A1A"/>
-                </a:solidFill>
-                <a:latin typeface="Microsoft JhengHei UI"/>
+                  <a:srgbClr val="1C1C1C"/>
+                </a:solidFill>
+                <a:latin typeface="Segoe UI"/>
               </a:rPr>
               <a:t/>
             </a:r>
@@ -9262,9 +9262,9 @@
             <a:r>
               <a:rPr sz="2000" b="0" i="0">
                 <a:solidFill>
-                  <a:srgbClr val="1A1A1A"/>
-                </a:solidFill>
-                <a:latin typeface="Microsoft JhengHei UI"/>
+                  <a:srgbClr val="1C1C1C"/>
+                </a:solidFill>
+                <a:latin typeface="Segoe UI"/>
               </a:rPr>
               <a:t>•  來自 .claude/rules/ui-design.md</a:t>
             </a:r>
@@ -9281,9 +9281,9 @@
             <a:r>
               <a:rPr sz="1600" b="0" i="0">
                 <a:solidFill>
-                  <a:srgbClr val="6B6B76"/>
-                </a:solidFill>
-                <a:latin typeface="Microsoft JhengHei UI"/>
+                  <a:srgbClr val="5F5F5D"/>
+                </a:solidFill>
+                <a:latin typeface="Segoe UI"/>
               </a:rPr>
               <a:t>     → 不需要手動指定，AI 自動遵守</a:t>
             </a:r>
@@ -9300,9 +9300,9 @@
             <a:r>
               <a:rPr sz="800" b="0" i="0">
                 <a:solidFill>
-                  <a:srgbClr val="1A1A1A"/>
-                </a:solidFill>
-                <a:latin typeface="Microsoft JhengHei UI"/>
+                  <a:srgbClr val="1C1C1C"/>
+                </a:solidFill>
+                <a:latin typeface="Segoe UI"/>
               </a:rPr>
               <a:t/>
             </a:r>
@@ -9319,9 +9319,9 @@
             <a:r>
               <a:rPr sz="2000" b="0" i="0">
                 <a:solidFill>
-                  <a:srgbClr val="1B8C4E"/>
-                </a:solidFill>
-                <a:latin typeface="Microsoft JhengHei UI"/>
+                  <a:srgbClr val="5B7A52"/>
+                </a:solidFill>
+                <a:latin typeface="Segoe UI"/>
               </a:rPr>
               <a:t>•  瀏覽器中查看成果：啟動 dev server，實際操作</a:t>
             </a:r>
@@ -9342,7 +9342,7 @@
     <p:bg>
       <p:bgPr>
         <a:solidFill>
-          <a:srgbClr val="FAFAFC"/>
+          <a:srgbClr val="F7F4ED"/>
         </a:solidFill>
         <a:effectLst/>
       </p:bgPr>
@@ -9380,9 +9380,9 @@
             <a:r>
               <a:rPr sz="2000" b="0" i="0">
                 <a:solidFill>
-                  <a:srgbClr val="1A6BE5"/>
-                </a:solidFill>
-                <a:latin typeface="Microsoft JhengHei UI"/>
+                  <a:srgbClr val="1C1C1C"/>
+                </a:solidFill>
+                <a:latin typeface="Segoe UI"/>
               </a:rPr>
               <a:t>第 3 輪（快速）</a:t>
             </a:r>
@@ -9415,9 +9415,9 @@
             <a:r>
               <a:rPr sz="4000" b="1" i="0">
                 <a:solidFill>
-                  <a:srgbClr val="1A1A1A"/>
-                </a:solidFill>
-                <a:latin typeface="Microsoft JhengHei UI"/>
+                  <a:srgbClr val="1C1C1C"/>
+                </a:solidFill>
+                <a:latin typeface="Segoe UI"/>
               </a:rPr>
               <a:t>修 Bug — /build-fix</a:t>
             </a:r>
@@ -9438,7 +9438,7 @@
     <p:bg>
       <p:bgPr>
         <a:solidFill>
-          <a:srgbClr val="FAFAFC"/>
+          <a:srgbClr val="F7F4ED"/>
         </a:solidFill>
         <a:effectLst/>
       </p:bgPr>
@@ -9475,9 +9475,9 @@
             <a:r>
               <a:rPr sz="3200" b="1" i="0">
                 <a:solidFill>
-                  <a:srgbClr val="1A1A1A"/>
-                </a:solidFill>
-                <a:latin typeface="Microsoft JhengHei UI"/>
+                  <a:srgbClr val="1C1C1C"/>
+                </a:solidFill>
+                <a:latin typeface="Segoe UI"/>
               </a:rPr>
               <a:t>/build-fix — 出錯不可怕</a:t>
             </a:r>
@@ -9499,7 +9499,7 @@
             <a:avLst/>
           </a:prstGeom>
           <a:solidFill>
-            <a:srgbClr val="1A6BE5"/>
+            <a:srgbClr val="1C1C1C"/>
           </a:solidFill>
           <a:ln>
             <a:noFill/>
@@ -9561,9 +9561,9 @@
             <a:r>
               <a:rPr sz="2200" b="0" i="0">
                 <a:solidFill>
-                  <a:srgbClr val="1A1A1A"/>
-                </a:solidFill>
-                <a:latin typeface="Microsoft JhengHei UI"/>
+                  <a:srgbClr val="1C1C1C"/>
+                </a:solidFill>
+                <a:latin typeface="Segoe UI"/>
               </a:rPr>
               <a:t>⚡ 刻意引入一個 bug，讓建置失敗</a:t>
             </a:r>
@@ -9580,9 +9580,9 @@
             <a:r>
               <a:rPr sz="800" b="0" i="0">
                 <a:solidFill>
-                  <a:srgbClr val="1A1A1A"/>
-                </a:solidFill>
-                <a:latin typeface="Microsoft JhengHei UI"/>
+                  <a:srgbClr val="1C1C1C"/>
+                </a:solidFill>
+                <a:latin typeface="Segoe UI"/>
               </a:rPr>
               <a:t/>
             </a:r>
@@ -9599,9 +9599,9 @@
             <a:r>
               <a:rPr sz="2200" b="1" i="0">
                 <a:solidFill>
-                  <a:srgbClr val="1A6BE5"/>
-                </a:solidFill>
-                <a:latin typeface="Microsoft JhengHei UI"/>
+                  <a:srgbClr val="1C1C1C"/>
+                </a:solidFill>
+                <a:latin typeface="Segoe UI"/>
               </a:rPr>
               <a:t>/build-fix 啟動 build-error-resolver agent (Haiku)</a:t>
             </a:r>
@@ -9618,9 +9618,9 @@
             <a:r>
               <a:rPr sz="800" b="0" i="0">
                 <a:solidFill>
-                  <a:srgbClr val="1A1A1A"/>
-                </a:solidFill>
-                <a:latin typeface="Microsoft JhengHei UI"/>
+                  <a:srgbClr val="1C1C1C"/>
+                </a:solidFill>
+                <a:latin typeface="Segoe UI"/>
               </a:rPr>
               <a:t/>
             </a:r>
@@ -9637,9 +9637,9 @@
             <a:r>
               <a:rPr sz="2000" b="0" i="0">
                 <a:solidFill>
-                  <a:srgbClr val="1A1A1A"/>
-                </a:solidFill>
-                <a:latin typeface="Microsoft JhengHei UI"/>
+                  <a:srgbClr val="1C1C1C"/>
+                </a:solidFill>
+                <a:latin typeface="Segoe UI"/>
               </a:rPr>
               <a:t>  1.  讀取錯誤訊息</a:t>
             </a:r>
@@ -9656,9 +9656,9 @@
             <a:r>
               <a:rPr sz="2000" b="0" i="0">
                 <a:solidFill>
-                  <a:srgbClr val="1A1A1A"/>
-                </a:solidFill>
-                <a:latin typeface="Microsoft JhengHei UI"/>
+                  <a:srgbClr val="1C1C1C"/>
+                </a:solidFill>
+                <a:latin typeface="Segoe UI"/>
               </a:rPr>
               <a:t>  2.  定位問題檔案</a:t>
             </a:r>
@@ -9675,9 +9675,9 @@
             <a:r>
               <a:rPr sz="2000" b="0" i="0">
                 <a:solidFill>
-                  <a:srgbClr val="1A1A1A"/>
-                </a:solidFill>
-                <a:latin typeface="Microsoft JhengHei UI"/>
+                  <a:srgbClr val="1C1C1C"/>
+                </a:solidFill>
+                <a:latin typeface="Segoe UI"/>
               </a:rPr>
               <a:t>  3.  用最小差異修復</a:t>
             </a:r>
@@ -9694,9 +9694,9 @@
             <a:r>
               <a:rPr sz="2000" b="0" i="0">
                 <a:solidFill>
-                  <a:srgbClr val="1A1A1A"/>
-                </a:solidFill>
-                <a:latin typeface="Microsoft JhengHei UI"/>
+                  <a:srgbClr val="1C1C1C"/>
+                </a:solidFill>
+                <a:latin typeface="Segoe UI"/>
               </a:rPr>
               <a:t>  4.  驗證修復成功</a:t>
             </a:r>
@@ -9713,9 +9713,9 @@
             <a:r>
               <a:rPr sz="1200" b="0" i="0">
                 <a:solidFill>
-                  <a:srgbClr val="1A1A1A"/>
-                </a:solidFill>
-                <a:latin typeface="Microsoft JhengHei UI"/>
+                  <a:srgbClr val="1C1C1C"/>
+                </a:solidFill>
+                <a:latin typeface="Segoe UI"/>
               </a:rPr>
               <a:t/>
             </a:r>
@@ -9732,9 +9732,9 @@
             <a:r>
               <a:rPr sz="2000" b="0" i="0">
                 <a:solidFill>
-                  <a:srgbClr val="1B8C4E"/>
-                </a:solidFill>
-                <a:latin typeface="Microsoft JhengHei UI"/>
+                  <a:srgbClr val="5B7A52"/>
+                </a:solidFill>
+                <a:latin typeface="Segoe UI"/>
               </a:rPr>
               <a:t>變更: 1 file, 1 line    測試: ✅ all passed</a:t>
             </a:r>
@@ -9751,9 +9751,9 @@
             <a:r>
               <a:rPr sz="800" b="0" i="0">
                 <a:solidFill>
-                  <a:srgbClr val="1A1A1A"/>
-                </a:solidFill>
-                <a:latin typeface="Microsoft JhengHei UI"/>
+                  <a:srgbClr val="1C1C1C"/>
+                </a:solidFill>
+                <a:latin typeface="Segoe UI"/>
               </a:rPr>
               <a:t/>
             </a:r>
@@ -9770,9 +9770,9 @@
             <a:r>
               <a:rPr sz="1800" b="0" i="0">
                 <a:solidFill>
-                  <a:srgbClr val="6B6B76"/>
-                </a:solidFill>
-                <a:latin typeface="Microsoft JhengHei UI"/>
+                  <a:srgbClr val="5F5F5D"/>
+                </a:solidFill>
+                <a:latin typeface="Segoe UI"/>
               </a:rPr>
               <a:t>→  用最輕量的 Haiku 模型，快速修復，省成本</a:t>
             </a:r>
@@ -9793,7 +9793,7 @@
     <p:bg>
       <p:bgPr>
         <a:solidFill>
-          <a:srgbClr val="FAFAFC"/>
+          <a:srgbClr val="F7F4ED"/>
         </a:solidFill>
         <a:effectLst/>
       </p:bgPr>
@@ -9830,9 +9830,9 @@
             <a:r>
               <a:rPr sz="3200" b="1" i="0">
                 <a:solidFill>
-                  <a:srgbClr val="1A1A1A"/>
-                </a:solidFill>
-                <a:latin typeface="Microsoft JhengHei UI"/>
+                  <a:srgbClr val="1C1C1C"/>
+                </a:solidFill>
+                <a:latin typeface="Segoe UI"/>
               </a:rPr>
               <a:t>Chapter 3 小結 — 3 種 Lane 完成</a:t>
             </a:r>
@@ -9854,7 +9854,7 @@
             <a:avLst/>
           </a:prstGeom>
           <a:solidFill>
-            <a:srgbClr val="1A6BE5"/>
+            <a:srgbClr val="1C1C1C"/>
           </a:solidFill>
           <a:ln>
             <a:noFill/>
@@ -9916,9 +9916,9 @@
             <a:r>
               <a:rPr sz="2200" b="0" i="0">
                 <a:solidFill>
-                  <a:srgbClr val="1A1A1A"/>
-                </a:solidFill>
-                <a:latin typeface="Microsoft JhengHei UI"/>
+                  <a:srgbClr val="1C1C1C"/>
+                </a:solidFill>
+                <a:latin typeface="Segoe UI"/>
               </a:rPr>
               <a:t>第 1 輪:  後端 API    (standard) FastAPI + pytest</a:t>
             </a:r>
@@ -9935,9 +9935,9 @@
             <a:r>
               <a:rPr sz="2200" b="0" i="0">
                 <a:solidFill>
-                  <a:srgbClr val="1A1A1A"/>
-                </a:solidFill>
-                <a:latin typeface="Microsoft JhengHei UI"/>
+                  <a:srgbClr val="1C1C1C"/>
+                </a:solidFill>
+                <a:latin typeface="Segoe UI"/>
               </a:rPr>
               <a:t>第 2 輪:  前端 UI     (standard) React + Vitest</a:t>
             </a:r>
@@ -9954,9 +9954,9 @@
             <a:r>
               <a:rPr sz="2200" b="0" i="0">
                 <a:solidFill>
-                  <a:srgbClr val="1A1A1A"/>
-                </a:solidFill>
-                <a:latin typeface="Microsoft JhengHei UI"/>
+                  <a:srgbClr val="1C1C1C"/>
+                </a:solidFill>
+                <a:latin typeface="Segoe UI"/>
               </a:rPr>
               <a:t>第 3 輪:  Bug 修復   (quick) 直接寫 + /verify</a:t>
             </a:r>
@@ -9973,9 +9973,9 @@
             <a:r>
               <a:rPr sz="1200" b="0" i="0">
                 <a:solidFill>
-                  <a:srgbClr val="1A1A1A"/>
-                </a:solidFill>
-                <a:latin typeface="Microsoft JhengHei UI"/>
+                  <a:srgbClr val="1C1C1C"/>
+                </a:solidFill>
+                <a:latin typeface="Segoe UI"/>
               </a:rPr>
               <a:t/>
             </a:r>
@@ -9992,9 +9992,9 @@
             <a:r>
               <a:rPr sz="2000" b="1" i="0">
                 <a:solidFill>
-                  <a:srgbClr val="1A6BE5"/>
-                </a:solidFill>
-                <a:latin typeface="Microsoft JhengHei UI"/>
+                  <a:srgbClr val="1C1C1C"/>
+                </a:solidFill>
+                <a:latin typeface="Segoe UI"/>
               </a:rPr>
               <a:t>核心流程（依模式分流）：</a:t>
             </a:r>
@@ -10011,9 +10011,9 @@
             <a:r>
               <a:rPr sz="2000" b="0" i="0">
                 <a:solidFill>
-                  <a:srgbClr val="1B8C4E"/>
-                </a:solidFill>
-                <a:latin typeface="Microsoft JhengHei UI"/>
+                  <a:srgbClr val="5B7A52"/>
+                </a:solidFill>
+                <a:latin typeface="Segoe UI"/>
               </a:rPr>
               <a:t>quick     →  直接寫 → /verify</a:t>
             </a:r>
@@ -10030,9 +10030,9 @@
             <a:r>
               <a:rPr sz="2000" b="0" i="0">
                 <a:solidFill>
-                  <a:srgbClr val="1A1A1A"/>
-                </a:solidFill>
-                <a:latin typeface="Microsoft JhengHei UI"/>
+                  <a:srgbClr val="1C1C1C"/>
+                </a:solidFill>
+                <a:latin typeface="Segoe UI"/>
               </a:rPr>
               <a:t>standard  →  /plan → /tdd (80%) → /review-code → /verify</a:t>
             </a:r>
@@ -10049,9 +10049,9 @@
             <a:r>
               <a:rPr sz="2000" b="0" i="0">
                 <a:solidFill>
-                  <a:srgbClr val="C48A0A"/>
-                </a:solidFill>
-                <a:latin typeface="Microsoft JhengHei UI"/>
+                  <a:srgbClr val="9A7B3A"/>
+                </a:solidFill>
+                <a:latin typeface="Segoe UI"/>
               </a:rPr>
               <a:t>critical  →  /plan → /tdd (100%) → /review-code → /verify</a:t>
             </a:r>
@@ -10068,9 +10068,9 @@
             <a:r>
               <a:rPr sz="1200" b="0" i="0">
                 <a:solidFill>
-                  <a:srgbClr val="1A1A1A"/>
-                </a:solidFill>
-                <a:latin typeface="Microsoft JhengHei UI"/>
+                  <a:srgbClr val="1C1C1C"/>
+                </a:solidFill>
+                <a:latin typeface="Segoe UI"/>
               </a:rPr>
               <a:t/>
             </a:r>
@@ -10087,9 +10087,9 @@
             <a:r>
               <a:rPr sz="1800" b="1" i="0">
                 <a:solidFill>
-                  <a:srgbClr val="1B8C4E"/>
-                </a:solidFill>
-                <a:latin typeface="Microsoft JhengHei UI"/>
+                  <a:srgbClr val="5B7A52"/>
+                </a:solidFill>
+                <a:latin typeface="Segoe UI"/>
               </a:rPr>
               <a:t>Agent 協作：</a:t>
             </a:r>
@@ -10106,9 +10106,9 @@
             <a:r>
               <a:rPr sz="1500" b="0" i="0">
                 <a:solidFill>
-                  <a:srgbClr val="37373C"/>
-                </a:solidFill>
-                <a:latin typeface="Microsoft JhengHei UI"/>
+                  <a:srgbClr val="3D3D3D"/>
+                </a:solidFill>
+                <a:latin typeface="Segoe UI"/>
               </a:rPr>
               <a:t>  planner (Opus) → tdd-guide (Sonnet) → code-quality (Sonnet) → build-resolver (Haiku)</a:t>
             </a:r>
@@ -10129,7 +10129,7 @@
     <p:bg>
       <p:bgPr>
         <a:solidFill>
-          <a:srgbClr val="FAFAFC"/>
+          <a:srgbClr val="F7F4ED"/>
         </a:solidFill>
         <a:effectLst/>
       </p:bgPr>
@@ -10167,9 +10167,9 @@
             <a:r>
               <a:rPr sz="2000" b="0" i="0">
                 <a:solidFill>
-                  <a:srgbClr val="1A6BE5"/>
-                </a:solidFill>
-                <a:latin typeface="Microsoft JhengHei UI"/>
+                  <a:srgbClr val="1C1C1C"/>
+                </a:solidFill>
+                <a:latin typeface="Segoe UI"/>
               </a:rPr>
               <a:t>Chapter 4</a:t>
             </a:r>
@@ -10202,9 +10202,9 @@
             <a:r>
               <a:rPr sz="4000" b="1" i="0">
                 <a:solidFill>
-                  <a:srgbClr val="1A1A1A"/>
-                </a:solidFill>
-                <a:latin typeface="Microsoft JhengHei UI"/>
+                  <a:srgbClr val="1C1C1C"/>
+                </a:solidFill>
+                <a:latin typeface="Segoe UI"/>
               </a:rPr>
               <a:t>品質驗證</a:t>
             </a:r>
@@ -10225,7 +10225,7 @@
     <p:bg>
       <p:bgPr>
         <a:solidFill>
-          <a:srgbClr val="FAFAFC"/>
+          <a:srgbClr val="F7F4ED"/>
         </a:solidFill>
         <a:effectLst/>
       </p:bgPr>
@@ -10262,9 +10262,9 @@
             <a:r>
               <a:rPr sz="3200" b="1" i="0">
                 <a:solidFill>
-                  <a:srgbClr val="1A1A1A"/>
-                </a:solidFill>
-                <a:latin typeface="Microsoft JhengHei UI"/>
+                  <a:srgbClr val="1C1C1C"/>
+                </a:solidFill>
+                <a:latin typeface="Segoe UI"/>
               </a:rPr>
               <a:t>用 AI 寫程式的 5 個痛點</a:t>
             </a:r>
@@ -10286,7 +10286,7 @@
             <a:avLst/>
           </a:prstGeom>
           <a:solidFill>
-            <a:srgbClr val="1A6BE5"/>
+            <a:srgbClr val="1C1C1C"/>
           </a:solidFill>
           <a:ln>
             <a:noFill/>
@@ -10348,9 +10348,9 @@
             <a:r>
               <a:rPr sz="2200" b="0" i="0">
                 <a:solidFill>
-                  <a:srgbClr val="D12E2E"/>
-                </a:solidFill>
-                <a:latin typeface="Microsoft JhengHei UI"/>
+                  <a:srgbClr val="A8453D"/>
+                </a:solidFill>
+                <a:latin typeface="Segoe UI"/>
               </a:rPr>
               <a:t>1.  每次對話都要重新解釋專案背景</a:t>
             </a:r>
@@ -10367,9 +10367,9 @@
             <a:r>
               <a:rPr sz="2200" b="0" i="0">
                 <a:solidFill>
-                  <a:srgbClr val="D12E2E"/>
-                </a:solidFill>
-                <a:latin typeface="Microsoft JhengHei UI"/>
+                  <a:srgbClr val="A8453D"/>
+                </a:solidFill>
+                <a:latin typeface="Segoe UI"/>
               </a:rPr>
               <a:t>2.  AI 產出的程式碼品質不穩定</a:t>
             </a:r>
@@ -10386,9 +10386,9 @@
             <a:r>
               <a:rPr sz="2200" b="0" i="0">
                 <a:solidFill>
-                  <a:srgbClr val="D12E2E"/>
-                </a:solidFill>
-                <a:latin typeface="Microsoft JhengHei UI"/>
+                  <a:srgbClr val="A8453D"/>
+                </a:solidFill>
+                <a:latin typeface="Segoe UI"/>
               </a:rPr>
               <a:t>3.  沒有測試、沒有審查，直接上線</a:t>
             </a:r>
@@ -10405,9 +10405,9 @@
             <a:r>
               <a:rPr sz="2200" b="0" i="0">
                 <a:solidFill>
-                  <a:srgbClr val="D12E2E"/>
-                </a:solidFill>
-                <a:latin typeface="Microsoft JhengHei UI"/>
+                  <a:srgbClr val="A8453D"/>
+                </a:solidFill>
+                <a:latin typeface="Segoe UI"/>
               </a:rPr>
               <a:t>4.  需求 → 設計 → 實作之間斷裂</a:t>
             </a:r>
@@ -10424,9 +10424,9 @@
             <a:r>
               <a:rPr sz="2200" b="0" i="0">
                 <a:solidFill>
-                  <a:srgbClr val="D12E2E"/>
-                </a:solidFill>
-                <a:latin typeface="Microsoft JhengHei UI"/>
+                  <a:srgbClr val="A8453D"/>
+                </a:solidFill>
+                <a:latin typeface="Segoe UI"/>
               </a:rPr>
               <a:t>5.  換個專案又從零開始設定</a:t>
             </a:r>
@@ -10443,9 +10443,9 @@
             <a:r>
               <a:rPr sz="1200" b="0" i="0">
                 <a:solidFill>
-                  <a:srgbClr val="1A1A1A"/>
-                </a:solidFill>
-                <a:latin typeface="Microsoft JhengHei UI"/>
+                  <a:srgbClr val="1C1C1C"/>
+                </a:solidFill>
+                <a:latin typeface="Segoe UI"/>
               </a:rPr>
               <a:t/>
             </a:r>
@@ -10462,9 +10462,9 @@
             <a:r>
               <a:rPr sz="1800" b="0" i="0">
                 <a:solidFill>
-                  <a:srgbClr val="6B6B76"/>
-                </a:solidFill>
-                <a:latin typeface="Microsoft JhengHei UI"/>
+                  <a:srgbClr val="5F5F5D"/>
+                </a:solidFill>
+                <a:latin typeface="Segoe UI"/>
               </a:rPr>
               <a:t>→  問題不在 AI 不夠聰明，而是缺乏系統化工作流</a:t>
             </a:r>
@@ -10485,7 +10485,7 @@
     <p:bg>
       <p:bgPr>
         <a:solidFill>
-          <a:srgbClr val="FAFAFC"/>
+          <a:srgbClr val="F7F4ED"/>
         </a:solidFill>
         <a:effectLst/>
       </p:bgPr>
@@ -10522,9 +10522,9 @@
             <a:r>
               <a:rPr sz="3000" b="1" i="0">
                 <a:solidFill>
-                  <a:srgbClr val="1A1A1A"/>
-                </a:solidFill>
-                <a:latin typeface="Microsoft JhengHei UI"/>
+                  <a:srgbClr val="1C1C1C"/>
+                </a:solidFill>
+                <a:latin typeface="Segoe UI"/>
               </a:rPr>
               <a:t>/verify — 三道品質門（依模式自動）</a:t>
             </a:r>
@@ -10546,11 +10546,11 @@
             <a:avLst/>
           </a:prstGeom>
           <a:solidFill>
-            <a:srgbClr val="F0F2F5"/>
+            <a:srgbClr val="ECEAE4"/>
           </a:solidFill>
           <a:ln w="12700">
             <a:solidFill>
-              <a:srgbClr val="D8DAE0"/>
+              <a:srgbClr val="ECEAE4"/>
             </a:solidFill>
           </a:ln>
           <a:effectLst/>
@@ -10610,9 +10610,9 @@
             <a:r>
               <a:rPr sz="1600" b="0" i="0">
                 <a:solidFill>
-                  <a:srgbClr val="1A6BE5"/>
-                </a:solidFill>
-                <a:latin typeface="Microsoft JhengHei UI"/>
+                  <a:srgbClr val="1C1C1C"/>
+                </a:solidFill>
+                <a:latin typeface="Consolas"/>
               </a:rPr>
               <a:t>🔍 全面驗證</a:t>
             </a:r>
@@ -10629,9 +10629,9 @@
             <a:r>
               <a:rPr sz="1600" b="0" i="0">
                 <a:solidFill>
-                  <a:srgbClr val="A0A0AA"/>
-                </a:solidFill>
-                <a:latin typeface="Microsoft JhengHei UI"/>
+                  <a:srgbClr val="A8A6A0"/>
+                </a:solidFill>
+                <a:latin typeface="Consolas"/>
               </a:rPr>
               <a:t/>
             </a:r>
@@ -10648,9 +10648,9 @@
             <a:r>
               <a:rPr sz="1600" b="0" i="0">
                 <a:solidFill>
-                  <a:srgbClr val="1A1A1A"/>
-                </a:solidFill>
-                <a:latin typeface="Microsoft JhengHei UI"/>
+                  <a:srgbClr val="1C1C1C"/>
+                </a:solidFill>
+                <a:latin typeface="Consolas"/>
               </a:rPr>
               <a:t>Gate 1: 型別檢查</a:t>
             </a:r>
@@ -10667,9 +10667,9 @@
             <a:r>
               <a:rPr sz="1600" b="0" i="0">
                 <a:solidFill>
-                  <a:srgbClr val="1B8C4E"/>
-                </a:solidFill>
-                <a:latin typeface="Microsoft JhengHei UI"/>
+                  <a:srgbClr val="5B7A52"/>
+                </a:solidFill>
+                <a:latin typeface="Consolas"/>
               </a:rPr>
               <a:t>  Python: mypy --strict     ✅</a:t>
             </a:r>
@@ -10686,9 +10686,9 @@
             <a:r>
               <a:rPr sz="1600" b="0" i="0">
                 <a:solidFill>
-                  <a:srgbClr val="1B8C4E"/>
-                </a:solidFill>
-                <a:latin typeface="Microsoft JhengHei UI"/>
+                  <a:srgbClr val="5B7A52"/>
+                </a:solidFill>
+                <a:latin typeface="Consolas"/>
               </a:rPr>
               <a:t>  TS:     tsc --noEmit      ✅</a:t>
             </a:r>
@@ -10705,9 +10705,9 @@
             <a:r>
               <a:rPr sz="1600" b="0" i="0">
                 <a:solidFill>
-                  <a:srgbClr val="A0A0AA"/>
-                </a:solidFill>
-                <a:latin typeface="Microsoft JhengHei UI"/>
+                  <a:srgbClr val="A8A6A0"/>
+                </a:solidFill>
+                <a:latin typeface="Consolas"/>
               </a:rPr>
               <a:t/>
             </a:r>
@@ -10724,9 +10724,9 @@
             <a:r>
               <a:rPr sz="1600" b="0" i="0">
                 <a:solidFill>
-                  <a:srgbClr val="1A1A1A"/>
-                </a:solidFill>
-                <a:latin typeface="Microsoft JhengHei UI"/>
+                  <a:srgbClr val="1C1C1C"/>
+                </a:solidFill>
+                <a:latin typeface="Consolas"/>
               </a:rPr>
               <a:t>Gate 2: 測試</a:t>
             </a:r>
@@ -10743,9 +10743,9 @@
             <a:r>
               <a:rPr sz="1600" b="0" i="0">
                 <a:solidFill>
-                  <a:srgbClr val="1B8C4E"/>
-                </a:solidFill>
-                <a:latin typeface="Microsoft JhengHei UI"/>
+                  <a:srgbClr val="5B7A52"/>
+                </a:solidFill>
+                <a:latin typeface="Consolas"/>
               </a:rPr>
               <a:t>  pytest     → 12/12 passed  ✅</a:t>
             </a:r>
@@ -10762,9 +10762,9 @@
             <a:r>
               <a:rPr sz="1600" b="0" i="0">
                 <a:solidFill>
-                  <a:srgbClr val="1B8C4E"/>
-                </a:solidFill>
-                <a:latin typeface="Microsoft JhengHei UI"/>
+                  <a:srgbClr val="5B7A52"/>
+                </a:solidFill>
+                <a:latin typeface="Consolas"/>
               </a:rPr>
               <a:t>  vitest     →  8/8  passed  ✅</a:t>
             </a:r>
@@ -10781,9 +10781,9 @@
             <a:r>
               <a:rPr sz="1600" b="0" i="0">
                 <a:solidFill>
-                  <a:srgbClr val="1B8C4E"/>
-                </a:solidFill>
-                <a:latin typeface="Microsoft JhengHei UI"/>
+                  <a:srgbClr val="5B7A52"/>
+                </a:solidFill>
+                <a:latin typeface="Consolas"/>
               </a:rPr>
               <a:t>  coverage   →  87%          ✅ (&gt;80%)</a:t>
             </a:r>
@@ -10800,9 +10800,9 @@
             <a:r>
               <a:rPr sz="1600" b="0" i="0">
                 <a:solidFill>
-                  <a:srgbClr val="A0A0AA"/>
-                </a:solidFill>
-                <a:latin typeface="Microsoft JhengHei UI"/>
+                  <a:srgbClr val="A8A6A0"/>
+                </a:solidFill>
+                <a:latin typeface="Consolas"/>
               </a:rPr>
               <a:t/>
             </a:r>
@@ -10819,9 +10819,9 @@
             <a:r>
               <a:rPr sz="1600" b="0" i="0">
                 <a:solidFill>
-                  <a:srgbClr val="1A1A1A"/>
-                </a:solidFill>
-                <a:latin typeface="Microsoft JhengHei UI"/>
+                  <a:srgbClr val="1C1C1C"/>
+                </a:solidFill>
+                <a:latin typeface="Consolas"/>
               </a:rPr>
               <a:t>Gate 3: Lint</a:t>
             </a:r>
@@ -10838,9 +10838,9 @@
             <a:r>
               <a:rPr sz="1600" b="0" i="0">
                 <a:solidFill>
-                  <a:srgbClr val="1B8C4E"/>
-                </a:solidFill>
-                <a:latin typeface="Microsoft JhengHei UI"/>
+                  <a:srgbClr val="5B7A52"/>
+                </a:solidFill>
+                <a:latin typeface="Consolas"/>
               </a:rPr>
               <a:t>  ruff       →  0 errors     ✅</a:t>
             </a:r>
@@ -10857,9 +10857,9 @@
             <a:r>
               <a:rPr sz="1600" b="0" i="0">
                 <a:solidFill>
-                  <a:srgbClr val="1B8C4E"/>
-                </a:solidFill>
-                <a:latin typeface="Microsoft JhengHei UI"/>
+                  <a:srgbClr val="5B7A52"/>
+                </a:solidFill>
+                <a:latin typeface="Consolas"/>
               </a:rPr>
               <a:t>  eslint     →  0 errors     ✅</a:t>
             </a:r>
@@ -10876,9 +10876,9 @@
             <a:r>
               <a:rPr sz="1600" b="0" i="0">
                 <a:solidFill>
-                  <a:srgbClr val="A0A0AA"/>
-                </a:solidFill>
-                <a:latin typeface="Microsoft JhengHei UI"/>
+                  <a:srgbClr val="A8A6A0"/>
+                </a:solidFill>
+                <a:latin typeface="Consolas"/>
               </a:rPr>
               <a:t/>
             </a:r>
@@ -10895,9 +10895,9 @@
             <a:r>
               <a:rPr sz="1600" b="0" i="0">
                 <a:solidFill>
-                  <a:srgbClr val="1B8C4E"/>
-                </a:solidFill>
-                <a:latin typeface="Microsoft JhengHei UI"/>
+                  <a:srgbClr val="5B7A52"/>
+                </a:solidFill>
+                <a:latin typeface="Consolas"/>
               </a:rPr>
               <a:t>結果: ✅ 全部通過</a:t>
             </a:r>
@@ -10918,7 +10918,7 @@
     <p:bg>
       <p:bgPr>
         <a:solidFill>
-          <a:srgbClr val="FAFAFC"/>
+          <a:srgbClr val="F7F4ED"/>
         </a:solidFill>
         <a:effectLst/>
       </p:bgPr>
@@ -10955,9 +10955,9 @@
             <a:r>
               <a:rPr sz="3200" b="1" i="0">
                 <a:solidFill>
-                  <a:srgbClr val="1A1A1A"/>
-                </a:solidFill>
-                <a:latin typeface="Microsoft JhengHei UI"/>
+                  <a:srgbClr val="1C1C1C"/>
+                </a:solidFill>
+                <a:latin typeface="Segoe UI"/>
               </a:rPr>
               <a:t>/e2e — Playwright 自動操作瀏覽器</a:t>
             </a:r>
@@ -10979,7 +10979,7 @@
             <a:avLst/>
           </a:prstGeom>
           <a:solidFill>
-            <a:srgbClr val="1A6BE5"/>
+            <a:srgbClr val="1C1C1C"/>
           </a:solidFill>
           <a:ln>
             <a:noFill/>
@@ -11041,9 +11041,9 @@
             <a:r>
               <a:rPr sz="1800" b="0" i="0">
                 <a:solidFill>
-                  <a:srgbClr val="6B6B76"/>
-                </a:solidFill>
-                <a:latin typeface="Microsoft JhengHei UI"/>
+                  <a:srgbClr val="5F5F5D"/>
+                </a:solidFill>
+                <a:latin typeface="Segoe UI"/>
               </a:rPr>
               <a:t>e2e-validation-specialist agent 會：</a:t>
             </a:r>
@@ -11060,9 +11060,9 @@
             <a:r>
               <a:rPr sz="800" b="0" i="0">
                 <a:solidFill>
-                  <a:srgbClr val="1A1A1A"/>
-                </a:solidFill>
-                <a:latin typeface="Microsoft JhengHei UI"/>
+                  <a:srgbClr val="1C1C1C"/>
+                </a:solidFill>
+                <a:latin typeface="Segoe UI"/>
               </a:rPr>
               <a:t/>
             </a:r>
@@ -11079,9 +11079,9 @@
             <a:r>
               <a:rPr sz="2000" b="0" i="0">
                 <a:solidFill>
-                  <a:srgbClr val="1A1A1A"/>
-                </a:solidFill>
-                <a:latin typeface="Microsoft JhengHei UI"/>
+                  <a:srgbClr val="1C1C1C"/>
+                </a:solidFill>
+                <a:latin typeface="Segoe UI"/>
               </a:rPr>
               <a:t>  1.  啟動 Playwright 瀏覽器</a:t>
             </a:r>
@@ -11098,9 +11098,9 @@
             <a:r>
               <a:rPr sz="2000" b="0" i="0">
                 <a:solidFill>
-                  <a:srgbClr val="1A1A1A"/>
-                </a:solidFill>
-                <a:latin typeface="Microsoft JhengHei UI"/>
+                  <a:srgbClr val="1C1C1C"/>
+                </a:solidFill>
+                <a:latin typeface="Segoe UI"/>
               </a:rPr>
               <a:t>  2.  自動執行使用者流程：</a:t>
             </a:r>
@@ -11117,9 +11117,9 @@
             <a:r>
               <a:rPr sz="400" b="0" i="0">
                 <a:solidFill>
-                  <a:srgbClr val="1A1A1A"/>
-                </a:solidFill>
-                <a:latin typeface="Microsoft JhengHei UI"/>
+                  <a:srgbClr val="1C1C1C"/>
+                </a:solidFill>
+                <a:latin typeface="Segoe UI"/>
               </a:rPr>
               <a:t/>
             </a:r>
@@ -11136,9 +11136,9 @@
             <a:r>
               <a:rPr sz="1800" b="0" i="0">
                 <a:solidFill>
-                  <a:srgbClr val="37373C"/>
-                </a:solidFill>
-                <a:latin typeface="Microsoft JhengHei UI"/>
+                  <a:srgbClr val="3D3D3D"/>
+                </a:solidFill>
+                <a:latin typeface="Segoe UI"/>
               </a:rPr>
               <a:t>        打開首頁 → 看到空的 Todo 列表</a:t>
             </a:r>
@@ -11155,9 +11155,9 @@
             <a:r>
               <a:rPr sz="1800" b="0" i="0">
                 <a:solidFill>
-                  <a:srgbClr val="37373C"/>
-                </a:solidFill>
-                <a:latin typeface="Microsoft JhengHei UI"/>
+                  <a:srgbClr val="3D3D3D"/>
+                </a:solidFill>
+                <a:latin typeface="Segoe UI"/>
               </a:rPr>
               <a:t>        新增 "買牛奶" → 列表出現該項目</a:t>
             </a:r>
@@ -11174,9 +11174,9 @@
             <a:r>
               <a:rPr sz="1800" b="0" i="0">
                 <a:solidFill>
-                  <a:srgbClr val="37373C"/>
-                </a:solidFill>
-                <a:latin typeface="Microsoft JhengHei UI"/>
+                  <a:srgbClr val="3D3D3D"/>
+                </a:solidFill>
+                <a:latin typeface="Segoe UI"/>
               </a:rPr>
               <a:t>        標記完成 → 出現刪除線</a:t>
             </a:r>
@@ -11193,9 +11193,9 @@
             <a:r>
               <a:rPr sz="1800" b="0" i="0">
                 <a:solidFill>
-                  <a:srgbClr val="37373C"/>
-                </a:solidFill>
-                <a:latin typeface="Microsoft JhengHei UI"/>
+                  <a:srgbClr val="3D3D3D"/>
+                </a:solidFill>
+                <a:latin typeface="Segoe UI"/>
               </a:rPr>
               <a:t>        切換分類 → 篩選正確</a:t>
             </a:r>
@@ -11212,9 +11212,9 @@
             <a:r>
               <a:rPr sz="1800" b="0" i="0">
                 <a:solidFill>
-                  <a:srgbClr val="37373C"/>
-                </a:solidFill>
-                <a:latin typeface="Microsoft JhengHei UI"/>
+                  <a:srgbClr val="3D3D3D"/>
+                </a:solidFill>
+                <a:latin typeface="Segoe UI"/>
               </a:rPr>
               <a:t>        刪除 → 回到空列表</a:t>
             </a:r>
@@ -11231,9 +11231,9 @@
             <a:r>
               <a:rPr sz="800" b="0" i="0">
                 <a:solidFill>
-                  <a:srgbClr val="1A1A1A"/>
-                </a:solidFill>
-                <a:latin typeface="Microsoft JhengHei UI"/>
+                  <a:srgbClr val="1C1C1C"/>
+                </a:solidFill>
+                <a:latin typeface="Segoe UI"/>
               </a:rPr>
               <a:t/>
             </a:r>
@@ -11250,9 +11250,9 @@
             <a:r>
               <a:rPr sz="2000" b="0" i="0">
                 <a:solidFill>
-                  <a:srgbClr val="1B8C4E"/>
-                </a:solidFill>
-                <a:latin typeface="Microsoft JhengHei UI"/>
+                  <a:srgbClr val="5B7A52"/>
+                </a:solidFill>
+                <a:latin typeface="Segoe UI"/>
               </a:rPr>
               <a:t>  3.  產出截圖 + 測試報告</a:t>
             </a:r>
@@ -11273,7 +11273,7 @@
     <p:bg>
       <p:bgPr>
         <a:solidFill>
-          <a:srgbClr val="FAFAFC"/>
+          <a:srgbClr val="F7F4ED"/>
         </a:solidFill>
         <a:effectLst/>
       </p:bgPr>
@@ -11310,9 +11310,9 @@
             <a:r>
               <a:rPr sz="3200" b="1" i="0">
                 <a:solidFill>
-                  <a:srgbClr val="1A1A1A"/>
-                </a:solidFill>
-                <a:latin typeface="Microsoft JhengHei UI"/>
+                  <a:srgbClr val="1C1C1C"/>
+                </a:solidFill>
+                <a:latin typeface="Segoe UI"/>
               </a:rPr>
               <a:t>/time-log — 自動時間追蹤</a:t>
             </a:r>
@@ -11334,7 +11334,7 @@
             <a:avLst/>
           </a:prstGeom>
           <a:solidFill>
-            <a:srgbClr val="1A6BE5"/>
+            <a:srgbClr val="1C1C1C"/>
           </a:solidFill>
           <a:ln>
             <a:noFill/>
@@ -11396,9 +11396,9 @@
             <a:r>
               <a:rPr sz="2400" b="1" i="0">
                 <a:solidFill>
-                  <a:srgbClr val="1A6BE5"/>
-                </a:solidFill>
-                <a:latin typeface="Microsoft JhengHei UI"/>
+                  <a:srgbClr val="1C1C1C"/>
+                </a:solidFill>
+                <a:latin typeface="Segoe UI"/>
               </a:rPr>
               <a:t>你沒有手動記過任何時間</a:t>
             </a:r>
@@ -11415,9 +11415,9 @@
             <a:r>
               <a:rPr sz="1200" b="0" i="0">
                 <a:solidFill>
-                  <a:srgbClr val="1A1A1A"/>
-                </a:solidFill>
-                <a:latin typeface="Microsoft JhengHei UI"/>
+                  <a:srgbClr val="1C1C1C"/>
+                </a:solidFill>
+                <a:latin typeface="Segoe UI"/>
               </a:rPr>
               <a:t/>
             </a:r>
@@ -11434,9 +11434,9 @@
             <a:r>
               <a:rPr sz="2200" b="0" i="0">
                 <a:solidFill>
-                  <a:srgbClr val="1A1A1A"/>
-                </a:solidFill>
-                <a:latin typeface="Microsoft JhengHei UI"/>
+                  <a:srgbClr val="1C1C1C"/>
+                </a:solidFill>
+                <a:latin typeface="Segoe UI"/>
               </a:rPr>
               <a:t>  2.1  基礎架構              12 min</a:t>
             </a:r>
@@ -11453,9 +11453,9 @@
             <a:r>
               <a:rPr sz="2200" b="0" i="0">
                 <a:solidFill>
-                  <a:srgbClr val="1A1A1A"/>
-                </a:solidFill>
-                <a:latin typeface="Microsoft JhengHei UI"/>
+                  <a:srgbClr val="1C1C1C"/>
+                </a:solidFill>
+                <a:latin typeface="Segoe UI"/>
               </a:rPr>
               <a:t>  2.2  CRUD API                18 min</a:t>
             </a:r>
@@ -11472,9 +11472,9 @@
             <a:r>
               <a:rPr sz="2200" b="0" i="0">
                 <a:solidFill>
-                  <a:srgbClr val="1A1A1A"/>
-                </a:solidFill>
-                <a:latin typeface="Microsoft JhengHei UI"/>
+                  <a:srgbClr val="1C1C1C"/>
+                </a:solidFill>
+                <a:latin typeface="Segoe UI"/>
               </a:rPr>
               <a:t>  3.1  前端元件              15 min</a:t>
             </a:r>
@@ -11491,9 +11491,9 @@
             <a:r>
               <a:rPr sz="2200" b="0" i="0">
                 <a:solidFill>
-                  <a:srgbClr val="1A1A1A"/>
-                </a:solidFill>
-                <a:latin typeface="Microsoft JhengHei UI"/>
+                  <a:srgbClr val="1C1C1C"/>
+                </a:solidFill>
+                <a:latin typeface="Segoe UI"/>
               </a:rPr>
               <a:t>  3.2  CRUD 互動              12 min</a:t>
             </a:r>
@@ -11510,9 +11510,9 @@
             <a:r>
               <a:rPr sz="2200" b="0" i="0">
                 <a:solidFill>
-                  <a:srgbClr val="1A1A1A"/>
-                </a:solidFill>
-                <a:latin typeface="Microsoft JhengHei UI"/>
+                  <a:srgbClr val="1C1C1C"/>
+                </a:solidFill>
+                <a:latin typeface="Segoe UI"/>
               </a:rPr>
               <a:t>  4.1  Bug 修復                3 min</a:t>
             </a:r>
@@ -11529,9 +11529,9 @@
             <a:r>
               <a:rPr sz="2200" b="0" i="0">
                 <a:solidFill>
-                  <a:srgbClr val="A0A0AA"/>
-                </a:solidFill>
-                <a:latin typeface="Microsoft JhengHei UI"/>
+                  <a:srgbClr val="A8A6A0"/>
+                </a:solidFill>
+                <a:latin typeface="Segoe UI"/>
               </a:rPr>
               <a:t>  ───────────────────────────</a:t>
             </a:r>
@@ -11548,9 +11548,9 @@
             <a:r>
               <a:rPr sz="2200" b="1" i="0">
                 <a:solidFill>
-                  <a:srgbClr val="1B8C4E"/>
-                </a:solidFill>
-                <a:latin typeface="Microsoft JhengHei UI"/>
+                  <a:srgbClr val="5B7A52"/>
+                </a:solidFill>
+                <a:latin typeface="Segoe UI"/>
               </a:rPr>
               <a:t>  合計                          60 min</a:t>
             </a:r>
@@ -11567,9 +11567,9 @@
             <a:r>
               <a:rPr sz="1200" b="0" i="0">
                 <a:solidFill>
-                  <a:srgbClr val="1A1A1A"/>
-                </a:solidFill>
-                <a:latin typeface="Microsoft JhengHei UI"/>
+                  <a:srgbClr val="1C1C1C"/>
+                </a:solidFill>
+                <a:latin typeface="Segoe UI"/>
               </a:rPr>
               <a:t/>
             </a:r>
@@ -11586,9 +11586,9 @@
             <a:r>
               <a:rPr sz="1800" b="0" i="0">
                 <a:solidFill>
-                  <a:srgbClr val="6B6B76"/>
-                </a:solidFill>
-                <a:latin typeface="Microsoft JhengHei UI"/>
+                  <a:srgbClr val="5F5F5D"/>
+                </a:solidFill>
+                <a:latin typeface="Segoe UI"/>
               </a:rPr>
               <a:t>→  全部由 Hook 自動追蹤，對回顧和未來估算非常有用</a:t>
             </a:r>
@@ -11609,7 +11609,7 @@
     <p:bg>
       <p:bgPr>
         <a:solidFill>
-          <a:srgbClr val="FAFAFC"/>
+          <a:srgbClr val="F7F4ED"/>
         </a:solidFill>
         <a:effectLst/>
       </p:bgPr>
@@ -11647,9 +11647,9 @@
             <a:r>
               <a:rPr sz="2000" b="0" i="0">
                 <a:solidFill>
-                  <a:srgbClr val="1A6BE5"/>
-                </a:solidFill>
-                <a:latin typeface="Microsoft JhengHei UI"/>
+                  <a:srgbClr val="1C1C1C"/>
+                </a:solidFill>
+                <a:latin typeface="Segoe UI"/>
               </a:rPr>
               <a:t>Chapter 5</a:t>
             </a:r>
@@ -11682,9 +11682,9 @@
             <a:r>
               <a:rPr sz="4000" b="1" i="0">
                 <a:solidFill>
-                  <a:srgbClr val="1A1A1A"/>
-                </a:solidFill>
-                <a:latin typeface="Microsoft JhengHei UI"/>
+                  <a:srgbClr val="1C1C1C"/>
+                </a:solidFill>
+                <a:latin typeface="Segoe UI"/>
               </a:rPr>
               <a:t>進階技巧與收尾</a:t>
             </a:r>
@@ -11705,7 +11705,7 @@
     <p:bg>
       <p:bgPr>
         <a:solidFill>
-          <a:srgbClr val="FAFAFC"/>
+          <a:srgbClr val="F7F4ED"/>
         </a:solidFill>
         <a:effectLst/>
       </p:bgPr>
@@ -11742,9 +11742,9 @@
             <a:r>
               <a:rPr sz="3200" b="1" i="0">
                 <a:solidFill>
-                  <a:srgbClr val="1A1A1A"/>
-                </a:solidFill>
-                <a:latin typeface="Microsoft JhengHei UI"/>
+                  <a:srgbClr val="1C1C1C"/>
+                </a:solidFill>
+                <a:latin typeface="Segoe UI"/>
               </a:rPr>
               <a:t>更多可以探索的功能</a:t>
             </a:r>
@@ -11766,7 +11766,7 @@
             <a:avLst/>
           </a:prstGeom>
           <a:solidFill>
-            <a:srgbClr val="1A6BE5"/>
+            <a:srgbClr val="1C1C1C"/>
           </a:solidFill>
           <a:ln>
             <a:noFill/>
@@ -11828,9 +11828,9 @@
             <a:r>
               <a:rPr sz="2200" b="0" i="0">
                 <a:solidFill>
-                  <a:srgbClr val="1A1A1A"/>
-                </a:solidFill>
-                <a:latin typeface="Microsoft JhengHei UI"/>
+                  <a:srgbClr val="1C1C1C"/>
+                </a:solidFill>
+                <a:latin typeface="Segoe UI"/>
               </a:rPr>
               <a:t>/save-session      保存會話狀態，下次接續</a:t>
             </a:r>
@@ -11847,9 +11847,9 @@
             <a:r>
               <a:rPr sz="1600" b="0" i="0">
                 <a:solidFill>
-                  <a:srgbClr val="6B6B76"/>
-                </a:solidFill>
-                <a:latin typeface="Microsoft JhengHei UI"/>
+                  <a:srgbClr val="5F5F5D"/>
+                </a:solidFill>
+                <a:latin typeface="Segoe UI"/>
               </a:rPr>
               <a:t>                             → 每次下班前執行，隔天無縫接續</a:t>
             </a:r>
@@ -11866,9 +11866,9 @@
             <a:r>
               <a:rPr sz="600" b="0" i="0">
                 <a:solidFill>
-                  <a:srgbClr val="1A1A1A"/>
-                </a:solidFill>
-                <a:latin typeface="Microsoft JhengHei UI"/>
+                  <a:srgbClr val="1C1C1C"/>
+                </a:solidFill>
+                <a:latin typeface="Segoe UI"/>
               </a:rPr>
               <a:t/>
             </a:r>
@@ -11885,9 +11885,9 @@
             <a:r>
               <a:rPr sz="2200" b="0" i="0">
                 <a:solidFill>
-                  <a:srgbClr val="1A1A1A"/>
-                </a:solidFill>
-                <a:latin typeface="Microsoft JhengHei UI"/>
+                  <a:srgbClr val="1C1C1C"/>
+                </a:solidFill>
+                <a:latin typeface="Segoe UI"/>
               </a:rPr>
               <a:t>/hub-delegate       手動點名 Agent 執行任務</a:t>
             </a:r>
@@ -11904,9 +11904,9 @@
             <a:r>
               <a:rPr sz="1600" b="0" i="0">
                 <a:solidFill>
-                  <a:srgbClr val="6B6B76"/>
-                </a:solidFill>
-                <a:latin typeface="Microsoft JhengHei UI"/>
+                  <a:srgbClr val="5F5F5D"/>
+                </a:solidFill>
+                <a:latin typeface="Segoe UI"/>
               </a:rPr>
               <a:t>                             → 例如直接請 security-auditor 掃描安全</a:t>
             </a:r>
@@ -11923,9 +11923,9 @@
             <a:r>
               <a:rPr sz="600" b="0" i="0">
                 <a:solidFill>
-                  <a:srgbClr val="1A1A1A"/>
-                </a:solidFill>
-                <a:latin typeface="Microsoft JhengHei UI"/>
+                  <a:srgbClr val="1C1C1C"/>
+                </a:solidFill>
+                <a:latin typeface="Segoe UI"/>
               </a:rPr>
               <a:t/>
             </a:r>
@@ -11942,9 +11942,9 @@
             <a:r>
               <a:rPr sz="2200" b="0" i="0">
                 <a:solidFill>
-                  <a:srgbClr val="1A1A1A"/>
-                </a:solidFill>
-                <a:latin typeface="Microsoft JhengHei UI"/>
+                  <a:srgbClr val="1C1C1C"/>
+                </a:solidFill>
+                <a:latin typeface="Segoe UI"/>
               </a:rPr>
               <a:t>/learn                   萃取可複用模式</a:t>
             </a:r>
@@ -11961,9 +11961,9 @@
             <a:r>
               <a:rPr sz="1600" b="0" i="0">
                 <a:solidFill>
-                  <a:srgbClr val="6B6B76"/>
-                </a:solidFill>
-                <a:latin typeface="Microsoft JhengHei UI"/>
+                  <a:srgbClr val="5F5F5D"/>
+                </a:solidFill>
+                <a:latin typeface="Segoe UI"/>
               </a:rPr>
               <a:t>                             → 教 AI 學會你的開發偏好</a:t>
             </a:r>
@@ -11980,9 +11980,9 @@
             <a:r>
               <a:rPr sz="600" b="0" i="0">
                 <a:solidFill>
-                  <a:srgbClr val="1A1A1A"/>
-                </a:solidFill>
-                <a:latin typeface="Microsoft JhengHei UI"/>
+                  <a:srgbClr val="1C1C1C"/>
+                </a:solidFill>
+                <a:latin typeface="Segoe UI"/>
               </a:rPr>
               <a:t/>
             </a:r>
@@ -11999,9 +11999,9 @@
             <a:r>
               <a:rPr sz="2200" b="0" i="0">
                 <a:solidFill>
-                  <a:srgbClr val="1A1A1A"/>
-                </a:solidFill>
-                <a:latin typeface="Microsoft JhengHei UI"/>
+                  <a:srgbClr val="1C1C1C"/>
+                </a:solidFill>
+                <a:latin typeface="Segoe UI"/>
               </a:rPr>
               <a:t>94+ 備用技能包  custom-rule&amp;skill/skills/</a:t>
             </a:r>
@@ -12018,9 +12018,9 @@
             <a:r>
               <a:rPr sz="1600" b="0" i="0">
                 <a:solidFill>
-                  <a:srgbClr val="6B6B76"/>
-                </a:solidFill>
-                <a:latin typeface="Microsoft JhengHei UI"/>
+                  <a:srgbClr val="5F5F5D"/>
+                </a:solidFill>
+                <a:latin typeface="Segoe UI"/>
               </a:rPr>
               <a:t>                             → 複製過來就能用，涵蓋各種語言框架</a:t>
             </a:r>
@@ -12041,7 +12041,7 @@
     <p:bg>
       <p:bgPr>
         <a:solidFill>
-          <a:srgbClr val="FAFAFC"/>
+          <a:srgbClr val="F7F4ED"/>
         </a:solidFill>
         <a:effectLst/>
       </p:bgPr>
@@ -12078,9 +12078,9 @@
             <a:r>
               <a:rPr sz="3200" b="1" i="0">
                 <a:solidFill>
-                  <a:srgbClr val="1A1A1A"/>
-                </a:solidFill>
-                <a:latin typeface="Microsoft JhengHei UI"/>
+                  <a:srgbClr val="1C1C1C"/>
+                </a:solidFill>
+                <a:latin typeface="Segoe UI"/>
               </a:rPr>
               <a:t>完整流程回顧</a:t>
             </a:r>
@@ -12102,7 +12102,7 @@
             <a:avLst/>
           </a:prstGeom>
           <a:solidFill>
-            <a:srgbClr val="1A6BE5"/>
+            <a:srgbClr val="1C1C1C"/>
           </a:solidFill>
           <a:ln>
             <a:noFill/>
@@ -12164,9 +12164,9 @@
             <a:r>
               <a:rPr sz="2000" b="0" i="0">
                 <a:solidFill>
-                  <a:srgbClr val="6B6B76"/>
-                </a:solidFill>
-                <a:latin typeface="Microsoft JhengHei UI"/>
+                  <a:srgbClr val="5F5F5D"/>
+                </a:solidFill>
+                <a:latin typeface="Segoe UI"/>
               </a:rPr>
               <a:t>Ch1   認識模板         5 大機制、13 個 Agent</a:t>
             </a:r>
@@ -12183,9 +12183,9 @@
             <a:r>
               <a:rPr sz="2000" b="0" i="0">
                 <a:solidFill>
-                  <a:srgbClr val="6B6B76"/>
-                </a:solidFill>
-                <a:latin typeface="Microsoft JhengHei UI"/>
+                  <a:srgbClr val="5F5F5D"/>
+                </a:solidFill>
+                <a:latin typeface="Segoe UI"/>
               </a:rPr>
               <a:t>Ch2   /task-init           專案初始化 → CLAUDE.md + WBS</a:t>
             </a:r>
@@ -12202,9 +12202,9 @@
             <a:r>
               <a:rPr sz="2000" b="0" i="0">
                 <a:solidFill>
-                  <a:srgbClr val="1A1A1A"/>
-                </a:solidFill>
-                <a:latin typeface="Microsoft JhengHei UI"/>
+                  <a:srgbClr val="1C1C1C"/>
+                </a:solidFill>
+                <a:latin typeface="Segoe UI"/>
               </a:rPr>
               <a:t>Ch3   開發循環 x3       /task-next → /plan → /tdd → /review-code</a:t>
             </a:r>
@@ -12221,9 +12221,9 @@
             <a:r>
               <a:rPr sz="2000" b="0" i="0">
                 <a:solidFill>
-                  <a:srgbClr val="1A1A1A"/>
-                </a:solidFill>
-                <a:latin typeface="Microsoft JhengHei UI"/>
+                  <a:srgbClr val="1C1C1C"/>
+                </a:solidFill>
+                <a:latin typeface="Segoe UI"/>
               </a:rPr>
               <a:t>Ch4   品質驗證           /verify → /e2e → /time-log</a:t>
             </a:r>
@@ -12240,9 +12240,9 @@
             <a:r>
               <a:rPr sz="2000" b="0" i="0">
                 <a:solidFill>
-                  <a:srgbClr val="6B6B76"/>
-                </a:solidFill>
-                <a:latin typeface="Microsoft JhengHei UI"/>
+                  <a:srgbClr val="5F5F5D"/>
+                </a:solidFill>
+                <a:latin typeface="Segoe UI"/>
               </a:rPr>
               <a:t>Ch5   進階技巧           /save-session、/learn、擴充技能</a:t>
             </a:r>
@@ -12259,9 +12259,9 @@
             <a:r>
               <a:rPr sz="1600" b="0" i="0">
                 <a:solidFill>
-                  <a:srgbClr val="1A1A1A"/>
-                </a:solidFill>
-                <a:latin typeface="Microsoft JhengHei UI"/>
+                  <a:srgbClr val="1C1C1C"/>
+                </a:solidFill>
+                <a:latin typeface="Segoe UI"/>
               </a:rPr>
               <a:t/>
             </a:r>
@@ -12278,9 +12278,9 @@
             <a:r>
               <a:rPr sz="2200" b="1" i="0">
                 <a:solidFill>
-                  <a:srgbClr val="1B8C4E"/>
-                </a:solidFill>
-                <a:latin typeface="Microsoft JhengHei UI"/>
+                  <a:srgbClr val="5B7A52"/>
+                </a:solidFill>
+                <a:latin typeface="Segoe UI"/>
               </a:rPr>
               <a:t>→  ~60 min 完成一個有測試、有文檔、有品質門的全端應用</a:t>
             </a:r>
@@ -12301,7 +12301,7 @@
     <p:bg>
       <p:bgPr>
         <a:solidFill>
-          <a:srgbClr val="FAFAFC"/>
+          <a:srgbClr val="F7F4ED"/>
         </a:solidFill>
         <a:effectLst/>
       </p:bgPr>
@@ -12338,9 +12338,9 @@
             <a:r>
               <a:rPr sz="3200" b="1" i="0">
                 <a:solidFill>
-                  <a:srgbClr val="1A1A1A"/>
-                </a:solidFill>
-                <a:latin typeface="Microsoft JhengHei UI"/>
+                  <a:srgbClr val="1C1C1C"/>
+                </a:solidFill>
+                <a:latin typeface="Segoe UI"/>
               </a:rPr>
               <a:t>課後作業 — 選一個挑戰</a:t>
             </a:r>
@@ -12362,7 +12362,7 @@
             <a:avLst/>
           </a:prstGeom>
           <a:solidFill>
-            <a:srgbClr val="1A6BE5"/>
+            <a:srgbClr val="1C1C1C"/>
           </a:solidFill>
           <a:ln>
             <a:noFill/>
@@ -12424,9 +12424,9 @@
             <a:r>
               <a:rPr sz="2400" b="1" i="0">
                 <a:solidFill>
-                  <a:srgbClr val="1B8C4E"/>
-                </a:solidFill>
-                <a:latin typeface="Microsoft JhengHei UI"/>
+                  <a:srgbClr val="5B7A52"/>
+                </a:solidFill>
+                <a:latin typeface="Segoe UI"/>
               </a:rPr>
               <a:t>初級</a:t>
             </a:r>
@@ -12443,9 +12443,9 @@
             <a:r>
               <a:rPr sz="1800" b="0" i="0">
                 <a:solidFill>
-                  <a:srgbClr val="1A1A1A"/>
-                </a:solidFill>
-                <a:latin typeface="Microsoft JhengHei UI"/>
+                  <a:srgbClr val="1C1C1C"/>
+                </a:solidFill>
+                <a:latin typeface="Segoe UI"/>
               </a:rPr>
               <a:t>  用模板建立一個「記帳本」App，跑完 /task-init → /task-next → /tdd 循環</a:t>
             </a:r>
@@ -12462,9 +12462,9 @@
             <a:r>
               <a:rPr sz="800" b="0" i="0">
                 <a:solidFill>
-                  <a:srgbClr val="1A1A1A"/>
-                </a:solidFill>
-                <a:latin typeface="Microsoft JhengHei UI"/>
+                  <a:srgbClr val="1C1C1C"/>
+                </a:solidFill>
+                <a:latin typeface="Segoe UI"/>
               </a:rPr>
               <a:t/>
             </a:r>
@@ -12481,9 +12481,9 @@
             <a:r>
               <a:rPr sz="2400" b="1" i="0">
                 <a:solidFill>
-                  <a:srgbClr val="1A6BE5"/>
-                </a:solidFill>
-                <a:latin typeface="Microsoft JhengHei UI"/>
+                  <a:srgbClr val="1C1C1C"/>
+                </a:solidFill>
+                <a:latin typeface="Segoe UI"/>
               </a:rPr>
               <a:t>中級</a:t>
             </a:r>
@@ -12500,9 +12500,9 @@
             <a:r>
               <a:rPr sz="1800" b="0" i="0">
                 <a:solidFill>
-                  <a:srgbClr val="1A1A1A"/>
-                </a:solidFill>
-                <a:latin typeface="Microsoft JhengHei UI"/>
+                  <a:srgbClr val="1C1C1C"/>
+                </a:solidFill>
+                <a:latin typeface="Segoe UI"/>
               </a:rPr>
               <a:t>  為 TaskFlow 加上「到期日」欄位，練習 SQLModel migration + 前端更新</a:t>
             </a:r>
@@ -12519,9 +12519,9 @@
             <a:r>
               <a:rPr sz="800" b="0" i="0">
                 <a:solidFill>
-                  <a:srgbClr val="1A1A1A"/>
-                </a:solidFill>
-                <a:latin typeface="Microsoft JhengHei UI"/>
+                  <a:srgbClr val="1C1C1C"/>
+                </a:solidFill>
+                <a:latin typeface="Segoe UI"/>
               </a:rPr>
               <a:t/>
             </a:r>
@@ -12538,9 +12538,9 @@
             <a:r>
               <a:rPr sz="2400" b="1" i="0">
                 <a:solidFill>
-                  <a:srgbClr val="C48A0A"/>
-                </a:solidFill>
-                <a:latin typeface="Microsoft JhengHei UI"/>
+                  <a:srgbClr val="9A7B3A"/>
+                </a:solidFill>
+                <a:latin typeface="Segoe UI"/>
               </a:rPr>
               <a:t>進階</a:t>
             </a:r>
@@ -12557,9 +12557,9 @@
             <a:r>
               <a:rPr sz="1800" b="0" i="0">
                 <a:solidFill>
-                  <a:srgbClr val="1A1A1A"/>
-                </a:solidFill>
-                <a:latin typeface="Microsoft JhengHei UI"/>
+                  <a:srgbClr val="1C1C1C"/>
+                </a:solidFill>
+                <a:latin typeface="Segoe UI"/>
               </a:rPr>
               <a:t>  為 TaskFlow 加上 JWT 認證（FastAPI Security），體驗 security-auditor agent</a:t>
             </a:r>
@@ -12580,7 +12580,7 @@
     <p:bg>
       <p:bgPr>
         <a:solidFill>
-          <a:srgbClr val="FAFAFC"/>
+          <a:srgbClr val="F7F4ED"/>
         </a:solidFill>
         <a:effectLst/>
       </p:bgPr>
@@ -12617,9 +12617,9 @@
             <a:r>
               <a:rPr sz="3200" b="1" i="0">
                 <a:solidFill>
-                  <a:srgbClr val="1A1A1A"/>
-                </a:solidFill>
-                <a:latin typeface="Microsoft JhengHei UI"/>
+                  <a:srgbClr val="1C1C1C"/>
+                </a:solidFill>
+                <a:latin typeface="Segoe UI"/>
               </a:rPr>
               <a:t>推薦探索路徑</a:t>
             </a:r>
@@ -12641,7 +12641,7 @@
             <a:avLst/>
           </a:prstGeom>
           <a:solidFill>
-            <a:srgbClr val="1A6BE5"/>
+            <a:srgbClr val="1C1C1C"/>
           </a:solidFill>
           <a:ln>
             <a:noFill/>
@@ -12703,9 +12703,9 @@
             <a:r>
               <a:rPr sz="2000" b="0" i="0">
                 <a:solidFill>
-                  <a:srgbClr val="1A1A1A"/>
-                </a:solidFill>
-                <a:latin typeface="Microsoft JhengHei UI"/>
+                  <a:srgbClr val="1C1C1C"/>
+                </a:solidFill>
+                <a:latin typeface="Segoe UI"/>
               </a:rPr>
               <a:t>想深入 Agent 機制     →  .claude/agents/ (13 個定義檔)</a:t>
             </a:r>
@@ -12722,9 +12722,9 @@
             <a:r>
               <a:rPr sz="2000" b="0" i="0">
                 <a:solidFill>
-                  <a:srgbClr val="1A1A1A"/>
-                </a:solidFill>
-                <a:latin typeface="Microsoft JhengHei UI"/>
+                  <a:srgbClr val="1C1C1C"/>
+                </a:solidFill>
+                <a:latin typeface="Segoe UI"/>
               </a:rPr>
               <a:t>想客製化規則        →  .claude/rules/ (修改或新增)</a:t>
             </a:r>
@@ -12741,9 +12741,9 @@
             <a:r>
               <a:rPr sz="2000" b="0" i="0">
                 <a:solidFill>
-                  <a:srgbClr val="1A1A1A"/>
-                </a:solidFill>
-                <a:latin typeface="Microsoft JhengHei UI"/>
+                  <a:srgbClr val="1C1C1C"/>
+                </a:solidFill>
+                <a:latin typeface="Segoe UI"/>
               </a:rPr>
               <a:t>想擴充技能            →  custom-rule&amp;skill/skills/ (94+)</a:t>
             </a:r>
@@ -12760,9 +12760,9 @@
             <a:r>
               <a:rPr sz="2000" b="0" i="0">
                 <a:solidFill>
-                  <a:srgbClr val="1A1A1A"/>
-                </a:solidFill>
-                <a:latin typeface="Microsoft JhengHei UI"/>
+                  <a:srgbClr val="1C1C1C"/>
+                </a:solidFill>
+                <a:latin typeface="Segoe UI"/>
               </a:rPr>
               <a:t>想做完整專案文件  →  /project-docs + 16 個模板</a:t>
             </a:r>
@@ -12779,9 +12779,9 @@
             <a:r>
               <a:rPr sz="2000" b="0" i="0">
                 <a:solidFill>
-                  <a:srgbClr val="1A1A1A"/>
-                </a:solidFill>
-                <a:latin typeface="Microsoft JhengHei UI"/>
+                  <a:srgbClr val="1C1C1C"/>
+                </a:solidFill>
+                <a:latin typeface="Segoe UI"/>
               </a:rPr>
               <a:t>想建 MCP Server     →  mcp-builder skill</a:t>
             </a:r>
@@ -12798,9 +12798,9 @@
             <a:r>
               <a:rPr sz="2000" b="0" i="0">
                 <a:solidFill>
-                  <a:srgbClr val="1A1A1A"/>
-                </a:solidFill>
-                <a:latin typeface="Microsoft JhengHei UI"/>
+                  <a:srgbClr val="1C1C1C"/>
+                </a:solidFill>
+                <a:latin typeface="Segoe UI"/>
               </a:rPr>
               <a:t>想瞭解運作原理     →  .claude/guides/MECHANISMS.md</a:t>
             </a:r>
@@ -12817,9 +12817,9 @@
             <a:r>
               <a:rPr sz="1600" b="0" i="0">
                 <a:solidFill>
-                  <a:srgbClr val="1A1A1A"/>
-                </a:solidFill>
-                <a:latin typeface="Microsoft JhengHei UI"/>
+                  <a:srgbClr val="1C1C1C"/>
+                </a:solidFill>
+                <a:latin typeface="Segoe UI"/>
               </a:rPr>
               <a:t/>
             </a:r>
@@ -12836,9 +12836,9 @@
             <a:r>
               <a:rPr sz="1800" b="0" i="0">
                 <a:solidFill>
-                  <a:srgbClr val="1A6BE5"/>
-                </a:solidFill>
-                <a:latin typeface="Microsoft JhengHei UI"/>
+                  <a:srgbClr val="1C1C1C"/>
+                </a:solidFill>
+                <a:latin typeface="Segoe UI"/>
               </a:rPr>
               <a:t>速查卡： workshop/docs/03_command_cheatsheet.md</a:t>
             </a:r>
@@ -12859,7 +12859,7 @@
     <p:bg>
       <p:bgPr>
         <a:solidFill>
-          <a:srgbClr val="FAFAFC"/>
+          <a:srgbClr val="F7F4ED"/>
         </a:solidFill>
         <a:effectLst/>
       </p:bgPr>
@@ -12897,9 +12897,9 @@
             <a:r>
               <a:rPr sz="4400" b="1" i="0">
                 <a:solidFill>
-                  <a:srgbClr val="1A1A1A"/>
-                </a:solidFill>
-                <a:latin typeface="Microsoft JhengHei UI"/>
+                  <a:srgbClr val="1C1C1C"/>
+                </a:solidFill>
+                <a:latin typeface="Segoe UI"/>
               </a:rPr>
               <a:t>Q &amp; A</a:t>
             </a:r>
@@ -12916,9 +12916,9 @@
             <a:r>
               <a:rPr sz="2200" b="0" i="0">
                 <a:solidFill>
-                  <a:srgbClr val="6B6B76"/>
-                </a:solidFill>
-                <a:latin typeface="Microsoft JhengHei UI"/>
+                  <a:srgbClr val="5F5F5D"/>
+                </a:solidFill>
+                <a:latin typeface="Segoe UI"/>
               </a:rPr>
               <a:t>問任何關於模板、工作流、Claude Code 的問題</a:t>
             </a:r>
@@ -12940,7 +12940,7 @@
             <a:avLst/>
           </a:prstGeom>
           <a:solidFill>
-            <a:srgbClr val="1A6BE5"/>
+            <a:srgbClr val="1C1C1C"/>
           </a:solidFill>
           <a:ln>
             <a:noFill/>
@@ -12982,7 +12982,7 @@
     <p:bg>
       <p:bgPr>
         <a:solidFill>
-          <a:srgbClr val="FAFAFC"/>
+          <a:srgbClr val="F7F4ED"/>
         </a:solidFill>
         <a:effectLst/>
       </p:bgPr>
@@ -13020,9 +13020,9 @@
             <a:r>
               <a:rPr sz="4400" b="1" i="0">
                 <a:solidFill>
-                  <a:srgbClr val="1A1A1A"/>
-                </a:solidFill>
-                <a:latin typeface="Microsoft JhengHei UI"/>
+                  <a:srgbClr val="1C1C1C"/>
+                </a:solidFill>
+                <a:latin typeface="Segoe UI"/>
               </a:rPr>
               <a:t>Thank You</a:t>
             </a:r>
@@ -13039,9 +13039,9 @@
             <a:r>
               <a:rPr sz="2200" b="0" i="0">
                 <a:solidFill>
-                  <a:srgbClr val="6B6B76"/>
-                </a:solidFill>
-                <a:latin typeface="Microsoft JhengHei UI"/>
+                  <a:srgbClr val="5F5F5D"/>
+                </a:solidFill>
+                <a:latin typeface="Segoe UI"/>
               </a:rPr>
               <a:t>速查卡在 workshop/docs/ — 有問題隨時在內部頻道問</a:t>
             </a:r>
@@ -13063,7 +13063,7 @@
             <a:avLst/>
           </a:prstGeom>
           <a:solidFill>
-            <a:srgbClr val="1A6BE5"/>
+            <a:srgbClr val="1C1C1C"/>
           </a:solidFill>
           <a:ln>
             <a:noFill/>
@@ -13105,7 +13105,7 @@
     <p:bg>
       <p:bgPr>
         <a:solidFill>
-          <a:srgbClr val="FAFAFC"/>
+          <a:srgbClr val="F7F4ED"/>
         </a:solidFill>
         <a:effectLst/>
       </p:bgPr>
@@ -13142,9 +13142,9 @@
             <a:r>
               <a:rPr sz="3200" b="1" i="0">
                 <a:solidFill>
-                  <a:srgbClr val="1A1A1A"/>
-                </a:solidFill>
-                <a:latin typeface="Microsoft JhengHei UI"/>
+                  <a:srgbClr val="1C1C1C"/>
+                </a:solidFill>
+                <a:latin typeface="Segoe UI"/>
               </a:rPr>
               <a:t>VibeCoding 模板 = AI 開發的標準作業程序</a:t>
             </a:r>
@@ -13166,7 +13166,7 @@
             <a:avLst/>
           </a:prstGeom>
           <a:solidFill>
-            <a:srgbClr val="1A6BE5"/>
+            <a:srgbClr val="1C1C1C"/>
           </a:solidFill>
           <a:ln>
             <a:noFill/>
@@ -13228,9 +13228,9 @@
             <a:r>
               <a:rPr sz="2000" b="0" i="0">
                 <a:solidFill>
-                  <a:srgbClr val="1A1A1A"/>
-                </a:solidFill>
-                <a:latin typeface="Microsoft JhengHei UI"/>
+                  <a:srgbClr val="1C1C1C"/>
+                </a:solidFill>
+                <a:latin typeface="Segoe UI"/>
               </a:rPr>
               <a:t>📋  16 份文件模板        規範從需求到部署的每個階段</a:t>
             </a:r>
@@ -13247,9 +13247,9 @@
             <a:r>
               <a:rPr sz="2000" b="0" i="0">
                 <a:solidFill>
-                  <a:srgbClr val="1A1A1A"/>
-                </a:solidFill>
-                <a:latin typeface="Microsoft JhengHei UI"/>
+                  <a:srgbClr val="1C1C1C"/>
+                </a:solidFill>
+                <a:latin typeface="Segoe UI"/>
               </a:rPr>
               <a:t>🤖  13 個 AI Agent        各司其職、自動協作</a:t>
             </a:r>
@@ -13266,9 +13266,9 @@
             <a:r>
               <a:rPr sz="2000" b="0" i="0">
                 <a:solidFill>
-                  <a:srgbClr val="1A1A1A"/>
-                </a:solidFill>
-                <a:latin typeface="Microsoft JhengHei UI"/>
+                  <a:srgbClr val="1C1C1C"/>
+                </a:solidFill>
+                <a:latin typeface="Segoe UI"/>
               </a:rPr>
               <a:t>⚡  17 個快捷指令        一行啟動完整流程</a:t>
             </a:r>
@@ -13285,9 +13285,9 @@
             <a:r>
               <a:rPr sz="2000" b="0" i="0">
                 <a:solidFill>
-                  <a:srgbClr val="1A1A1A"/>
-                </a:solidFill>
-                <a:latin typeface="Microsoft JhengHei UI"/>
+                  <a:srgbClr val="1C1C1C"/>
+                </a:solidFill>
+                <a:latin typeface="Segoe UI"/>
               </a:rPr>
               <a:t>📏   9 條自動規則         品質底線自動守護</a:t>
             </a:r>
@@ -13304,9 +13304,9 @@
             <a:r>
               <a:rPr sz="2000" b="0" i="0">
                 <a:solidFill>
-                  <a:srgbClr val="1A1A1A"/>
-                </a:solidFill>
-                <a:latin typeface="Microsoft JhengHei UI"/>
+                  <a:srgbClr val="1C1C1C"/>
+                </a:solidFill>
+                <a:latin typeface="Segoe UI"/>
               </a:rPr>
               <a:t>🔧   7 個領域技能         按需載入專業知識</a:t>
             </a:r>
@@ -13323,9 +13323,9 @@
             <a:r>
               <a:rPr sz="1200" b="0" i="0">
                 <a:solidFill>
-                  <a:srgbClr val="1A1A1A"/>
-                </a:solidFill>
-                <a:latin typeface="Microsoft JhengHei UI"/>
+                  <a:srgbClr val="1C1C1C"/>
+                </a:solidFill>
+                <a:latin typeface="Segoe UI"/>
               </a:rPr>
               <a:t/>
             </a:r>
@@ -13342,9 +13342,9 @@
             <a:r>
               <a:rPr sz="2000" b="1" i="0">
                 <a:solidFill>
-                  <a:srgbClr val="1A6BE5"/>
-                </a:solidFill>
-                <a:latin typeface="Microsoft JhengHei UI"/>
+                  <a:srgbClr val="1C1C1C"/>
+                </a:solidFill>
+                <a:latin typeface="Segoe UI"/>
               </a:rPr>
               <a:t>→  複製到任何新專案，立即可用</a:t>
             </a:r>
@@ -13365,7 +13365,7 @@
     <p:bg>
       <p:bgPr>
         <a:solidFill>
-          <a:srgbClr val="FAFAFC"/>
+          <a:srgbClr val="F7F4ED"/>
         </a:solidFill>
         <a:effectLst/>
       </p:bgPr>
@@ -13402,9 +13402,9 @@
             <a:r>
               <a:rPr sz="3200" b="1" i="0">
                 <a:solidFill>
-                  <a:srgbClr val="1A1A1A"/>
-                </a:solidFill>
-                <a:latin typeface="Microsoft JhengHei UI"/>
+                  <a:srgbClr val="1C1C1C"/>
+                </a:solidFill>
+                <a:latin typeface="Segoe UI"/>
               </a:rPr>
               <a:t>對比 — 沒模板 vs 有模板</a:t>
             </a:r>
@@ -13426,7 +13426,7 @@
             <a:avLst/>
           </a:prstGeom>
           <a:solidFill>
-            <a:srgbClr val="1A6BE5"/>
+            <a:srgbClr val="1C1C1C"/>
           </a:solidFill>
           <a:ln>
             <a:noFill/>
@@ -13479,9 +13479,9 @@
             <a:r>
               <a:rPr sz="2200" b="1" i="0">
                 <a:solidFill>
-                  <a:srgbClr val="1A6BE5"/>
-                </a:solidFill>
-                <a:latin typeface="Microsoft JhengHei UI"/>
+                  <a:srgbClr val="1C1C1C"/>
+                </a:solidFill>
+                <a:latin typeface="Segoe UI"/>
               </a:rPr>
               <a:t>❌  沒有模板</a:t>
             </a:r>
@@ -13498,9 +13498,9 @@
             <a:r>
               <a:rPr sz="1800" b="0" i="0">
                 <a:solidFill>
-                  <a:srgbClr val="1A1A1A"/>
-                </a:solidFill>
-                <a:latin typeface="Microsoft JhengHei UI"/>
+                  <a:srgbClr val="1C1C1C"/>
+                </a:solidFill>
+                <a:latin typeface="Segoe UI"/>
               </a:rPr>
               <a:t>"幫我寫一個 Todo App"</a:t>
             </a:r>
@@ -13517,9 +13517,9 @@
             <a:r>
               <a:rPr sz="1800" b="0" i="0">
                 <a:solidFill>
-                  <a:srgbClr val="1A1A1A"/>
-                </a:solidFill>
-                <a:latin typeface="Microsoft JhengHei UI"/>
+                  <a:srgbClr val="1C1C1C"/>
+                </a:solidFill>
+                <a:latin typeface="Segoe UI"/>
               </a:rPr>
               <a:t>→ AI 直接寫一大段程式碼</a:t>
             </a:r>
@@ -13536,9 +13536,9 @@
             <a:r>
               <a:rPr sz="1800" b="0" i="0">
                 <a:solidFill>
-                  <a:srgbClr val="1A1A1A"/>
-                </a:solidFill>
-                <a:latin typeface="Microsoft JhengHei UI"/>
+                  <a:srgbClr val="1C1C1C"/>
+                </a:solidFill>
+                <a:latin typeface="Segoe UI"/>
               </a:rPr>
               <a:t>→ 沒測試</a:t>
             </a:r>
@@ -13555,9 +13555,9 @@
             <a:r>
               <a:rPr sz="1800" b="0" i="0">
                 <a:solidFill>
-                  <a:srgbClr val="1A1A1A"/>
-                </a:solidFill>
-                <a:latin typeface="Microsoft JhengHei UI"/>
+                  <a:srgbClr val="1C1C1C"/>
+                </a:solidFill>
+                <a:latin typeface="Segoe UI"/>
               </a:rPr>
               <a:t>→ 沒文件</a:t>
             </a:r>
@@ -13574,9 +13574,9 @@
             <a:r>
               <a:rPr sz="1800" b="0" i="0">
                 <a:solidFill>
-                  <a:srgbClr val="1A1A1A"/>
-                </a:solidFill>
-                <a:latin typeface="Microsoft JhengHei UI"/>
+                  <a:srgbClr val="1C1C1C"/>
+                </a:solidFill>
+                <a:latin typeface="Segoe UI"/>
               </a:rPr>
               <a:t>→ 沒品質把關</a:t>
             </a:r>
@@ -13593,9 +13593,9 @@
             <a:r>
               <a:rPr sz="1800" b="0" i="0">
                 <a:solidFill>
-                  <a:srgbClr val="1A1A1A"/>
-                </a:solidFill>
-                <a:latin typeface="Microsoft JhengHei UI"/>
+                  <a:srgbClr val="1C1C1C"/>
+                </a:solidFill>
+                <a:latin typeface="Segoe UI"/>
               </a:rPr>
               <a:t>→ 出問題才發現</a:t>
             </a:r>
@@ -13627,9 +13627,9 @@
             <a:r>
               <a:rPr sz="2200" b="1" i="0">
                 <a:solidFill>
-                  <a:srgbClr val="1B8C4E"/>
-                </a:solidFill>
-                <a:latin typeface="Microsoft JhengHei UI"/>
+                  <a:srgbClr val="5B7A52"/>
+                </a:solidFill>
+                <a:latin typeface="Segoe UI"/>
               </a:rPr>
               <a:t>✅  有模板</a:t>
             </a:r>
@@ -13646,9 +13646,9 @@
             <a:r>
               <a:rPr sz="1800" b="0" i="0">
                 <a:solidFill>
-                  <a:srgbClr val="1A1A1A"/>
-                </a:solidFill>
-                <a:latin typeface="Microsoft JhengHei UI"/>
+                  <a:srgbClr val="1C1C1C"/>
+                </a:solidFill>
+                <a:latin typeface="Segoe UI"/>
               </a:rPr>
               <a:t>/task-init  → 互動式 Q&amp;A</a:t>
             </a:r>
@@ -13665,9 +13665,9 @@
             <a:r>
               <a:rPr sz="1800" b="0" i="0">
                 <a:solidFill>
-                  <a:srgbClr val="1A1A1A"/>
-                </a:solidFill>
-                <a:latin typeface="Microsoft JhengHei UI"/>
+                  <a:srgbClr val="1C1C1C"/>
+                </a:solidFill>
+                <a:latin typeface="Segoe UI"/>
               </a:rPr>
               <a:t>/task-next  → 拆好的任務</a:t>
             </a:r>
@@ -13684,9 +13684,9 @@
             <a:r>
               <a:rPr sz="1800" b="0" i="0">
                 <a:solidFill>
-                  <a:srgbClr val="1A1A1A"/>
-                </a:solidFill>
-                <a:latin typeface="Microsoft JhengHei UI"/>
+                  <a:srgbClr val="1C1C1C"/>
+                </a:solidFill>
+                <a:latin typeface="Segoe UI"/>
               </a:rPr>
               <a:t>/plan       → 先規劃再動手</a:t>
             </a:r>
@@ -13703,9 +13703,9 @@
             <a:r>
               <a:rPr sz="1800" b="0" i="0">
                 <a:solidFill>
-                  <a:srgbClr val="1A1A1A"/>
-                </a:solidFill>
-                <a:latin typeface="Microsoft JhengHei UI"/>
+                  <a:srgbClr val="1C1C1C"/>
+                </a:solidFill>
+                <a:latin typeface="Segoe UI"/>
               </a:rPr>
               <a:t>/tdd        → 先寫測試再實作</a:t>
             </a:r>
@@ -13722,9 +13722,9 @@
             <a:r>
               <a:rPr sz="1800" b="0" i="0">
                 <a:solidFill>
-                  <a:srgbClr val="1A1A1A"/>
-                </a:solidFill>
-                <a:latin typeface="Microsoft JhengHei UI"/>
+                  <a:srgbClr val="1C1C1C"/>
+                </a:solidFill>
+                <a:latin typeface="Segoe UI"/>
               </a:rPr>
               <a:t>/review-code → AI 審查</a:t>
             </a:r>
@@ -13741,9 +13741,9 @@
             <a:r>
               <a:rPr sz="1800" b="0" i="0">
                 <a:solidFill>
-                  <a:srgbClr val="1A1A1A"/>
-                </a:solidFill>
-                <a:latin typeface="Microsoft JhengHei UI"/>
+                  <a:srgbClr val="1C1C1C"/>
+                </a:solidFill>
+                <a:latin typeface="Segoe UI"/>
               </a:rPr>
               <a:t>/verify     → 品質門把關</a:t>
             </a:r>
@@ -13764,7 +13764,7 @@
     <p:bg>
       <p:bgPr>
         <a:solidFill>
-          <a:srgbClr val="FAFAFC"/>
+          <a:srgbClr val="F7F4ED"/>
         </a:solidFill>
         <a:effectLst/>
       </p:bgPr>
@@ -13801,9 +13801,9 @@
             <a:r>
               <a:rPr sz="3200" b="1" i="0">
                 <a:solidFill>
-                  <a:srgbClr val="1A1A1A"/>
-                </a:solidFill>
-                <a:latin typeface="Microsoft JhengHei UI"/>
+                  <a:srgbClr val="1C1C1C"/>
+                </a:solidFill>
+                <a:latin typeface="Segoe UI"/>
               </a:rPr>
               <a:t>5 大擴展機制</a:t>
             </a:r>
@@ -13825,7 +13825,7 @@
             <a:avLst/>
           </a:prstGeom>
           <a:solidFill>
-            <a:srgbClr val="1A6BE5"/>
+            <a:srgbClr val="1C1C1C"/>
           </a:solidFill>
           <a:ln>
             <a:noFill/>
@@ -13887,9 +13887,9 @@
             <a:r>
               <a:rPr sz="2000" b="0" i="0">
                 <a:solidFill>
-                  <a:srgbClr val="1A1A1A"/>
-                </a:solidFill>
-                <a:latin typeface="Microsoft JhengHei UI"/>
+                  <a:srgbClr val="1C1C1C"/>
+                </a:solidFill>
+                <a:latin typeface="Segoe UI"/>
               </a:rPr>
               <a:t>Hook        系統事件自動觸發 → Shell 腳本</a:t>
             </a:r>
@@ -13906,9 +13906,9 @@
             <a:r>
               <a:rPr sz="1600" b="0" i="0">
                 <a:solidFill>
-                  <a:srgbClr val="6B6B76"/>
-                </a:solidFill>
-                <a:latin typeface="Microsoft JhengHei UI"/>
+                  <a:srgbClr val="5F5F5D"/>
+                </a:solidFill>
+                <a:latin typeface="Segoe UI"/>
               </a:rPr>
               <a:t>                  例：啟動時偵測模板、自動追蹤時間</a:t>
             </a:r>
@@ -13925,9 +13925,9 @@
             <a:r>
               <a:rPr sz="2000" b="0" i="0">
                 <a:solidFill>
-                  <a:srgbClr val="1A1A1A"/>
-                </a:solidFill>
-                <a:latin typeface="Microsoft JhengHei UI"/>
+                  <a:srgbClr val="1C1C1C"/>
+                </a:solidFill>
+                <a:latin typeface="Segoe UI"/>
               </a:rPr>
               <a:t>Command   使用者輸入 /xxx → 預設 Prompt</a:t>
             </a:r>
@@ -13944,9 +13944,9 @@
             <a:r>
               <a:rPr sz="1600" b="0" i="0">
                 <a:solidFill>
-                  <a:srgbClr val="6B6B76"/>
-                </a:solidFill>
-                <a:latin typeface="Microsoft JhengHei UI"/>
+                  <a:srgbClr val="5F5F5D"/>
+                </a:solidFill>
+                <a:latin typeface="Segoe UI"/>
               </a:rPr>
               <a:t>                  例：/tdd, /plan, /verify</a:t>
             </a:r>
@@ -13963,9 +13963,9 @@
             <a:r>
               <a:rPr sz="2000" b="0" i="0">
                 <a:solidFill>
-                  <a:srgbClr val="1A1A1A"/>
-                </a:solidFill>
-                <a:latin typeface="Microsoft JhengHei UI"/>
+                  <a:srgbClr val="1C1C1C"/>
+                </a:solidFill>
+                <a:latin typeface="Segoe UI"/>
               </a:rPr>
               <a:t>Skill          語意偵測自動觸發 → 領域知識</a:t>
             </a:r>
@@ -13982,9 +13982,9 @@
             <a:r>
               <a:rPr sz="1600" b="0" i="0">
                 <a:solidFill>
-                  <a:srgbClr val="6B6B76"/>
-                </a:solidFill>
-                <a:latin typeface="Microsoft JhengHei UI"/>
+                  <a:srgbClr val="5F5F5D"/>
+                </a:solidFill>
+                <a:latin typeface="Segoe UI"/>
               </a:rPr>
               <a:t>                  例：偵測到 FastAPI 自動載入相關知識</a:t>
             </a:r>
@@ -14001,9 +14001,9 @@
             <a:r>
               <a:rPr sz="2000" b="0" i="0">
                 <a:solidFill>
-                  <a:srgbClr val="1A1A1A"/>
-                </a:solidFill>
-                <a:latin typeface="Microsoft JhengHei UI"/>
+                  <a:srgbClr val="1C1C1C"/>
+                </a:solidFill>
+                <a:latin typeface="Segoe UI"/>
               </a:rPr>
               <a:t>Agent        主 Agent 委派子任務 → 專業 AI</a:t>
             </a:r>
@@ -14020,9 +14020,9 @@
             <a:r>
               <a:rPr sz="1600" b="0" i="0">
                 <a:solidFill>
-                  <a:srgbClr val="6B6B76"/>
-                </a:solidFill>
-                <a:latin typeface="Microsoft JhengHei UI"/>
+                  <a:srgbClr val="5F5F5D"/>
+                </a:solidFill>
+                <a:latin typeface="Segoe UI"/>
               </a:rPr>
               <a:t>                  例：code-quality-specialist 做審查</a:t>
             </a:r>
@@ -14039,9 +14039,9 @@
             <a:r>
               <a:rPr sz="2000" b="0" i="0">
                 <a:solidFill>
-                  <a:srgbClr val="1A1A1A"/>
-                </a:solidFill>
-                <a:latin typeface="Microsoft JhengHei UI"/>
+                  <a:srgbClr val="1C1C1C"/>
+                </a:solidFill>
+                <a:latin typeface="Segoe UI"/>
               </a:rPr>
               <a:t>Context     跨 Agent 知識共享 → 報告存檔</a:t>
             </a:r>
@@ -14058,9 +14058,9 @@
             <a:r>
               <a:rPr sz="1600" b="0" i="0">
                 <a:solidFill>
-                  <a:srgbClr val="6B6B76"/>
-                </a:solidFill>
-                <a:latin typeface="Microsoft JhengHei UI"/>
+                  <a:srgbClr val="5F5F5D"/>
+                </a:solidFill>
+                <a:latin typeface="Segoe UI"/>
               </a:rPr>
               <a:t>                  例：品質報告 → 測試報告接力</a:t>
             </a:r>
@@ -14081,7 +14081,7 @@
     <p:bg>
       <p:bgPr>
         <a:solidFill>
-          <a:srgbClr val="FAFAFC"/>
+          <a:srgbClr val="F7F4ED"/>
         </a:solidFill>
         <a:effectLst/>
       </p:bgPr>
@@ -14118,9 +14118,9 @@
             <a:r>
               <a:rPr sz="3200" b="1" i="0">
                 <a:solidFill>
-                  <a:srgbClr val="1A1A1A"/>
-                </a:solidFill>
-                <a:latin typeface="Microsoft JhengHei UI"/>
+                  <a:srgbClr val="1C1C1C"/>
+                </a:solidFill>
+                <a:latin typeface="Segoe UI"/>
               </a:rPr>
               <a:t>13 個 Agent — 按模型分級</a:t>
             </a:r>
@@ -14142,7 +14142,7 @@
             <a:avLst/>
           </a:prstGeom>
           <a:solidFill>
-            <a:srgbClr val="1A6BE5"/>
+            <a:srgbClr val="1C1C1C"/>
           </a:solidFill>
           <a:ln>
             <a:noFill/>
@@ -14204,9 +14204,9 @@
             <a:r>
               <a:rPr sz="2200" b="1" i="0">
                 <a:solidFill>
-                  <a:srgbClr val="1A6BE5"/>
-                </a:solidFill>
-                <a:latin typeface="Microsoft JhengHei UI"/>
+                  <a:srgbClr val="1C1C1C"/>
+                </a:solidFill>
+                <a:latin typeface="Segoe UI"/>
               </a:rPr>
               <a:t>Opus  (重量級推理)</a:t>
             </a:r>
@@ -14223,9 +14223,9 @@
             <a:r>
               <a:rPr sz="1800" b="0" i="0">
                 <a:solidFill>
-                  <a:srgbClr val="1A1A1A"/>
-                </a:solidFill>
-                <a:latin typeface="Microsoft JhengHei UI"/>
+                  <a:srgbClr val="1C1C1C"/>
+                </a:solidFill>
+                <a:latin typeface="Segoe UI"/>
               </a:rPr>
               <a:t>    planner • architect • security-auditor</a:t>
             </a:r>
@@ -14242,9 +14242,9 @@
             <a:r>
               <a:rPr sz="800" b="0" i="0">
                 <a:solidFill>
-                  <a:srgbClr val="1A1A1A"/>
-                </a:solidFill>
-                <a:latin typeface="Microsoft JhengHei UI"/>
+                  <a:srgbClr val="1C1C1C"/>
+                </a:solidFill>
+                <a:latin typeface="Segoe UI"/>
               </a:rPr>
               <a:t/>
             </a:r>
@@ -14261,9 +14261,9 @@
             <a:r>
               <a:rPr sz="2200" b="1" i="0">
                 <a:solidFill>
-                  <a:srgbClr val="1B8C4E"/>
-                </a:solidFill>
-                <a:latin typeface="Microsoft JhengHei UI"/>
+                  <a:srgbClr val="5B7A52"/>
+                </a:solidFill>
+                <a:latin typeface="Segoe UI"/>
               </a:rPr>
               <a:t>Sonnet  (一般開發)</a:t>
             </a:r>
@@ -14280,9 +14280,9 @@
             <a:r>
               <a:rPr sz="1800" b="0" i="0">
                 <a:solidFill>
-                  <a:srgbClr val="1A1A1A"/>
-                </a:solidFill>
-                <a:latin typeface="Microsoft JhengHei UI"/>
+                  <a:srgbClr val="1C1C1C"/>
+                </a:solidFill>
+                <a:latin typeface="Segoe UI"/>
               </a:rPr>
               <a:t>    code-quality • tdd-guide • e2e-specialist</a:t>
             </a:r>
@@ -14299,9 +14299,9 @@
             <a:r>
               <a:rPr sz="1800" b="0" i="0">
                 <a:solidFill>
-                  <a:srgbClr val="1A1A1A"/>
-                </a:solidFill>
-                <a:latin typeface="Microsoft JhengHei UI"/>
+                  <a:srgbClr val="1C1C1C"/>
+                </a:solidFill>
+                <a:latin typeface="Segoe UI"/>
               </a:rPr>
               <a:t>    test-engineer • refactor-cleaner • deployment</a:t>
             </a:r>
@@ -14318,9 +14318,9 @@
             <a:r>
               <a:rPr sz="800" b="0" i="0">
                 <a:solidFill>
-                  <a:srgbClr val="1A1A1A"/>
-                </a:solidFill>
-                <a:latin typeface="Microsoft JhengHei UI"/>
+                  <a:srgbClr val="1C1C1C"/>
+                </a:solidFill>
+                <a:latin typeface="Segoe UI"/>
               </a:rPr>
               <a:t/>
             </a:r>
@@ -14337,9 +14337,9 @@
             <a:r>
               <a:rPr sz="2200" b="1" i="0">
                 <a:solidFill>
-                  <a:srgbClr val="C48A0A"/>
-                </a:solidFill>
-                <a:latin typeface="Microsoft JhengHei UI"/>
+                  <a:srgbClr val="9A7B3A"/>
+                </a:solidFill>
+                <a:latin typeface="Segoe UI"/>
               </a:rPr>
               <a:t>Haiku  (輕量快速)</a:t>
             </a:r>
@@ -14356,9 +14356,9 @@
             <a:r>
               <a:rPr sz="1800" b="0" i="0">
                 <a:solidFill>
-                  <a:srgbClr val="1A1A1A"/>
-                </a:solidFill>
-                <a:latin typeface="Microsoft JhengHei UI"/>
+                  <a:srgbClr val="1C1C1C"/>
+                </a:solidFill>
+                <a:latin typeface="Segoe UI"/>
               </a:rPr>
               <a:t>    build-resolver • doc-specialist • template-mgr</a:t>
             </a:r>
@@ -14375,9 +14375,9 @@
             <a:r>
               <a:rPr sz="800" b="0" i="0">
                 <a:solidFill>
-                  <a:srgbClr val="1A1A1A"/>
-                </a:solidFill>
-                <a:latin typeface="Microsoft JhengHei UI"/>
+                  <a:srgbClr val="1C1C1C"/>
+                </a:solidFill>
+                <a:latin typeface="Segoe UI"/>
               </a:rPr>
               <a:t/>
             </a:r>
@@ -14394,9 +14394,9 @@
             <a:r>
               <a:rPr sz="1600" b="0" i="0">
                 <a:solidFill>
-                  <a:srgbClr val="6B6B76"/>
-                </a:solidFill>
-                <a:latin typeface="Microsoft JhengHei UI"/>
+                  <a:srgbClr val="5F5F5D"/>
+                </a:solidFill>
+                <a:latin typeface="Segoe UI"/>
               </a:rPr>
               <a:t>→  模板自動分配，不需要手動選擇</a:t>
             </a:r>
@@ -14417,7 +14417,7 @@
     <p:bg>
       <p:bgPr>
         <a:solidFill>
-          <a:srgbClr val="FAFAFC"/>
+          <a:srgbClr val="F7F4ED"/>
         </a:solidFill>
         <a:effectLst/>
       </p:bgPr>
@@ -14454,9 +14454,9 @@
             <a:r>
               <a:rPr sz="3000" b="1" i="0">
                 <a:solidFill>
-                  <a:srgbClr val="1A1A1A"/>
-                </a:solidFill>
-                <a:latin typeface="Microsoft JhengHei UI"/>
+                  <a:srgbClr val="1C1C1C"/>
+                </a:solidFill>
+                <a:latin typeface="Segoe UI"/>
               </a:rPr>
               <a:t>目錄結構 — .claude/ 下的關鍵目錄</a:t>
             </a:r>
@@ -14478,11 +14478,11 @@
             <a:avLst/>
           </a:prstGeom>
           <a:solidFill>
-            <a:srgbClr val="F0F2F5"/>
+            <a:srgbClr val="ECEAE4"/>
           </a:solidFill>
           <a:ln w="12700">
             <a:solidFill>
-              <a:srgbClr val="D8DAE0"/>
+              <a:srgbClr val="ECEAE4"/>
             </a:solidFill>
           </a:ln>
           <a:effectLst/>
@@ -14542,9 +14542,9 @@
             <a:r>
               <a:rPr sz="1600" b="0" i="0">
                 <a:solidFill>
-                  <a:srgbClr val="1A6BE5"/>
-                </a:solidFill>
-                <a:latin typeface="Microsoft JhengHei UI"/>
+                  <a:srgbClr val="1C1C1C"/>
+                </a:solidFill>
+                <a:latin typeface="Consolas"/>
               </a:rPr>
               <a:t>.claude/</a:t>
             </a:r>
@@ -14561,9 +14561,9 @@
             <a:r>
               <a:rPr sz="1600" b="0" i="0">
                 <a:solidFill>
-                  <a:srgbClr val="37373C"/>
-                </a:solidFill>
-                <a:latin typeface="Microsoft JhengHei UI"/>
+                  <a:srgbClr val="3D3D3D"/>
+                </a:solidFill>
+                <a:latin typeface="Consolas"/>
               </a:rPr>
               <a:t>├── agents/          ← 13 個 Agent 定義</a:t>
             </a:r>
@@ -14580,9 +14580,9 @@
             <a:r>
               <a:rPr sz="1600" b="0" i="0">
                 <a:solidFill>
-                  <a:srgbClr val="37373C"/>
-                </a:solidFill>
-                <a:latin typeface="Microsoft JhengHei UI"/>
+                  <a:srgbClr val="3D3D3D"/>
+                </a:solidFill>
+                <a:latin typeface="Consolas"/>
               </a:rPr>
               <a:t>├── commands/        ← 17 個快捷指令</a:t>
             </a:r>
@@ -14599,9 +14599,9 @@
             <a:r>
               <a:rPr sz="1600" b="0" i="0">
                 <a:solidFill>
-                  <a:srgbClr val="1B8C4E"/>
-                </a:solidFill>
-                <a:latin typeface="Microsoft JhengHei UI"/>
+                  <a:srgbClr val="5B7A52"/>
+                </a:solidFill>
+                <a:latin typeface="Consolas"/>
               </a:rPr>
               <a:t>├── rules/           ← 9 條自動規則（每次對話載入）</a:t>
             </a:r>
@@ -14618,9 +14618,9 @@
             <a:r>
               <a:rPr sz="1600" b="0" i="0">
                 <a:solidFill>
-                  <a:srgbClr val="37373C"/>
-                </a:solidFill>
-                <a:latin typeface="Microsoft JhengHei UI"/>
+                  <a:srgbClr val="3D3D3D"/>
+                </a:solidFill>
+                <a:latin typeface="Consolas"/>
               </a:rPr>
               <a:t>├── skills/          ← 7 個領域技能</a:t>
             </a:r>
@@ -14637,9 +14637,9 @@
             <a:r>
               <a:rPr sz="1600" b="0" i="0">
                 <a:solidFill>
-                  <a:srgbClr val="37373C"/>
-                </a:solidFill>
-                <a:latin typeface="Microsoft JhengHei UI"/>
+                  <a:srgbClr val="3D3D3D"/>
+                </a:solidFill>
+                <a:latin typeface="Consolas"/>
               </a:rPr>
               <a:t>├── hooks/           ← 6 個系統事件腳本</a:t>
             </a:r>
@@ -14656,9 +14656,9 @@
             <a:r>
               <a:rPr sz="1600" b="0" i="0">
                 <a:solidFill>
-                  <a:srgbClr val="37373C"/>
-                </a:solidFill>
-                <a:latin typeface="Microsoft JhengHei UI"/>
+                  <a:srgbClr val="3D3D3D"/>
+                </a:solidFill>
+                <a:latin typeface="Consolas"/>
               </a:rPr>
               <a:t>├── context/         ← Agent 間的報告共享</a:t>
             </a:r>
@@ -14675,9 +14675,9 @@
             <a:r>
               <a:rPr sz="1600" b="0" i="0">
                 <a:solidFill>
-                  <a:srgbClr val="A0A0AA"/>
-                </a:solidFill>
-                <a:latin typeface="Microsoft JhengHei UI"/>
+                  <a:srgbClr val="A8A6A0"/>
+                </a:solidFill>
+                <a:latin typeface="Consolas"/>
               </a:rPr>
               <a:t>├── guides/          ← 參考文件（不自動載入）</a:t>
             </a:r>
@@ -14694,9 +14694,9 @@
             <a:r>
               <a:rPr sz="1600" b="0" i="0">
                 <a:solidFill>
-                  <a:srgbClr val="1A6BE5"/>
-                </a:solidFill>
-                <a:latin typeface="Microsoft JhengHei UI"/>
+                  <a:srgbClr val="1C1C1C"/>
+                </a:solidFill>
+                <a:latin typeface="Consolas"/>
               </a:rPr>
               <a:t>└── taskmaster-data/ ← WBS 任務 + 時間追蹤</a:t>
             </a:r>
@@ -14717,7 +14717,7 @@
     <p:bg>
       <p:bgPr>
         <a:solidFill>
-          <a:srgbClr val="FAFAFC"/>
+          <a:srgbClr val="F7F4ED"/>
         </a:solidFill>
         <a:effectLst/>
       </p:bgPr>
@@ -14754,9 +14754,9 @@
             <a:r>
               <a:rPr sz="3200" b="1" i="0">
                 <a:solidFill>
-                  <a:srgbClr val="1A1A1A"/>
-                </a:solidFill>
-                <a:latin typeface="Microsoft JhengHei UI"/>
+                  <a:srgbClr val="1C1C1C"/>
+                </a:solidFill>
+                <a:latin typeface="Segoe UI"/>
               </a:rPr>
               <a:t>環境準備檢查</a:t>
             </a:r>
@@ -14778,7 +14778,7 @@
             <a:avLst/>
           </a:prstGeom>
           <a:solidFill>
-            <a:srgbClr val="1A6BE5"/>
+            <a:srgbClr val="1C1C1C"/>
           </a:solidFill>
           <a:ln>
             <a:noFill/>
@@ -14840,9 +14840,9 @@
             <a:r>
               <a:rPr sz="2200" b="0" i="0">
                 <a:solidFill>
-                  <a:srgbClr val="37373C"/>
-                </a:solidFill>
-                <a:latin typeface="Microsoft JhengHei UI"/>
+                  <a:srgbClr val="3D3D3D"/>
+                </a:solidFill>
+                <a:latin typeface="Segoe UI"/>
               </a:rPr>
               <a:t>  ☐  Claude Code CLI 已安裝    → claude --version</a:t>
             </a:r>
@@ -14859,9 +14859,9 @@
             <a:r>
               <a:rPr sz="2200" b="0" i="0">
                 <a:solidFill>
-                  <a:srgbClr val="37373C"/>
-                </a:solidFill>
-                <a:latin typeface="Microsoft JhengHei UI"/>
+                  <a:srgbClr val="3D3D3D"/>
+                </a:solidFill>
+                <a:latin typeface="Segoe UI"/>
               </a:rPr>
               <a:t>  ☐  Python 3.11+ 已安裝         → python --version</a:t>
             </a:r>
@@ -14878,9 +14878,9 @@
             <a:r>
               <a:rPr sz="2200" b="0" i="0">
                 <a:solidFill>
-                  <a:srgbClr val="37373C"/>
-                </a:solidFill>
-                <a:latin typeface="Microsoft JhengHei UI"/>
+                  <a:srgbClr val="3D3D3D"/>
+                </a:solidFill>
+                <a:latin typeface="Segoe UI"/>
               </a:rPr>
               <a:t>  ☐  Node.js 18+ 已安裝           → node --version</a:t>
             </a:r>
@@ -14897,9 +14897,9 @@
             <a:r>
               <a:rPr sz="2200" b="0" i="0">
                 <a:solidFill>
-                  <a:srgbClr val="37373C"/>
-                </a:solidFill>
-                <a:latin typeface="Microsoft JhengHei UI"/>
+                  <a:srgbClr val="3D3D3D"/>
+                </a:solidFill>
+                <a:latin typeface="Segoe UI"/>
               </a:rPr>
               <a:t>  ☐  Git 已設定                          → git config user.name</a:t>
             </a:r>
@@ -14916,9 +14916,9 @@
             <a:r>
               <a:rPr sz="2200" b="0" i="0">
                 <a:solidFill>
-                  <a:srgbClr val="37373C"/>
-                </a:solidFill>
-                <a:latin typeface="Microsoft JhengHei UI"/>
+                  <a:srgbClr val="3D3D3D"/>
+                </a:solidFill>
+                <a:latin typeface="Segoe UI"/>
               </a:rPr>
               <a:t>  ☐  模板已複製到工作目錄</a:t>
             </a:r>
@@ -14935,9 +14935,9 @@
             <a:r>
               <a:rPr sz="2200" b="0" i="0">
                 <a:solidFill>
-                  <a:srgbClr val="37373C"/>
-                </a:solidFill>
-                <a:latin typeface="Microsoft JhengHei UI"/>
+                  <a:srgbClr val="3D3D3D"/>
+                </a:solidFill>
+                <a:latin typeface="Segoe UI"/>
               </a:rPr>
               <a:t>  ☐  .mcp.json 已設定 API Key</a:t>
             </a:r>

--- a/workshop/docs/slides/VibeCoding_Workshop.pptx
+++ b/workshop/docs/slides/VibeCoding_Workshop.pptx
@@ -4739,7 +4739,7 @@
     <p:bg>
       <p:bgPr>
         <a:solidFill>
-          <a:srgbClr val="000000"/>
+          <a:srgbClr val="F5F4ED"/>
         </a:solidFill>
         <a:effectLst/>
       </p:bgPr>
@@ -4777,9 +4777,9 @@
             <a:r>
               <a:rPr sz="4400" b="1" i="0">
                 <a:solidFill>
-                  <a:srgbClr val="FFFFFF"/>
-                </a:solidFill>
-                <a:latin typeface="Arial"/>
+                  <a:srgbClr val="141413"/>
+                </a:solidFill>
+                <a:latin typeface="Georgia"/>
               </a:rPr>
               <a:t>VibeCoding 模板實戰 Workshop</a:t>
             </a:r>
@@ -4796,7 +4796,7 @@
             <a:r>
               <a:rPr sz="2200" b="0" i="0">
                 <a:solidFill>
-                  <a:srgbClr val="898989"/>
+                  <a:srgbClr val="5E5D59"/>
                 </a:solidFill>
                 <a:latin typeface="Arial"/>
               </a:rPr>
@@ -4820,7 +4820,7 @@
             <a:avLst/>
           </a:prstGeom>
           <a:solidFill>
-            <a:srgbClr val="76B900"/>
+            <a:srgbClr val="C96442"/>
           </a:solidFill>
           <a:ln>
             <a:noFill/>
@@ -4862,7 +4862,7 @@
     <p:bg>
       <p:bgPr>
         <a:solidFill>
-          <a:srgbClr val="000000"/>
+          <a:srgbClr val="F5F4ED"/>
         </a:solidFill>
         <a:effectLst/>
       </p:bgPr>
@@ -4899,9 +4899,9 @@
             <a:r>
               <a:rPr sz="3200" b="1" i="0">
                 <a:solidFill>
-                  <a:srgbClr val="FFFFFF"/>
-                </a:solidFill>
-                <a:latin typeface="Arial"/>
+                  <a:srgbClr val="141413"/>
+                </a:solidFill>
+                <a:latin typeface="Georgia"/>
               </a:rPr>
               <a:t>agents/ — 專業 AI 同事（14 個）</a:t>
             </a:r>
@@ -4923,7 +4923,7 @@
             <a:avLst/>
           </a:prstGeom>
           <a:solidFill>
-            <a:srgbClr val="76B900"/>
+            <a:srgbClr val="C96442"/>
           </a:solidFill>
           <a:ln>
             <a:noFill/>
@@ -4985,7 +4985,7 @@
             <a:r>
               <a:rPr sz="2000" b="1" i="0">
                 <a:solidFill>
-                  <a:srgbClr val="76B900"/>
+                  <a:srgbClr val="C96442"/>
                 </a:solidFill>
                 <a:latin typeface="Arial"/>
               </a:rPr>
@@ -5004,7 +5004,7 @@
             <a:r>
               <a:rPr sz="1800" b="0" i="0">
                 <a:solidFill>
-                  <a:srgbClr val="A7A7A7"/>
+                  <a:srgbClr val="3D3D3A"/>
                 </a:solidFill>
                 <a:latin typeface="Arial"/>
               </a:rPr>
@@ -5023,7 +5023,7 @@
             <a:r>
               <a:rPr sz="1000" b="0" i="0">
                 <a:solidFill>
-                  <a:srgbClr val="FFFFFF"/>
+                  <a:srgbClr val="141413"/>
                 </a:solidFill>
                 <a:latin typeface="Arial"/>
               </a:rPr>
@@ -5042,7 +5042,7 @@
             <a:r>
               <a:rPr sz="2000" b="1" i="0">
                 <a:solidFill>
-                  <a:srgbClr val="FFFFFF"/>
+                  <a:srgbClr val="141413"/>
                 </a:solidFill>
                 <a:latin typeface="Arial"/>
               </a:rPr>
@@ -5061,7 +5061,7 @@
             <a:r>
               <a:rPr sz="1800" b="0" i="0">
                 <a:solidFill>
-                  <a:srgbClr val="FFFFFF"/>
+                  <a:srgbClr val="141413"/>
                 </a:solidFill>
                 <a:latin typeface="Arial"/>
               </a:rPr>
@@ -5080,7 +5080,7 @@
             <a:r>
               <a:rPr sz="1800" b="0" i="0">
                 <a:solidFill>
-                  <a:srgbClr val="FFFFFF"/>
+                  <a:srgbClr val="141413"/>
                 </a:solidFill>
                 <a:latin typeface="Arial"/>
               </a:rPr>
@@ -5099,7 +5099,7 @@
             <a:r>
               <a:rPr sz="1800" b="0" i="0">
                 <a:solidFill>
-                  <a:srgbClr val="FFFFFF"/>
+                  <a:srgbClr val="141413"/>
                 </a:solidFill>
                 <a:latin typeface="Arial"/>
               </a:rPr>
@@ -5118,7 +5118,7 @@
             <a:r>
               <a:rPr sz="1800" b="0" i="0">
                 <a:solidFill>
-                  <a:srgbClr val="FFFFFF"/>
+                  <a:srgbClr val="141413"/>
                 </a:solidFill>
                 <a:latin typeface="Arial"/>
               </a:rPr>
@@ -5137,7 +5137,7 @@
             <a:r>
               <a:rPr sz="1000" b="0" i="0">
                 <a:solidFill>
-                  <a:srgbClr val="FFFFFF"/>
+                  <a:srgbClr val="141413"/>
                 </a:solidFill>
                 <a:latin typeface="Arial"/>
               </a:rPr>
@@ -5156,7 +5156,7 @@
             <a:r>
               <a:rPr sz="1800" b="1" i="0">
                 <a:solidFill>
-                  <a:srgbClr val="76B900"/>
+                  <a:srgbClr val="6B7A3F"/>
                 </a:solidFill>
                 <a:latin typeface="Arial"/>
               </a:rPr>
@@ -5179,7 +5179,7 @@
     <p:bg>
       <p:bgPr>
         <a:solidFill>
-          <a:srgbClr val="000000"/>
+          <a:srgbClr val="F5F4ED"/>
         </a:solidFill>
         <a:effectLst/>
       </p:bgPr>
@@ -5216,9 +5216,9 @@
             <a:r>
               <a:rPr sz="3200" b="1" i="0">
                 <a:solidFill>
-                  <a:srgbClr val="FFFFFF"/>
-                </a:solidFill>
-                <a:latin typeface="Arial"/>
+                  <a:srgbClr val="141413"/>
+                </a:solidFill>
+                <a:latin typeface="Georgia"/>
               </a:rPr>
               <a:t>skills/ — 領域知識按需載入（7 個）</a:t>
             </a:r>
@@ -5240,7 +5240,7 @@
             <a:avLst/>
           </a:prstGeom>
           <a:solidFill>
-            <a:srgbClr val="76B900"/>
+            <a:srgbClr val="C96442"/>
           </a:solidFill>
           <a:ln>
             <a:noFill/>
@@ -5302,7 +5302,7 @@
             <a:r>
               <a:rPr sz="2000" b="1" i="0">
                 <a:solidFill>
-                  <a:srgbClr val="76B900"/>
+                  <a:srgbClr val="C96442"/>
                 </a:solidFill>
                 <a:latin typeface="Arial"/>
               </a:rPr>
@@ -5321,7 +5321,7 @@
             <a:r>
               <a:rPr sz="1800" b="0" i="0">
                 <a:solidFill>
-                  <a:srgbClr val="A7A7A7"/>
+                  <a:srgbClr val="3D3D3A"/>
                 </a:solidFill>
                 <a:latin typeface="Arial"/>
               </a:rPr>
@@ -5340,7 +5340,7 @@
             <a:r>
               <a:rPr sz="1000" b="0" i="0">
                 <a:solidFill>
-                  <a:srgbClr val="FFFFFF"/>
+                  <a:srgbClr val="141413"/>
                 </a:solidFill>
                 <a:latin typeface="Arial"/>
               </a:rPr>
@@ -5359,7 +5359,7 @@
             <a:r>
               <a:rPr sz="1800" b="0" i="0">
                 <a:solidFill>
-                  <a:srgbClr val="FFFFFF"/>
+                  <a:srgbClr val="141413"/>
                 </a:solidFill>
                 <a:latin typeface="Arial"/>
               </a:rPr>
@@ -5378,7 +5378,7 @@
             <a:r>
               <a:rPr sz="1800" b="0" i="0">
                 <a:solidFill>
-                  <a:srgbClr val="FFFFFF"/>
+                  <a:srgbClr val="141413"/>
                 </a:solidFill>
                 <a:latin typeface="Arial"/>
               </a:rPr>
@@ -5397,7 +5397,7 @@
             <a:r>
               <a:rPr sz="1800" b="0" i="0">
                 <a:solidFill>
-                  <a:srgbClr val="FFFFFF"/>
+                  <a:srgbClr val="141413"/>
                 </a:solidFill>
                 <a:latin typeface="Arial"/>
               </a:rPr>
@@ -5416,7 +5416,7 @@
             <a:r>
               <a:rPr sz="1800" b="0" i="0">
                 <a:solidFill>
-                  <a:srgbClr val="FFFFFF"/>
+                  <a:srgbClr val="141413"/>
                 </a:solidFill>
                 <a:latin typeface="Arial"/>
               </a:rPr>
@@ -5435,7 +5435,7 @@
             <a:r>
               <a:rPr sz="1800" b="0" i="0">
                 <a:solidFill>
-                  <a:srgbClr val="FFFFFF"/>
+                  <a:srgbClr val="141413"/>
                 </a:solidFill>
                 <a:latin typeface="Arial"/>
               </a:rPr>
@@ -5454,7 +5454,7 @@
             <a:r>
               <a:rPr sz="1800" b="0" i="0">
                 <a:solidFill>
-                  <a:srgbClr val="FFFFFF"/>
+                  <a:srgbClr val="141413"/>
                 </a:solidFill>
                 <a:latin typeface="Arial"/>
               </a:rPr>
@@ -5473,7 +5473,7 @@
             <a:r>
               <a:rPr sz="1000" b="0" i="0">
                 <a:solidFill>
-                  <a:srgbClr val="FFFFFF"/>
+                  <a:srgbClr val="141413"/>
                 </a:solidFill>
                 <a:latin typeface="Arial"/>
               </a:rPr>
@@ -5492,7 +5492,7 @@
             <a:r>
               <a:rPr sz="1600" b="0" i="0">
                 <a:solidFill>
-                  <a:srgbClr val="898989"/>
+                  <a:srgbClr val="5E5D59"/>
                 </a:solidFill>
                 <a:latin typeface="Arial"/>
               </a:rPr>
@@ -5515,7 +5515,7 @@
     <p:bg>
       <p:bgPr>
         <a:solidFill>
-          <a:srgbClr val="000000"/>
+          <a:srgbClr val="F5F4ED"/>
         </a:solidFill>
         <a:effectLst/>
       </p:bgPr>
@@ -5552,9 +5552,9 @@
             <a:r>
               <a:rPr sz="3200" b="1" i="0">
                 <a:solidFill>
-                  <a:srgbClr val="FFFFFF"/>
-                </a:solidFill>
-                <a:latin typeface="Arial"/>
+                  <a:srgbClr val="141413"/>
+                </a:solidFill>
+                <a:latin typeface="Georgia"/>
               </a:rPr>
               <a:t>hooks/ — 事件自動化（6 個）</a:t>
             </a:r>
@@ -5576,7 +5576,7 @@
             <a:avLst/>
           </a:prstGeom>
           <a:solidFill>
-            <a:srgbClr val="76B900"/>
+            <a:srgbClr val="C96442"/>
           </a:solidFill>
           <a:ln>
             <a:noFill/>
@@ -5638,7 +5638,7 @@
             <a:r>
               <a:rPr sz="2000" b="1" i="0">
                 <a:solidFill>
-                  <a:srgbClr val="76B900"/>
+                  <a:srgbClr val="C96442"/>
                 </a:solidFill>
                 <a:latin typeface="Arial"/>
               </a:rPr>
@@ -5657,7 +5657,7 @@
             <a:r>
               <a:rPr sz="1800" b="0" i="0">
                 <a:solidFill>
-                  <a:srgbClr val="A7A7A7"/>
+                  <a:srgbClr val="3D3D3A"/>
                 </a:solidFill>
                 <a:latin typeface="Arial"/>
               </a:rPr>
@@ -5676,7 +5676,7 @@
             <a:r>
               <a:rPr sz="1000" b="0" i="0">
                 <a:solidFill>
-                  <a:srgbClr val="FFFFFF"/>
+                  <a:srgbClr val="141413"/>
                 </a:solidFill>
                 <a:latin typeface="Arial"/>
               </a:rPr>
@@ -5695,7 +5695,7 @@
             <a:r>
               <a:rPr sz="2000" b="1" i="0">
                 <a:solidFill>
-                  <a:srgbClr val="FFFFFF"/>
+                  <a:srgbClr val="141413"/>
                 </a:solidFill>
                 <a:latin typeface="Arial"/>
               </a:rPr>
@@ -5714,7 +5714,7 @@
             <a:r>
               <a:rPr sz="1700" b="0" i="0">
                 <a:solidFill>
-                  <a:srgbClr val="FFFFFF"/>
+                  <a:srgbClr val="141413"/>
                 </a:solidFill>
                 <a:latin typeface="Arial"/>
               </a:rPr>
@@ -5733,7 +5733,7 @@
             <a:r>
               <a:rPr sz="1700" b="0" i="0">
                 <a:solidFill>
-                  <a:srgbClr val="FFFFFF"/>
+                  <a:srgbClr val="141413"/>
                 </a:solidFill>
                 <a:latin typeface="Arial"/>
               </a:rPr>
@@ -5752,7 +5752,7 @@
             <a:r>
               <a:rPr sz="1700" b="0" i="0">
                 <a:solidFill>
-                  <a:srgbClr val="FFFFFF"/>
+                  <a:srgbClr val="141413"/>
                 </a:solidFill>
                 <a:latin typeface="Arial"/>
               </a:rPr>
@@ -5771,7 +5771,7 @@
             <a:r>
               <a:rPr sz="1700" b="0" i="0">
                 <a:solidFill>
-                  <a:srgbClr val="FFFFFF"/>
+                  <a:srgbClr val="141413"/>
                 </a:solidFill>
                 <a:latin typeface="Arial"/>
               </a:rPr>
@@ -5790,7 +5790,7 @@
             <a:r>
               <a:rPr sz="1700" b="0" i="0">
                 <a:solidFill>
-                  <a:srgbClr val="FFFFFF"/>
+                  <a:srgbClr val="141413"/>
                 </a:solidFill>
                 <a:latin typeface="Arial"/>
               </a:rPr>
@@ -5809,7 +5809,7 @@
             <a:r>
               <a:rPr sz="1000" b="0" i="0">
                 <a:solidFill>
-                  <a:srgbClr val="FFFFFF"/>
+                  <a:srgbClr val="141413"/>
                 </a:solidFill>
                 <a:latin typeface="Arial"/>
               </a:rPr>
@@ -5828,7 +5828,7 @@
             <a:r>
               <a:rPr sz="1800" b="1" i="0">
                 <a:solidFill>
-                  <a:srgbClr val="76B900"/>
+                  <a:srgbClr val="6B7A3F"/>
                 </a:solidFill>
                 <a:latin typeface="Arial"/>
               </a:rPr>
@@ -5851,7 +5851,7 @@
     <p:bg>
       <p:bgPr>
         <a:solidFill>
-          <a:srgbClr val="000000"/>
+          <a:srgbClr val="F5F4ED"/>
         </a:solidFill>
         <a:effectLst/>
       </p:bgPr>
@@ -5888,9 +5888,9 @@
             <a:r>
               <a:rPr sz="3200" b="1" i="0">
                 <a:solidFill>
-                  <a:srgbClr val="FFFFFF"/>
-                </a:solidFill>
-                <a:latin typeface="Arial"/>
+                  <a:srgbClr val="141413"/>
+                </a:solidFill>
+                <a:latin typeface="Georgia"/>
               </a:rPr>
               <a:t>6 大觀念對照表 — 一張記住差異</a:t>
             </a:r>
@@ -5912,7 +5912,7 @@
             <a:avLst/>
           </a:prstGeom>
           <a:solidFill>
-            <a:srgbClr val="76B900"/>
+            <a:srgbClr val="C96442"/>
           </a:solidFill>
           <a:ln>
             <a:noFill/>
@@ -5974,7 +5974,7 @@
             <a:r>
               <a:rPr sz="1800" b="1" i="0">
                 <a:solidFill>
-                  <a:srgbClr val="76B900"/>
+                  <a:srgbClr val="C96442"/>
                 </a:solidFill>
                 <a:latin typeface="Arial"/>
               </a:rPr>
@@ -5993,7 +5993,7 @@
             <a:r>
               <a:rPr sz="1800" b="0" i="0">
                 <a:solidFill>
-                  <a:srgbClr val="FFFFFF"/>
+                  <a:srgbClr val="141413"/>
                 </a:solidFill>
                 <a:latin typeface="Arial"/>
               </a:rPr>
@@ -6012,7 +6012,7 @@
             <a:r>
               <a:rPr sz="1800" b="0" i="0">
                 <a:solidFill>
-                  <a:srgbClr val="FFFFFF"/>
+                  <a:srgbClr val="141413"/>
                 </a:solidFill>
                 <a:latin typeface="Arial"/>
               </a:rPr>
@@ -6031,7 +6031,7 @@
             <a:r>
               <a:rPr sz="1800" b="0" i="0">
                 <a:solidFill>
-                  <a:srgbClr val="FFFFFF"/>
+                  <a:srgbClr val="141413"/>
                 </a:solidFill>
                 <a:latin typeface="Arial"/>
               </a:rPr>
@@ -6050,7 +6050,7 @@
             <a:r>
               <a:rPr sz="1800" b="0" i="0">
                 <a:solidFill>
-                  <a:srgbClr val="FFFFFF"/>
+                  <a:srgbClr val="141413"/>
                 </a:solidFill>
                 <a:latin typeface="Arial"/>
               </a:rPr>
@@ -6069,7 +6069,7 @@
             <a:r>
               <a:rPr sz="1800" b="0" i="0">
                 <a:solidFill>
-                  <a:srgbClr val="FFFFFF"/>
+                  <a:srgbClr val="141413"/>
                 </a:solidFill>
                 <a:latin typeface="Arial"/>
               </a:rPr>
@@ -6088,7 +6088,7 @@
             <a:r>
               <a:rPr sz="1800" b="0" i="0">
                 <a:solidFill>
-                  <a:srgbClr val="FFFFFF"/>
+                  <a:srgbClr val="141413"/>
                 </a:solidFill>
                 <a:latin typeface="Arial"/>
               </a:rPr>
@@ -6107,7 +6107,7 @@
             <a:r>
               <a:rPr sz="1200" b="0" i="0">
                 <a:solidFill>
-                  <a:srgbClr val="FFFFFF"/>
+                  <a:srgbClr val="141413"/>
                 </a:solidFill>
                 <a:latin typeface="Arial"/>
               </a:rPr>
@@ -6126,7 +6126,7 @@
             <a:r>
               <a:rPr sz="1600" b="0" i="0">
                 <a:solidFill>
-                  <a:srgbClr val="898989"/>
+                  <a:srgbClr val="5E5D59"/>
                 </a:solidFill>
                 <a:latin typeface="Arial"/>
               </a:rPr>
@@ -6149,7 +6149,7 @@
     <p:bg>
       <p:bgPr>
         <a:solidFill>
-          <a:srgbClr val="000000"/>
+          <a:srgbClr val="F5F4ED"/>
         </a:solidFill>
         <a:effectLst/>
       </p:bgPr>
@@ -6186,9 +6186,9 @@
             <a:r>
               <a:rPr sz="3200" b="1" i="0">
                 <a:solidFill>
-                  <a:srgbClr val="FFFFFF"/>
-                </a:solidFill>
-                <a:latin typeface="Arial"/>
+                  <a:srgbClr val="141413"/>
+                </a:solidFill>
+                <a:latin typeface="Georgia"/>
               </a:rPr>
               <a:t>14 個 Agent — 按模型分級</a:t>
             </a:r>
@@ -6210,7 +6210,7 @@
             <a:avLst/>
           </a:prstGeom>
           <a:solidFill>
-            <a:srgbClr val="76B900"/>
+            <a:srgbClr val="C96442"/>
           </a:solidFill>
           <a:ln>
             <a:noFill/>
@@ -6272,7 +6272,7 @@
             <a:r>
               <a:rPr sz="2200" b="1" i="0">
                 <a:solidFill>
-                  <a:srgbClr val="76B900"/>
+                  <a:srgbClr val="C96442"/>
                 </a:solidFill>
                 <a:latin typeface="Arial"/>
               </a:rPr>
@@ -6291,7 +6291,7 @@
             <a:r>
               <a:rPr sz="1800" b="0" i="0">
                 <a:solidFill>
-                  <a:srgbClr val="FFFFFF"/>
+                  <a:srgbClr val="141413"/>
                 </a:solidFill>
                 <a:latin typeface="Arial"/>
               </a:rPr>
@@ -6310,7 +6310,7 @@
             <a:r>
               <a:rPr sz="800" b="0" i="0">
                 <a:solidFill>
-                  <a:srgbClr val="FFFFFF"/>
+                  <a:srgbClr val="141413"/>
                 </a:solidFill>
                 <a:latin typeface="Arial"/>
               </a:rPr>
@@ -6329,7 +6329,7 @@
             <a:r>
               <a:rPr sz="2200" b="1" i="0">
                 <a:solidFill>
-                  <a:srgbClr val="76B900"/>
+                  <a:srgbClr val="6B7A3F"/>
                 </a:solidFill>
                 <a:latin typeface="Arial"/>
               </a:rPr>
@@ -6348,7 +6348,7 @@
             <a:r>
               <a:rPr sz="1800" b="0" i="0">
                 <a:solidFill>
-                  <a:srgbClr val="FFFFFF"/>
+                  <a:srgbClr val="141413"/>
                 </a:solidFill>
                 <a:latin typeface="Arial"/>
               </a:rPr>
@@ -6367,7 +6367,7 @@
             <a:r>
               <a:rPr sz="1800" b="0" i="0">
                 <a:solidFill>
-                  <a:srgbClr val="FFFFFF"/>
+                  <a:srgbClr val="141413"/>
                 </a:solidFill>
                 <a:latin typeface="Arial"/>
               </a:rPr>
@@ -6386,7 +6386,7 @@
             <a:r>
               <a:rPr sz="1800" b="0" i="0">
                 <a:solidFill>
-                  <a:srgbClr val="FFFFFF"/>
+                  <a:srgbClr val="141413"/>
                 </a:solidFill>
                 <a:latin typeface="Arial"/>
               </a:rPr>
@@ -6405,7 +6405,7 @@
             <a:r>
               <a:rPr sz="800" b="0" i="0">
                 <a:solidFill>
-                  <a:srgbClr val="FFFFFF"/>
+                  <a:srgbClr val="141413"/>
                 </a:solidFill>
                 <a:latin typeface="Arial"/>
               </a:rPr>
@@ -6424,7 +6424,7 @@
             <a:r>
               <a:rPr sz="2200" b="1" i="0">
                 <a:solidFill>
-                  <a:srgbClr val="EF9100"/>
+                  <a:srgbClr val="D97757"/>
                 </a:solidFill>
                 <a:latin typeface="Arial"/>
               </a:rPr>
@@ -6443,7 +6443,7 @@
             <a:r>
               <a:rPr sz="1800" b="0" i="0">
                 <a:solidFill>
-                  <a:srgbClr val="FFFFFF"/>
+                  <a:srgbClr val="141413"/>
                 </a:solidFill>
                 <a:latin typeface="Arial"/>
               </a:rPr>
@@ -6462,7 +6462,7 @@
             <a:r>
               <a:rPr sz="800" b="0" i="0">
                 <a:solidFill>
-                  <a:srgbClr val="FFFFFF"/>
+                  <a:srgbClr val="141413"/>
                 </a:solidFill>
                 <a:latin typeface="Arial"/>
               </a:rPr>
@@ -6481,7 +6481,7 @@
             <a:r>
               <a:rPr sz="1600" b="0" i="0">
                 <a:solidFill>
-                  <a:srgbClr val="898989"/>
+                  <a:srgbClr val="5E5D59"/>
                 </a:solidFill>
                 <a:latin typeface="Arial"/>
               </a:rPr>
@@ -6504,7 +6504,7 @@
     <p:bg>
       <p:bgPr>
         <a:solidFill>
-          <a:srgbClr val="000000"/>
+          <a:srgbClr val="F5F4ED"/>
         </a:solidFill>
         <a:effectLst/>
       </p:bgPr>
@@ -6541,9 +6541,9 @@
             <a:r>
               <a:rPr sz="3000" b="1" i="0">
                 <a:solidFill>
-                  <a:srgbClr val="FFFFFF"/>
-                </a:solidFill>
-                <a:latin typeface="Arial"/>
+                  <a:srgbClr val="141413"/>
+                </a:solidFill>
+                <a:latin typeface="Georgia"/>
               </a:rPr>
               <a:t>目錄結構 — .claude/ 下的關鍵目錄</a:t>
             </a:r>
@@ -6565,11 +6565,11 @@
             <a:avLst/>
           </a:prstGeom>
           <a:solidFill>
-            <a:srgbClr val="1A1A1A"/>
+            <a:srgbClr val="FAF9F5"/>
           </a:solidFill>
           <a:ln w="12700">
             <a:solidFill>
-              <a:srgbClr val="1A1A1A"/>
+              <a:srgbClr val="E8E6DC"/>
             </a:solidFill>
           </a:ln>
           <a:effectLst/>
@@ -6629,7 +6629,7 @@
             <a:r>
               <a:rPr sz="1600" b="0" i="0">
                 <a:solidFill>
-                  <a:srgbClr val="76B900"/>
+                  <a:srgbClr val="C96442"/>
                 </a:solidFill>
                 <a:latin typeface="Consolas"/>
               </a:rPr>
@@ -6648,7 +6648,7 @@
             <a:r>
               <a:rPr sz="1600" b="0" i="0">
                 <a:solidFill>
-                  <a:srgbClr val="76B900"/>
+                  <a:srgbClr val="C96442"/>
                 </a:solidFill>
                 <a:latin typeface="Consolas"/>
               </a:rPr>
@@ -6667,7 +6667,7 @@
             <a:r>
               <a:rPr sz="1600" b="0" i="0">
                 <a:solidFill>
-                  <a:srgbClr val="A7A7A7"/>
+                  <a:srgbClr val="3D3D3A"/>
                 </a:solidFill>
                 <a:latin typeface="Consolas"/>
               </a:rPr>
@@ -6686,7 +6686,7 @@
             <a:r>
               <a:rPr sz="1600" b="0" i="0">
                 <a:solidFill>
-                  <a:srgbClr val="A7A7A7"/>
+                  <a:srgbClr val="3D3D3A"/>
                 </a:solidFill>
                 <a:latin typeface="Consolas"/>
               </a:rPr>
@@ -6705,7 +6705,7 @@
             <a:r>
               <a:rPr sz="1600" b="0" i="0">
                 <a:solidFill>
-                  <a:srgbClr val="76B900"/>
+                  <a:srgbClr val="6B7A3F"/>
                 </a:solidFill>
                 <a:latin typeface="Consolas"/>
               </a:rPr>
@@ -6724,7 +6724,7 @@
             <a:r>
               <a:rPr sz="1600" b="0" i="0">
                 <a:solidFill>
-                  <a:srgbClr val="A7A7A7"/>
+                  <a:srgbClr val="3D3D3A"/>
                 </a:solidFill>
                 <a:latin typeface="Consolas"/>
               </a:rPr>
@@ -6743,7 +6743,7 @@
             <a:r>
               <a:rPr sz="1600" b="0" i="0">
                 <a:solidFill>
-                  <a:srgbClr val="A7A7A7"/>
+                  <a:srgbClr val="3D3D3A"/>
                 </a:solidFill>
                 <a:latin typeface="Consolas"/>
               </a:rPr>
@@ -6762,7 +6762,7 @@
             <a:r>
               <a:rPr sz="1600" b="0" i="0">
                 <a:solidFill>
-                  <a:srgbClr val="A7A7A7"/>
+                  <a:srgbClr val="3D3D3A"/>
                 </a:solidFill>
                 <a:latin typeface="Consolas"/>
               </a:rPr>
@@ -6781,7 +6781,7 @@
             <a:r>
               <a:rPr sz="1600" b="0" i="0">
                 <a:solidFill>
-                  <a:srgbClr val="A7A7A7"/>
+                  <a:srgbClr val="3D3D3A"/>
                 </a:solidFill>
                 <a:latin typeface="Consolas"/>
               </a:rPr>
@@ -6800,7 +6800,7 @@
             <a:r>
               <a:rPr sz="1600" b="0" i="0">
                 <a:solidFill>
-                  <a:srgbClr val="757575"/>
+                  <a:srgbClr val="87867F"/>
                 </a:solidFill>
                 <a:latin typeface="Consolas"/>
               </a:rPr>
@@ -6819,7 +6819,7 @@
             <a:r>
               <a:rPr sz="1600" b="0" i="0">
                 <a:solidFill>
-                  <a:srgbClr val="76B900"/>
+                  <a:srgbClr val="C96442"/>
                 </a:solidFill>
                 <a:latin typeface="Consolas"/>
               </a:rPr>
@@ -6842,7 +6842,7 @@
     <p:bg>
       <p:bgPr>
         <a:solidFill>
-          <a:srgbClr val="000000"/>
+          <a:srgbClr val="F5F4ED"/>
         </a:solidFill>
         <a:effectLst/>
       </p:bgPr>
@@ -6879,9 +6879,9 @@
             <a:r>
               <a:rPr sz="3200" b="1" i="0">
                 <a:solidFill>
-                  <a:srgbClr val="FFFFFF"/>
-                </a:solidFill>
-                <a:latin typeface="Arial"/>
+                  <a:srgbClr val="141413"/>
+                </a:solidFill>
+                <a:latin typeface="Georgia"/>
               </a:rPr>
               <a:t>環境準備檢查</a:t>
             </a:r>
@@ -6903,7 +6903,7 @@
             <a:avLst/>
           </a:prstGeom>
           <a:solidFill>
-            <a:srgbClr val="76B900"/>
+            <a:srgbClr val="C96442"/>
           </a:solidFill>
           <a:ln>
             <a:noFill/>
@@ -6965,7 +6965,7 @@
             <a:r>
               <a:rPr sz="2200" b="0" i="0">
                 <a:solidFill>
-                  <a:srgbClr val="A7A7A7"/>
+                  <a:srgbClr val="3D3D3A"/>
                 </a:solidFill>
                 <a:latin typeface="Arial"/>
               </a:rPr>
@@ -6984,7 +6984,7 @@
             <a:r>
               <a:rPr sz="2200" b="0" i="0">
                 <a:solidFill>
-                  <a:srgbClr val="A7A7A7"/>
+                  <a:srgbClr val="3D3D3A"/>
                 </a:solidFill>
                 <a:latin typeface="Arial"/>
               </a:rPr>
@@ -7003,7 +7003,7 @@
             <a:r>
               <a:rPr sz="2200" b="0" i="0">
                 <a:solidFill>
-                  <a:srgbClr val="A7A7A7"/>
+                  <a:srgbClr val="3D3D3A"/>
                 </a:solidFill>
                 <a:latin typeface="Arial"/>
               </a:rPr>
@@ -7022,7 +7022,7 @@
             <a:r>
               <a:rPr sz="2200" b="0" i="0">
                 <a:solidFill>
-                  <a:srgbClr val="A7A7A7"/>
+                  <a:srgbClr val="3D3D3A"/>
                 </a:solidFill>
                 <a:latin typeface="Arial"/>
               </a:rPr>
@@ -7041,7 +7041,7 @@
             <a:r>
               <a:rPr sz="2200" b="0" i="0">
                 <a:solidFill>
-                  <a:srgbClr val="A7A7A7"/>
+                  <a:srgbClr val="3D3D3A"/>
                 </a:solidFill>
                 <a:latin typeface="Arial"/>
               </a:rPr>
@@ -7060,7 +7060,7 @@
             <a:r>
               <a:rPr sz="2200" b="0" i="0">
                 <a:solidFill>
-                  <a:srgbClr val="A7A7A7"/>
+                  <a:srgbClr val="3D3D3A"/>
                 </a:solidFill>
                 <a:latin typeface="Arial"/>
               </a:rPr>
@@ -7083,7 +7083,7 @@
     <p:bg>
       <p:bgPr>
         <a:solidFill>
-          <a:srgbClr val="000000"/>
+          <a:srgbClr val="F5F4ED"/>
         </a:solidFill>
         <a:effectLst/>
       </p:bgPr>
@@ -7120,9 +7120,9 @@
             <a:r>
               <a:rPr sz="3200" b="1" i="0">
                 <a:solidFill>
-                  <a:srgbClr val="FFFFFF"/>
-                </a:solidFill>
-                <a:latin typeface="Arial"/>
+                  <a:srgbClr val="141413"/>
+                </a:solidFill>
+                <a:latin typeface="Georgia"/>
               </a:rPr>
               <a:t>今天的旅程</a:t>
             </a:r>
@@ -7144,7 +7144,7 @@
             <a:avLst/>
           </a:prstGeom>
           <a:solidFill>
-            <a:srgbClr val="76B900"/>
+            <a:srgbClr val="C96442"/>
           </a:solidFill>
           <a:ln>
             <a:noFill/>
@@ -7206,7 +7206,7 @@
             <a:r>
               <a:rPr sz="2200" b="1" i="0">
                 <a:solidFill>
-                  <a:srgbClr val="76B900"/>
+                  <a:srgbClr val="C96442"/>
                 </a:solidFill>
                 <a:latin typeface="Arial"/>
               </a:rPr>
@@ -7225,7 +7225,7 @@
             <a:r>
               <a:rPr sz="2200" b="0" i="0">
                 <a:solidFill>
-                  <a:srgbClr val="FFFFFF"/>
+                  <a:srgbClr val="141413"/>
                 </a:solidFill>
                 <a:latin typeface="Arial"/>
               </a:rPr>
@@ -7244,7 +7244,7 @@
             <a:r>
               <a:rPr sz="2200" b="1" i="0">
                 <a:solidFill>
-                  <a:srgbClr val="EF9100"/>
+                  <a:srgbClr val="D97757"/>
                 </a:solidFill>
                 <a:latin typeface="Arial"/>
               </a:rPr>
@@ -7263,7 +7263,7 @@
             <a:r>
               <a:rPr sz="2200" b="0" i="0">
                 <a:solidFill>
-                  <a:srgbClr val="FFFFFF"/>
+                  <a:srgbClr val="141413"/>
                 </a:solidFill>
                 <a:latin typeface="Arial"/>
               </a:rPr>
@@ -7282,7 +7282,7 @@
             <a:r>
               <a:rPr sz="2200" b="0" i="0">
                 <a:solidFill>
-                  <a:srgbClr val="FFFFFF"/>
+                  <a:srgbClr val="141413"/>
                 </a:solidFill>
                 <a:latin typeface="Arial"/>
               </a:rPr>
@@ -7301,7 +7301,7 @@
             <a:r>
               <a:rPr sz="1200" b="0" i="0">
                 <a:solidFill>
-                  <a:srgbClr val="FFFFFF"/>
+                  <a:srgbClr val="141413"/>
                 </a:solidFill>
                 <a:latin typeface="Arial"/>
               </a:rPr>
@@ -7320,7 +7320,7 @@
             <a:r>
               <a:rPr sz="2000" b="1" i="0">
                 <a:solidFill>
-                  <a:srgbClr val="76B900"/>
+                  <a:srgbClr val="6B7A3F"/>
                 </a:solidFill>
                 <a:latin typeface="Arial"/>
               </a:rPr>
@@ -7343,7 +7343,7 @@
     <p:bg>
       <p:bgPr>
         <a:solidFill>
-          <a:srgbClr val="000000"/>
+          <a:srgbClr val="F5F4ED"/>
         </a:solidFill>
         <a:effectLst/>
       </p:bgPr>
@@ -7381,7 +7381,7 @@
             <a:r>
               <a:rPr sz="2000" b="0" i="0">
                 <a:solidFill>
-                  <a:srgbClr val="76B900"/>
+                  <a:srgbClr val="C96442"/>
                 </a:solidFill>
                 <a:latin typeface="Arial"/>
               </a:rPr>
@@ -7416,9 +7416,9 @@
             <a:r>
               <a:rPr sz="4000" b="1" i="0">
                 <a:solidFill>
-                  <a:srgbClr val="FFFFFF"/>
-                </a:solidFill>
-                <a:latin typeface="Arial"/>
+                  <a:srgbClr val="141413"/>
+                </a:solidFill>
+                <a:latin typeface="Georgia"/>
               </a:rPr>
               <a:t>專案初始化</a:t>
             </a:r>
@@ -7439,7 +7439,7 @@
     <p:bg>
       <p:bgPr>
         <a:solidFill>
-          <a:srgbClr val="000000"/>
+          <a:srgbClr val="F5F4ED"/>
         </a:solidFill>
         <a:effectLst/>
       </p:bgPr>
@@ -7476,9 +7476,9 @@
             <a:r>
               <a:rPr sz="3200" b="1" i="0">
                 <a:solidFill>
-                  <a:srgbClr val="FFFFFF"/>
-                </a:solidFill>
-                <a:latin typeface="Arial"/>
+                  <a:srgbClr val="141413"/>
+                </a:solidFill>
+                <a:latin typeface="Georgia"/>
               </a:rPr>
               <a:t>一切從 /task-init 開始</a:t>
             </a:r>
@@ -7500,7 +7500,7 @@
             <a:avLst/>
           </a:prstGeom>
           <a:solidFill>
-            <a:srgbClr val="76B900"/>
+            <a:srgbClr val="C96442"/>
           </a:solidFill>
           <a:ln>
             <a:noFill/>
@@ -7562,7 +7562,7 @@
             <a:r>
               <a:rPr sz="2400" b="1" i="0">
                 <a:solidFill>
-                  <a:srgbClr val="76B900"/>
+                  <a:srgbClr val="C96442"/>
                 </a:solidFill>
                 <a:latin typeface="Arial"/>
               </a:rPr>
@@ -7581,7 +7581,7 @@
             <a:r>
               <a:rPr sz="800" b="0" i="0">
                 <a:solidFill>
-                  <a:srgbClr val="FFFFFF"/>
+                  <a:srgbClr val="141413"/>
                 </a:solidFill>
                 <a:latin typeface="Arial"/>
               </a:rPr>
@@ -7600,7 +7600,7 @@
             <a:r>
               <a:rPr sz="2000" b="1" i="0">
                 <a:solidFill>
-                  <a:srgbClr val="FFFFFF"/>
+                  <a:srgbClr val="141413"/>
                 </a:solidFill>
                 <a:latin typeface="Arial"/>
               </a:rPr>
@@ -7619,7 +7619,7 @@
             <a:r>
               <a:rPr sz="2000" b="0" i="0">
                 <a:solidFill>
-                  <a:srgbClr val="FFFFFF"/>
+                  <a:srgbClr val="141413"/>
                 </a:solidFill>
                 <a:latin typeface="Arial"/>
               </a:rPr>
@@ -7638,7 +7638,7 @@
             <a:r>
               <a:rPr sz="1600" b="0" i="0">
                 <a:solidFill>
-                  <a:srgbClr val="898989"/>
+                  <a:srgbClr val="5E5D59"/>
                 </a:solidFill>
                 <a:latin typeface="Arial"/>
               </a:rPr>
@@ -7657,7 +7657,7 @@
             <a:r>
               <a:rPr sz="2000" b="0" i="0">
                 <a:solidFill>
-                  <a:srgbClr val="FFFFFF"/>
+                  <a:srgbClr val="141413"/>
                 </a:solidFill>
                 <a:latin typeface="Arial"/>
               </a:rPr>
@@ -7676,7 +7676,7 @@
             <a:r>
               <a:rPr sz="1800" b="0" i="0">
                 <a:solidFill>
-                  <a:srgbClr val="76B900"/>
+                  <a:srgbClr val="6B7A3F"/>
                 </a:solidFill>
                 <a:latin typeface="Arial"/>
               </a:rPr>
@@ -7695,7 +7695,7 @@
             <a:r>
               <a:rPr sz="1800" b="0" i="0">
                 <a:solidFill>
-                  <a:srgbClr val="76B900"/>
+                  <a:srgbClr val="6B7A3F"/>
                 </a:solidFill>
                 <a:latin typeface="Arial"/>
               </a:rPr>
@@ -7714,7 +7714,7 @@
             <a:r>
               <a:rPr sz="2000" b="0" i="0">
                 <a:solidFill>
-                  <a:srgbClr val="FFFFFF"/>
+                  <a:srgbClr val="141413"/>
                 </a:solidFill>
                 <a:latin typeface="Arial"/>
               </a:rPr>
@@ -7737,7 +7737,7 @@
     <p:bg>
       <p:bgPr>
         <a:solidFill>
-          <a:srgbClr val="000000"/>
+          <a:srgbClr val="F5F4ED"/>
         </a:solidFill>
         <a:effectLst/>
       </p:bgPr>
@@ -7775,7 +7775,7 @@
             <a:r>
               <a:rPr sz="2000" b="0" i="0">
                 <a:solidFill>
-                  <a:srgbClr val="76B900"/>
+                  <a:srgbClr val="C96442"/>
                 </a:solidFill>
                 <a:latin typeface="Arial"/>
               </a:rPr>
@@ -7810,9 +7810,9 @@
             <a:r>
               <a:rPr sz="4000" b="1" i="0">
                 <a:solidFill>
-                  <a:srgbClr val="FFFFFF"/>
-                </a:solidFill>
-                <a:latin typeface="Arial"/>
+                  <a:srgbClr val="141413"/>
+                </a:solidFill>
+                <a:latin typeface="Georgia"/>
               </a:rPr>
               <a:t>認識 VibeCoding 模板</a:t>
             </a:r>
@@ -7833,7 +7833,7 @@
     <p:bg>
       <p:bgPr>
         <a:solidFill>
-          <a:srgbClr val="000000"/>
+          <a:srgbClr val="F5F4ED"/>
         </a:solidFill>
         <a:effectLst/>
       </p:bgPr>
@@ -7870,9 +7870,9 @@
             <a:r>
               <a:rPr sz="3200" b="1" i="0">
                 <a:solidFill>
-                  <a:srgbClr val="FFFFFF"/>
-                </a:solidFill>
-                <a:latin typeface="Arial"/>
+                  <a:srgbClr val="141413"/>
+                </a:solidFill>
+                <a:latin typeface="Georgia"/>
               </a:rPr>
               <a:t>MVP vs Complete 模式</a:t>
             </a:r>
@@ -7894,7 +7894,7 @@
             <a:avLst/>
           </a:prstGeom>
           <a:solidFill>
-            <a:srgbClr val="76B900"/>
+            <a:srgbClr val="C96442"/>
           </a:solidFill>
           <a:ln>
             <a:noFill/>
@@ -7947,7 +7947,7 @@
             <a:r>
               <a:rPr sz="2200" b="1" i="0">
                 <a:solidFill>
-                  <a:srgbClr val="76B900"/>
+                  <a:srgbClr val="C96442"/>
                 </a:solidFill>
                 <a:latin typeface="Arial"/>
               </a:rPr>
@@ -7966,7 +7966,7 @@
             <a:r>
               <a:rPr sz="1800" b="0" i="0">
                 <a:solidFill>
-                  <a:srgbClr val="FFFFFF"/>
+                  <a:srgbClr val="141413"/>
                 </a:solidFill>
                 <a:latin typeface="Arial"/>
               </a:rPr>
@@ -7985,7 +7985,7 @@
             <a:r>
               <a:rPr sz="1800" b="0" i="0">
                 <a:solidFill>
-                  <a:srgbClr val="FFFFFF"/>
+                  <a:srgbClr val="141413"/>
                 </a:solidFill>
                 <a:latin typeface="Arial"/>
               </a:rPr>
@@ -8004,7 +8004,7 @@
             <a:r>
               <a:rPr sz="1800" b="0" i="0">
                 <a:solidFill>
-                  <a:srgbClr val="FFFFFF"/>
+                  <a:srgbClr val="141413"/>
                 </a:solidFill>
                 <a:latin typeface="Arial"/>
               </a:rPr>
@@ -8023,7 +8023,7 @@
             <a:r>
               <a:rPr sz="1800" b="0" i="0">
                 <a:solidFill>
-                  <a:srgbClr val="FFFFFF"/>
+                  <a:srgbClr val="141413"/>
                 </a:solidFill>
                 <a:latin typeface="Arial"/>
               </a:rPr>
@@ -8042,7 +8042,7 @@
             <a:r>
               <a:rPr sz="1800" b="0" i="0">
                 <a:solidFill>
-                  <a:srgbClr val="FFFFFF"/>
+                  <a:srgbClr val="141413"/>
                 </a:solidFill>
                 <a:latin typeface="Arial"/>
               </a:rPr>
@@ -8061,7 +8061,7 @@
             <a:r>
               <a:rPr sz="1800" b="0" i="0">
                 <a:solidFill>
-                  <a:srgbClr val="898989"/>
+                  <a:srgbClr val="5E5D59"/>
                 </a:solidFill>
                 <a:latin typeface="Arial"/>
               </a:rPr>
@@ -8095,7 +8095,7 @@
             <a:r>
               <a:rPr sz="2200" b="1" i="0">
                 <a:solidFill>
-                  <a:srgbClr val="76B900"/>
+                  <a:srgbClr val="6B7A3F"/>
                 </a:solidFill>
                 <a:latin typeface="Arial"/>
               </a:rPr>
@@ -8114,7 +8114,7 @@
             <a:r>
               <a:rPr sz="1800" b="0" i="0">
                 <a:solidFill>
-                  <a:srgbClr val="FFFFFF"/>
+                  <a:srgbClr val="141413"/>
                 </a:solidFill>
                 <a:latin typeface="Arial"/>
               </a:rPr>
@@ -8133,7 +8133,7 @@
             <a:r>
               <a:rPr sz="1800" b="0" i="0">
                 <a:solidFill>
-                  <a:srgbClr val="FFFFFF"/>
+                  <a:srgbClr val="141413"/>
                 </a:solidFill>
                 <a:latin typeface="Arial"/>
               </a:rPr>
@@ -8152,7 +8152,7 @@
             <a:r>
               <a:rPr sz="1800" b="0" i="0">
                 <a:solidFill>
-                  <a:srgbClr val="FFFFFF"/>
+                  <a:srgbClr val="141413"/>
                 </a:solidFill>
                 <a:latin typeface="Arial"/>
               </a:rPr>
@@ -8171,7 +8171,7 @@
             <a:r>
               <a:rPr sz="1800" b="0" i="0">
                 <a:solidFill>
-                  <a:srgbClr val="FFFFFF"/>
+                  <a:srgbClr val="141413"/>
                 </a:solidFill>
                 <a:latin typeface="Arial"/>
               </a:rPr>
@@ -8190,7 +8190,7 @@
             <a:r>
               <a:rPr sz="1800" b="0" i="0">
                 <a:solidFill>
-                  <a:srgbClr val="FFFFFF"/>
+                  <a:srgbClr val="141413"/>
                 </a:solidFill>
                 <a:latin typeface="Arial"/>
               </a:rPr>
@@ -8209,7 +8209,7 @@
             <a:r>
               <a:rPr sz="1800" b="0" i="0">
                 <a:solidFill>
-                  <a:srgbClr val="898989"/>
+                  <a:srgbClr val="5E5D59"/>
                 </a:solidFill>
                 <a:latin typeface="Arial"/>
               </a:rPr>
@@ -8232,7 +8232,7 @@
     <p:bg>
       <p:bgPr>
         <a:solidFill>
-          <a:srgbClr val="000000"/>
+          <a:srgbClr val="F5F4ED"/>
         </a:solidFill>
         <a:effectLst/>
       </p:bgPr>
@@ -8269,9 +8269,9 @@
             <a:r>
               <a:rPr sz="3200" b="1" i="0">
                 <a:solidFill>
-                  <a:srgbClr val="FFFFFF"/>
-                </a:solidFill>
-                <a:latin typeface="Arial"/>
+                  <a:srgbClr val="141413"/>
+                </a:solidFill>
+                <a:latin typeface="Georgia"/>
               </a:rPr>
               <a:t>CLAUDE.md = 專案的「身分證」</a:t>
             </a:r>
@@ -8293,7 +8293,7 @@
             <a:avLst/>
           </a:prstGeom>
           <a:solidFill>
-            <a:srgbClr val="76B900"/>
+            <a:srgbClr val="C96442"/>
           </a:solidFill>
           <a:ln>
             <a:noFill/>
@@ -8355,7 +8355,7 @@
             <a:r>
               <a:rPr sz="2000" b="1" i="0">
                 <a:solidFill>
-                  <a:srgbClr val="76B900"/>
+                  <a:srgbClr val="C96442"/>
                 </a:solidFill>
                 <a:latin typeface="Arial"/>
               </a:rPr>
@@ -8374,7 +8374,7 @@
             <a:r>
               <a:rPr sz="800" b="0" i="0">
                 <a:solidFill>
-                  <a:srgbClr val="FFFFFF"/>
+                  <a:srgbClr val="141413"/>
                 </a:solidFill>
                 <a:latin typeface="Arial"/>
               </a:rPr>
@@ -8393,7 +8393,7 @@
             <a:r>
               <a:rPr sz="2000" b="0" i="0">
                 <a:solidFill>
-                  <a:srgbClr val="FFFFFF"/>
+                  <a:srgbClr val="141413"/>
                 </a:solidFill>
                 <a:latin typeface="Arial"/>
               </a:rPr>
@@ -8412,7 +8412,7 @@
             <a:r>
               <a:rPr sz="2000" b="0" i="0">
                 <a:solidFill>
-                  <a:srgbClr val="FFFFFF"/>
+                  <a:srgbClr val="141413"/>
                 </a:solidFill>
                 <a:latin typeface="Arial"/>
               </a:rPr>
@@ -8431,7 +8431,7 @@
             <a:r>
               <a:rPr sz="2000" b="0" i="0">
                 <a:solidFill>
-                  <a:srgbClr val="FFFFFF"/>
+                  <a:srgbClr val="141413"/>
                 </a:solidFill>
                 <a:latin typeface="Arial"/>
               </a:rPr>
@@ -8450,7 +8450,7 @@
             <a:r>
               <a:rPr sz="2000" b="0" i="0">
                 <a:solidFill>
-                  <a:srgbClr val="FFFFFF"/>
+                  <a:srgbClr val="141413"/>
                 </a:solidFill>
                 <a:latin typeface="Arial"/>
               </a:rPr>
@@ -8469,7 +8469,7 @@
             <a:r>
               <a:rPr sz="2000" b="0" i="0">
                 <a:solidFill>
-                  <a:srgbClr val="FFFFFF"/>
+                  <a:srgbClr val="141413"/>
                 </a:solidFill>
                 <a:latin typeface="Arial"/>
               </a:rPr>
@@ -8488,7 +8488,7 @@
             <a:r>
               <a:rPr sz="1200" b="0" i="0">
                 <a:solidFill>
-                  <a:srgbClr val="FFFFFF"/>
+                  <a:srgbClr val="141413"/>
                 </a:solidFill>
                 <a:latin typeface="Arial"/>
               </a:rPr>
@@ -8507,7 +8507,7 @@
             <a:r>
               <a:rPr sz="2000" b="0" i="0">
                 <a:solidFill>
-                  <a:srgbClr val="76B900"/>
+                  <a:srgbClr val="6B7A3F"/>
                 </a:solidFill>
                 <a:latin typeface="Arial"/>
               </a:rPr>
@@ -8526,7 +8526,7 @@
             <a:r>
               <a:rPr sz="2000" b="0" i="0">
                 <a:solidFill>
-                  <a:srgbClr val="76B900"/>
+                  <a:srgbClr val="6B7A3F"/>
                 </a:solidFill>
                 <a:latin typeface="Arial"/>
               </a:rPr>
@@ -8549,7 +8549,7 @@
     <p:bg>
       <p:bgPr>
         <a:solidFill>
-          <a:srgbClr val="000000"/>
+          <a:srgbClr val="F5F4ED"/>
         </a:solidFill>
         <a:effectLst/>
       </p:bgPr>
@@ -8586,9 +8586,9 @@
             <a:r>
               <a:rPr sz="3000" b="1" i="0">
                 <a:solidFill>
-                  <a:srgbClr val="FFFFFF"/>
-                </a:solidFill>
-                <a:latin typeface="Arial"/>
+                  <a:srgbClr val="141413"/>
+                </a:solidFill>
+                <a:latin typeface="Georgia"/>
               </a:rPr>
               <a:t>WBS = 自動拆解的任務清單</a:t>
             </a:r>
@@ -8610,11 +8610,11 @@
             <a:avLst/>
           </a:prstGeom>
           <a:solidFill>
-            <a:srgbClr val="1A1A1A"/>
+            <a:srgbClr val="FAF9F5"/>
           </a:solidFill>
           <a:ln w="12700">
             <a:solidFill>
-              <a:srgbClr val="1A1A1A"/>
+              <a:srgbClr val="E8E6DC"/>
             </a:solidFill>
           </a:ln>
           <a:effectLst/>
@@ -8674,7 +8674,7 @@
             <a:r>
               <a:rPr sz="1600" b="0" i="0">
                 <a:solidFill>
-                  <a:srgbClr val="76B900"/>
+                  <a:srgbClr val="C96442"/>
                 </a:solidFill>
                 <a:latin typeface="Consolas"/>
               </a:rPr>
@@ -8693,7 +8693,7 @@
             <a:r>
               <a:rPr sz="1600" b="0" i="0">
                 <a:solidFill>
-                  <a:srgbClr val="A7A7A7"/>
+                  <a:srgbClr val="3D3D3A"/>
                 </a:solidFill>
                 <a:latin typeface="Consolas"/>
               </a:rPr>
@@ -8712,7 +8712,7 @@
             <a:r>
               <a:rPr sz="1600" b="0" i="0">
                 <a:solidFill>
-                  <a:srgbClr val="A7A7A7"/>
+                  <a:srgbClr val="3D3D3A"/>
                 </a:solidFill>
                 <a:latin typeface="Consolas"/>
               </a:rPr>
@@ -8731,7 +8731,7 @@
             <a:r>
               <a:rPr sz="1600" b="0" i="0">
                 <a:solidFill>
-                  <a:srgbClr val="757575"/>
+                  <a:srgbClr val="87867F"/>
                 </a:solidFill>
                 <a:latin typeface="Consolas"/>
               </a:rPr>
@@ -8750,7 +8750,7 @@
             <a:r>
               <a:rPr sz="1600" b="0" i="0">
                 <a:solidFill>
-                  <a:srgbClr val="76B900"/>
+                  <a:srgbClr val="C96442"/>
                 </a:solidFill>
                 <a:latin typeface="Consolas"/>
               </a:rPr>
@@ -8769,7 +8769,7 @@
             <a:r>
               <a:rPr sz="1600" b="0" i="0">
                 <a:solidFill>
-                  <a:srgbClr val="76B900"/>
+                  <a:srgbClr val="6B7A3F"/>
                 </a:solidFill>
                 <a:latin typeface="Consolas"/>
               </a:rPr>
@@ -8788,7 +8788,7 @@
             <a:r>
               <a:rPr sz="1600" b="0" i="0">
                 <a:solidFill>
-                  <a:srgbClr val="A7A7A7"/>
+                  <a:srgbClr val="3D3D3A"/>
                 </a:solidFill>
                 <a:latin typeface="Consolas"/>
               </a:rPr>
@@ -8807,7 +8807,7 @@
             <a:r>
               <a:rPr sz="1600" b="0" i="0">
                 <a:solidFill>
-                  <a:srgbClr val="A7A7A7"/>
+                  <a:srgbClr val="3D3D3A"/>
                 </a:solidFill>
                 <a:latin typeface="Consolas"/>
               </a:rPr>
@@ -8826,7 +8826,7 @@
             <a:r>
               <a:rPr sz="1600" b="0" i="0">
                 <a:solidFill>
-                  <a:srgbClr val="757575"/>
+                  <a:srgbClr val="87867F"/>
                 </a:solidFill>
                 <a:latin typeface="Consolas"/>
               </a:rPr>
@@ -8845,7 +8845,7 @@
             <a:r>
               <a:rPr sz="1600" b="0" i="0">
                 <a:solidFill>
-                  <a:srgbClr val="76B900"/>
+                  <a:srgbClr val="C96442"/>
                 </a:solidFill>
                 <a:latin typeface="Consolas"/>
               </a:rPr>
@@ -8864,7 +8864,7 @@
             <a:r>
               <a:rPr sz="1600" b="0" i="0">
                 <a:solidFill>
-                  <a:srgbClr val="A7A7A7"/>
+                  <a:srgbClr val="3D3D3A"/>
                 </a:solidFill>
                 <a:latin typeface="Consolas"/>
               </a:rPr>
@@ -8883,7 +8883,7 @@
             <a:r>
               <a:rPr sz="1600" b="0" i="0">
                 <a:solidFill>
-                  <a:srgbClr val="A7A7A7"/>
+                  <a:srgbClr val="3D3D3A"/>
                 </a:solidFill>
                 <a:latin typeface="Consolas"/>
               </a:rPr>
@@ -8902,7 +8902,7 @@
             <a:r>
               <a:rPr sz="1600" b="0" i="0">
                 <a:solidFill>
-                  <a:srgbClr val="757575"/>
+                  <a:srgbClr val="87867F"/>
                 </a:solidFill>
                 <a:latin typeface="Consolas"/>
               </a:rPr>
@@ -8921,7 +8921,7 @@
             <a:r>
               <a:rPr sz="1600" b="0" i="0">
                 <a:solidFill>
-                  <a:srgbClr val="898989"/>
+                  <a:srgbClr val="5E5D59"/>
                 </a:solidFill>
                 <a:latin typeface="Consolas"/>
               </a:rPr>
@@ -8944,7 +8944,7 @@
     <p:bg>
       <p:bgPr>
         <a:solidFill>
-          <a:srgbClr val="000000"/>
+          <a:srgbClr val="F5F4ED"/>
         </a:solidFill>
         <a:effectLst/>
       </p:bgPr>
@@ -8981,9 +8981,9 @@
             <a:r>
               <a:rPr sz="3000" b="1" i="0">
                 <a:solidFill>
-                  <a:srgbClr val="FFFFFF"/>
-                </a:solidFill>
-                <a:latin typeface="Arial"/>
+                  <a:srgbClr val="141413"/>
+                </a:solidFill>
+                <a:latin typeface="Georgia"/>
               </a:rPr>
               <a:t>⚡ 現場操作 — /task-init</a:t>
             </a:r>
@@ -9005,11 +9005,11 @@
             <a:avLst/>
           </a:prstGeom>
           <a:solidFill>
-            <a:srgbClr val="1A1A1A"/>
+            <a:srgbClr val="FAF9F5"/>
           </a:solidFill>
           <a:ln w="12700">
             <a:solidFill>
-              <a:srgbClr val="1A1A1A"/>
+              <a:srgbClr val="E8E6DC"/>
             </a:solidFill>
           </a:ln>
           <a:effectLst/>
@@ -9069,7 +9069,7 @@
             <a:r>
               <a:rPr sz="1600" b="0" i="0">
                 <a:solidFill>
-                  <a:srgbClr val="898989"/>
+                  <a:srgbClr val="5E5D59"/>
                 </a:solidFill>
                 <a:latin typeface="Consolas"/>
               </a:rPr>
@@ -9088,7 +9088,7 @@
             <a:r>
               <a:rPr sz="1600" b="0" i="0">
                 <a:solidFill>
-                  <a:srgbClr val="FFFFFF"/>
+                  <a:srgbClr val="141413"/>
                 </a:solidFill>
                 <a:latin typeface="Consolas"/>
               </a:rPr>
@@ -9107,7 +9107,7 @@
             <a:r>
               <a:rPr sz="1600" b="0" i="0">
                 <a:solidFill>
-                  <a:srgbClr val="76B900"/>
+                  <a:srgbClr val="C96442"/>
                 </a:solidFill>
                 <a:latin typeface="Consolas"/>
               </a:rPr>
@@ -9126,7 +9126,7 @@
             <a:r>
               <a:rPr sz="1600" b="0" i="0">
                 <a:solidFill>
-                  <a:srgbClr val="757575"/>
+                  <a:srgbClr val="87867F"/>
                 </a:solidFill>
                 <a:latin typeface="Consolas"/>
               </a:rPr>
@@ -9145,7 +9145,7 @@
             <a:r>
               <a:rPr sz="1600" b="0" i="0">
                 <a:solidFill>
-                  <a:srgbClr val="898989"/>
+                  <a:srgbClr val="5E5D59"/>
                 </a:solidFill>
                 <a:latin typeface="Consolas"/>
               </a:rPr>
@@ -9164,7 +9164,7 @@
             <a:r>
               <a:rPr sz="1600" b="0" i="0">
                 <a:solidFill>
-                  <a:srgbClr val="76B900"/>
+                  <a:srgbClr val="C96442"/>
                 </a:solidFill>
                 <a:latin typeface="Consolas"/>
               </a:rPr>
@@ -9183,7 +9183,7 @@
             <a:r>
               <a:rPr sz="1600" b="0" i="0">
                 <a:solidFill>
-                  <a:srgbClr val="757575"/>
+                  <a:srgbClr val="87867F"/>
                 </a:solidFill>
                 <a:latin typeface="Consolas"/>
               </a:rPr>
@@ -9202,7 +9202,7 @@
             <a:r>
               <a:rPr sz="1600" b="0" i="0">
                 <a:solidFill>
-                  <a:srgbClr val="898989"/>
+                  <a:srgbClr val="5E5D59"/>
                 </a:solidFill>
                 <a:latin typeface="Consolas"/>
               </a:rPr>
@@ -9221,7 +9221,7 @@
             <a:r>
               <a:rPr sz="1600" b="0" i="0">
                 <a:solidFill>
-                  <a:srgbClr val="FFFFFF"/>
+                  <a:srgbClr val="141413"/>
                 </a:solidFill>
                 <a:latin typeface="Consolas"/>
               </a:rPr>
@@ -9240,7 +9240,7 @@
             <a:r>
               <a:rPr sz="1600" b="0" i="0">
                 <a:solidFill>
-                  <a:srgbClr val="FFFFFF"/>
+                  <a:srgbClr val="141413"/>
                 </a:solidFill>
                 <a:latin typeface="Consolas"/>
               </a:rPr>
@@ -9259,7 +9259,7 @@
             <a:r>
               <a:rPr sz="1600" b="0" i="0">
                 <a:solidFill>
-                  <a:srgbClr val="FFFFFF"/>
+                  <a:srgbClr val="141413"/>
                 </a:solidFill>
                 <a:latin typeface="Consolas"/>
               </a:rPr>
@@ -9278,7 +9278,7 @@
             <a:r>
               <a:rPr sz="1600" b="0" i="0">
                 <a:solidFill>
-                  <a:srgbClr val="FFFFFF"/>
+                  <a:srgbClr val="141413"/>
                 </a:solidFill>
                 <a:latin typeface="Consolas"/>
               </a:rPr>
@@ -9297,7 +9297,7 @@
             <a:r>
               <a:rPr sz="1600" b="0" i="0">
                 <a:solidFill>
-                  <a:srgbClr val="757575"/>
+                  <a:srgbClr val="87867F"/>
                 </a:solidFill>
                 <a:latin typeface="Consolas"/>
               </a:rPr>
@@ -9316,7 +9316,7 @@
             <a:r>
               <a:rPr sz="1600" b="0" i="0">
                 <a:solidFill>
-                  <a:srgbClr val="898989"/>
+                  <a:srgbClr val="5E5D59"/>
                 </a:solidFill>
                 <a:latin typeface="Consolas"/>
               </a:rPr>
@@ -9335,7 +9335,7 @@
             <a:r>
               <a:rPr sz="1600" b="0" i="0">
                 <a:solidFill>
-                  <a:srgbClr val="76B900"/>
+                  <a:srgbClr val="C96442"/>
                 </a:solidFill>
                 <a:latin typeface="Consolas"/>
               </a:rPr>
@@ -9358,7 +9358,7 @@
     <p:bg>
       <p:bgPr>
         <a:solidFill>
-          <a:srgbClr val="000000"/>
+          <a:srgbClr val="F5F4ED"/>
         </a:solidFill>
         <a:effectLst/>
       </p:bgPr>
@@ -9396,7 +9396,7 @@
             <a:r>
               <a:rPr sz="2000" b="0" i="0">
                 <a:solidFill>
-                  <a:srgbClr val="76B900"/>
+                  <a:srgbClr val="C96442"/>
                 </a:solidFill>
                 <a:latin typeface="Arial"/>
               </a:rPr>
@@ -9431,9 +9431,9 @@
             <a:r>
               <a:rPr sz="4000" b="1" i="0">
                 <a:solidFill>
-                  <a:srgbClr val="FFFFFF"/>
-                </a:solidFill>
-                <a:latin typeface="Arial"/>
+                  <a:srgbClr val="141413"/>
+                </a:solidFill>
+                <a:latin typeface="Georgia"/>
               </a:rPr>
               <a:t>開發循環</a:t>
             </a:r>
@@ -9454,7 +9454,7 @@
     <p:bg>
       <p:bgPr>
         <a:solidFill>
-          <a:srgbClr val="000000"/>
+          <a:srgbClr val="F5F4ED"/>
         </a:solidFill>
         <a:effectLst/>
       </p:bgPr>
@@ -9491,9 +9491,9 @@
             <a:r>
               <a:rPr sz="3200" b="1" i="0">
                 <a:solidFill>
-                  <a:srgbClr val="FFFFFF"/>
-                </a:solidFill>
-                <a:latin typeface="Arial"/>
+                  <a:srgbClr val="141413"/>
+                </a:solidFill>
+                <a:latin typeface="Georgia"/>
               </a:rPr>
               <a:t>開發循環全貌（依任務模式分流）</a:t>
             </a:r>
@@ -9515,7 +9515,7 @@
             <a:avLst/>
           </a:prstGeom>
           <a:solidFill>
-            <a:srgbClr val="76B900"/>
+            <a:srgbClr val="C96442"/>
           </a:solidFill>
           <a:ln>
             <a:noFill/>
@@ -9577,7 +9577,7 @@
             <a:r>
               <a:rPr sz="2000" b="0" i="0">
                 <a:solidFill>
-                  <a:srgbClr val="FFFFFF"/>
+                  <a:srgbClr val="141413"/>
                 </a:solidFill>
                 <a:latin typeface="Arial"/>
               </a:rPr>
@@ -9596,7 +9596,7 @@
             <a:r>
               <a:rPr sz="800" b="0" i="0">
                 <a:solidFill>
-                  <a:srgbClr val="FFFFFF"/>
+                  <a:srgbClr val="141413"/>
                 </a:solidFill>
                 <a:latin typeface="Arial"/>
               </a:rPr>
@@ -9615,7 +9615,7 @@
             <a:r>
               <a:rPr sz="2000" b="0" i="0">
                 <a:solidFill>
-                  <a:srgbClr val="76B900"/>
+                  <a:srgbClr val="6B7A3F"/>
                 </a:solidFill>
                 <a:latin typeface="Arial"/>
               </a:rPr>
@@ -9634,7 +9634,7 @@
             <a:r>
               <a:rPr sz="1500" b="0" i="0">
                 <a:solidFill>
-                  <a:srgbClr val="898989"/>
+                  <a:srgbClr val="5E5D59"/>
                 </a:solidFill>
                 <a:latin typeface="Arial"/>
               </a:rPr>
@@ -9653,7 +9653,7 @@
             <a:r>
               <a:rPr sz="600" b="0" i="0">
                 <a:solidFill>
-                  <a:srgbClr val="FFFFFF"/>
+                  <a:srgbClr val="141413"/>
                 </a:solidFill>
                 <a:latin typeface="Arial"/>
               </a:rPr>
@@ -9672,7 +9672,7 @@
             <a:r>
               <a:rPr sz="2000" b="0" i="0">
                 <a:solidFill>
-                  <a:srgbClr val="FFFFFF"/>
+                  <a:srgbClr val="141413"/>
                 </a:solidFill>
                 <a:latin typeface="Arial"/>
               </a:rPr>
@@ -9691,7 +9691,7 @@
             <a:r>
               <a:rPr sz="1800" b="0" i="0">
                 <a:solidFill>
-                  <a:srgbClr val="FFFFFF"/>
+                  <a:srgbClr val="141413"/>
                 </a:solidFill>
                 <a:latin typeface="Arial"/>
               </a:rPr>
@@ -9710,7 +9710,7 @@
             <a:r>
               <a:rPr sz="1500" b="0" i="0">
                 <a:solidFill>
-                  <a:srgbClr val="898989"/>
+                  <a:srgbClr val="5E5D59"/>
                 </a:solidFill>
                 <a:latin typeface="Arial"/>
               </a:rPr>
@@ -9729,7 +9729,7 @@
             <a:r>
               <a:rPr sz="600" b="0" i="0">
                 <a:solidFill>
-                  <a:srgbClr val="FFFFFF"/>
+                  <a:srgbClr val="141413"/>
                 </a:solidFill>
                 <a:latin typeface="Arial"/>
               </a:rPr>
@@ -9748,7 +9748,7 @@
             <a:r>
               <a:rPr sz="2000" b="0" i="0">
                 <a:solidFill>
-                  <a:srgbClr val="EF9100"/>
+                  <a:srgbClr val="D97757"/>
                 </a:solidFill>
                 <a:latin typeface="Arial"/>
               </a:rPr>
@@ -9767,7 +9767,7 @@
             <a:r>
               <a:rPr sz="1800" b="0" i="0">
                 <a:solidFill>
-                  <a:srgbClr val="EF9100"/>
+                  <a:srgbClr val="D97757"/>
                 </a:solidFill>
                 <a:latin typeface="Arial"/>
               </a:rPr>
@@ -9786,7 +9786,7 @@
             <a:r>
               <a:rPr sz="1500" b="0" i="0">
                 <a:solidFill>
-                  <a:srgbClr val="898989"/>
+                  <a:srgbClr val="5E5D59"/>
                 </a:solidFill>
                 <a:latin typeface="Arial"/>
               </a:rPr>
@@ -9805,7 +9805,7 @@
             <a:r>
               <a:rPr sz="600" b="0" i="0">
                 <a:solidFill>
-                  <a:srgbClr val="FFFFFF"/>
+                  <a:srgbClr val="141413"/>
                 </a:solidFill>
                 <a:latin typeface="Arial"/>
               </a:rPr>
@@ -9824,7 +9824,7 @@
             <a:r>
               <a:rPr sz="1600" b="1" i="0">
                 <a:solidFill>
-                  <a:srgbClr val="76B900"/>
+                  <a:srgbClr val="C96442"/>
                 </a:solidFill>
                 <a:latin typeface="Arial"/>
               </a:rPr>
@@ -9847,7 +9847,7 @@
     <p:bg>
       <p:bgPr>
         <a:solidFill>
-          <a:srgbClr val="000000"/>
+          <a:srgbClr val="F5F4ED"/>
         </a:solidFill>
         <a:effectLst/>
       </p:bgPr>
@@ -9885,7 +9885,7 @@
             <a:r>
               <a:rPr sz="2000" b="0" i="0">
                 <a:solidFill>
-                  <a:srgbClr val="76B900"/>
+                  <a:srgbClr val="C96442"/>
                 </a:solidFill>
                 <a:latin typeface="Arial"/>
               </a:rPr>
@@ -9920,9 +9920,9 @@
             <a:r>
               <a:rPr sz="4000" b="1" i="0">
                 <a:solidFill>
-                  <a:srgbClr val="FFFFFF"/>
-                </a:solidFill>
-                <a:latin typeface="Arial"/>
+                  <a:srgbClr val="141413"/>
+                </a:solidFill>
+                <a:latin typeface="Georgia"/>
               </a:rPr>
               <a:t>後端 API — FastAPI + pytest</a:t>
             </a:r>
@@ -9943,7 +9943,7 @@
     <p:bg>
       <p:bgPr>
         <a:solidFill>
-          <a:srgbClr val="000000"/>
+          <a:srgbClr val="F5F4ED"/>
         </a:solidFill>
         <a:effectLst/>
       </p:bgPr>
@@ -9980,9 +9980,9 @@
             <a:r>
               <a:rPr sz="3000" b="1" i="0">
                 <a:solidFill>
-                  <a:srgbClr val="FFFFFF"/>
-                </a:solidFill>
-                <a:latin typeface="Arial"/>
+                  <a:srgbClr val="141413"/>
+                </a:solidFill>
+                <a:latin typeface="Georgia"/>
               </a:rPr>
               <a:t>/plan — AI 先想清楚再動手</a:t>
             </a:r>
@@ -10004,11 +10004,11 @@
             <a:avLst/>
           </a:prstGeom>
           <a:solidFill>
-            <a:srgbClr val="1A1A1A"/>
+            <a:srgbClr val="FAF9F5"/>
           </a:solidFill>
           <a:ln w="12700">
             <a:solidFill>
-              <a:srgbClr val="1A1A1A"/>
+              <a:srgbClr val="E8E6DC"/>
             </a:solidFill>
           </a:ln>
           <a:effectLst/>
@@ -10068,7 +10068,7 @@
             <a:r>
               <a:rPr sz="1600" b="0" i="0">
                 <a:solidFill>
-                  <a:srgbClr val="76B900"/>
+                  <a:srgbClr val="C96442"/>
                 </a:solidFill>
                 <a:latin typeface="Consolas"/>
               </a:rPr>
@@ -10087,7 +10087,7 @@
             <a:r>
               <a:rPr sz="1600" b="0" i="0">
                 <a:solidFill>
-                  <a:srgbClr val="757575"/>
+                  <a:srgbClr val="87867F"/>
                 </a:solidFill>
                 <a:latin typeface="Consolas"/>
               </a:rPr>
@@ -10106,7 +10106,7 @@
             <a:r>
               <a:rPr sz="1600" b="0" i="0">
                 <a:solidFill>
-                  <a:srgbClr val="FFFFFF"/>
+                  <a:srgbClr val="141413"/>
                 </a:solidFill>
                 <a:latin typeface="Consolas"/>
               </a:rPr>
@@ -10125,7 +10125,7 @@
             <a:r>
               <a:rPr sz="1600" b="0" i="0">
                 <a:solidFill>
-                  <a:srgbClr val="A7A7A7"/>
+                  <a:srgbClr val="3D3D3A"/>
                 </a:solidFill>
                 <a:latin typeface="Consolas"/>
               </a:rPr>
@@ -10144,7 +10144,7 @@
             <a:r>
               <a:rPr sz="1600" b="0" i="0">
                 <a:solidFill>
-                  <a:srgbClr val="A7A7A7"/>
+                  <a:srgbClr val="3D3D3A"/>
                 </a:solidFill>
                 <a:latin typeface="Consolas"/>
               </a:rPr>
@@ -10163,7 +10163,7 @@
             <a:r>
               <a:rPr sz="1600" b="0" i="0">
                 <a:solidFill>
-                  <a:srgbClr val="A7A7A7"/>
+                  <a:srgbClr val="3D3D3A"/>
                 </a:solidFill>
                 <a:latin typeface="Consolas"/>
               </a:rPr>
@@ -10182,7 +10182,7 @@
             <a:r>
               <a:rPr sz="1600" b="0" i="0">
                 <a:solidFill>
-                  <a:srgbClr val="A7A7A7"/>
+                  <a:srgbClr val="3D3D3A"/>
                 </a:solidFill>
                 <a:latin typeface="Consolas"/>
               </a:rPr>
@@ -10201,7 +10201,7 @@
             <a:r>
               <a:rPr sz="1600" b="0" i="0">
                 <a:solidFill>
-                  <a:srgbClr val="757575"/>
+                  <a:srgbClr val="87867F"/>
                 </a:solidFill>
                 <a:latin typeface="Consolas"/>
               </a:rPr>
@@ -10220,7 +10220,7 @@
             <a:r>
               <a:rPr sz="1600" b="0" i="0">
                 <a:solidFill>
-                  <a:srgbClr val="FFFFFF"/>
+                  <a:srgbClr val="141413"/>
                 </a:solidFill>
                 <a:latin typeface="Consolas"/>
               </a:rPr>
@@ -10239,7 +10239,7 @@
             <a:r>
               <a:rPr sz="1600" b="0" i="0">
                 <a:solidFill>
-                  <a:srgbClr val="A7A7A7"/>
+                  <a:srgbClr val="3D3D3A"/>
                 </a:solidFill>
                 <a:latin typeface="Consolas"/>
               </a:rPr>
@@ -10258,7 +10258,7 @@
             <a:r>
               <a:rPr sz="1600" b="0" i="0">
                 <a:solidFill>
-                  <a:srgbClr val="757575"/>
+                  <a:srgbClr val="87867F"/>
                 </a:solidFill>
                 <a:latin typeface="Consolas"/>
               </a:rPr>
@@ -10277,7 +10277,7 @@
             <a:r>
               <a:rPr sz="1600" b="0" i="0">
                 <a:solidFill>
-                  <a:srgbClr val="FFFFFF"/>
+                  <a:srgbClr val="141413"/>
                 </a:solidFill>
                 <a:latin typeface="Consolas"/>
               </a:rPr>
@@ -10296,7 +10296,7 @@
             <a:r>
               <a:rPr sz="1600" b="0" i="0">
                 <a:solidFill>
-                  <a:srgbClr val="A7A7A7"/>
+                  <a:srgbClr val="3D3D3A"/>
                 </a:solidFill>
                 <a:latin typeface="Consolas"/>
               </a:rPr>
@@ -10315,7 +10315,7 @@
             <a:r>
               <a:rPr sz="1600" b="0" i="0">
                 <a:solidFill>
-                  <a:srgbClr val="757575"/>
+                  <a:srgbClr val="87867F"/>
                 </a:solidFill>
                 <a:latin typeface="Consolas"/>
               </a:rPr>
@@ -10334,7 +10334,7 @@
             <a:r>
               <a:rPr sz="1600" b="0" i="0">
                 <a:solidFill>
-                  <a:srgbClr val="76B900"/>
+                  <a:srgbClr val="6B7A3F"/>
                 </a:solidFill>
                 <a:latin typeface="Consolas"/>
               </a:rPr>
@@ -10357,7 +10357,7 @@
     <p:bg>
       <p:bgPr>
         <a:solidFill>
-          <a:srgbClr val="000000"/>
+          <a:srgbClr val="F5F4ED"/>
         </a:solidFill>
         <a:effectLst/>
       </p:bgPr>
@@ -10394,9 +10394,9 @@
             <a:r>
               <a:rPr sz="3200" b="1" i="0">
                 <a:solidFill>
-                  <a:srgbClr val="FFFFFF"/>
-                </a:solidFill>
-                <a:latin typeface="Arial"/>
+                  <a:srgbClr val="141413"/>
+                </a:solidFill>
+                <a:latin typeface="Georgia"/>
               </a:rPr>
               <a:t>/tdd — 先寫測試，再寫實作</a:t>
             </a:r>
@@ -10418,7 +10418,7 @@
             <a:avLst/>
           </a:prstGeom>
           <a:solidFill>
-            <a:srgbClr val="76B900"/>
+            <a:srgbClr val="C96442"/>
           </a:solidFill>
           <a:ln>
             <a:noFill/>
@@ -10480,7 +10480,7 @@
             <a:r>
               <a:rPr sz="1800" b="0" i="0">
                 <a:solidFill>
-                  <a:srgbClr val="898989"/>
+                  <a:srgbClr val="5E5D59"/>
                 </a:solidFill>
                 <a:latin typeface="Arial"/>
               </a:rPr>
@@ -10499,7 +10499,7 @@
             <a:r>
               <a:rPr sz="800" b="0" i="0">
                 <a:solidFill>
-                  <a:srgbClr val="FFFFFF"/>
+                  <a:srgbClr val="141413"/>
                 </a:solidFill>
                 <a:latin typeface="Arial"/>
               </a:rPr>
@@ -10518,7 +10518,7 @@
             <a:r>
               <a:rPr sz="2400" b="1" i="0">
                 <a:solidFill>
-                  <a:srgbClr val="E52020"/>
+                  <a:srgbClr val="B53333"/>
                 </a:solidFill>
                 <a:latin typeface="Arial"/>
               </a:rPr>
@@ -10537,7 +10537,7 @@
             <a:r>
               <a:rPr sz="1600" b="0" i="0">
                 <a:solidFill>
-                  <a:srgbClr val="898989"/>
+                  <a:srgbClr val="5E5D59"/>
                 </a:solidFill>
                 <a:latin typeface="Arial"/>
               </a:rPr>
@@ -10556,7 +10556,7 @@
             <a:r>
               <a:rPr sz="800" b="0" i="0">
                 <a:solidFill>
-                  <a:srgbClr val="FFFFFF"/>
+                  <a:srgbClr val="141413"/>
                 </a:solidFill>
                 <a:latin typeface="Arial"/>
               </a:rPr>
@@ -10575,7 +10575,7 @@
             <a:r>
               <a:rPr sz="2400" b="1" i="0">
                 <a:solidFill>
-                  <a:srgbClr val="76B900"/>
+                  <a:srgbClr val="6B7A3F"/>
                 </a:solidFill>
                 <a:latin typeface="Arial"/>
               </a:rPr>
@@ -10594,7 +10594,7 @@
             <a:r>
               <a:rPr sz="1600" b="0" i="0">
                 <a:solidFill>
-                  <a:srgbClr val="898989"/>
+                  <a:srgbClr val="5E5D59"/>
                 </a:solidFill>
                 <a:latin typeface="Arial"/>
               </a:rPr>
@@ -10613,7 +10613,7 @@
             <a:r>
               <a:rPr sz="800" b="0" i="0">
                 <a:solidFill>
-                  <a:srgbClr val="FFFFFF"/>
+                  <a:srgbClr val="141413"/>
                 </a:solidFill>
                 <a:latin typeface="Arial"/>
               </a:rPr>
@@ -10632,7 +10632,7 @@
             <a:r>
               <a:rPr sz="2400" b="1" i="0">
                 <a:solidFill>
-                  <a:srgbClr val="76B900"/>
+                  <a:srgbClr val="C96442"/>
                 </a:solidFill>
                 <a:latin typeface="Arial"/>
               </a:rPr>
@@ -10651,7 +10651,7 @@
             <a:r>
               <a:rPr sz="1600" b="0" i="0">
                 <a:solidFill>
-                  <a:srgbClr val="898989"/>
+                  <a:srgbClr val="5E5D59"/>
                 </a:solidFill>
                 <a:latin typeface="Arial"/>
               </a:rPr>
@@ -10674,7 +10674,7 @@
     <p:bg>
       <p:bgPr>
         <a:solidFill>
-          <a:srgbClr val="000000"/>
+          <a:srgbClr val="F5F4ED"/>
         </a:solidFill>
         <a:effectLst/>
       </p:bgPr>
@@ -10711,9 +10711,9 @@
             <a:r>
               <a:rPr sz="3200" b="1" i="0">
                 <a:solidFill>
-                  <a:srgbClr val="FFFFFF"/>
-                </a:solidFill>
-                <a:latin typeface="Arial"/>
+                  <a:srgbClr val="141413"/>
+                </a:solidFill>
+                <a:latin typeface="Georgia"/>
               </a:rPr>
               <a:t>FastAPI /docs — 免費的互動文檔</a:t>
             </a:r>
@@ -10735,7 +10735,7 @@
             <a:avLst/>
           </a:prstGeom>
           <a:solidFill>
-            <a:srgbClr val="76B900"/>
+            <a:srgbClr val="C96442"/>
           </a:solidFill>
           <a:ln>
             <a:noFill/>
@@ -10797,7 +10797,7 @@
             <a:r>
               <a:rPr sz="2400" b="1" i="0">
                 <a:solidFill>
-                  <a:srgbClr val="76B900"/>
+                  <a:srgbClr val="C96442"/>
                 </a:solidFill>
                 <a:latin typeface="Arial"/>
               </a:rPr>
@@ -10816,7 +10816,7 @@
             <a:r>
               <a:rPr sz="800" b="0" i="0">
                 <a:solidFill>
-                  <a:srgbClr val="FFFFFF"/>
+                  <a:srgbClr val="141413"/>
                 </a:solidFill>
                 <a:latin typeface="Arial"/>
               </a:rPr>
@@ -10835,7 +10835,7 @@
             <a:r>
               <a:rPr sz="2000" b="0" i="0">
                 <a:solidFill>
-                  <a:srgbClr val="FFFFFF"/>
+                  <a:srgbClr val="141413"/>
                 </a:solidFill>
                 <a:latin typeface="Arial"/>
               </a:rPr>
@@ -10854,7 +10854,7 @@
             <a:r>
               <a:rPr sz="2000" b="0" i="0">
                 <a:solidFill>
-                  <a:srgbClr val="76B900"/>
+                  <a:srgbClr val="6B7A3F"/>
                 </a:solidFill>
                 <a:latin typeface="Arial"/>
               </a:rPr>
@@ -10873,7 +10873,7 @@
             <a:r>
               <a:rPr sz="1200" b="0" i="0">
                 <a:solidFill>
-                  <a:srgbClr val="FFFFFF"/>
+                  <a:srgbClr val="141413"/>
                 </a:solidFill>
                 <a:latin typeface="Arial"/>
               </a:rPr>
@@ -10892,7 +10892,7 @@
             <a:r>
               <a:rPr sz="2000" b="0" i="0">
                 <a:solidFill>
-                  <a:srgbClr val="FFFFFF"/>
+                  <a:srgbClr val="141413"/>
                 </a:solidFill>
                 <a:latin typeface="Arial"/>
               </a:rPr>
@@ -10911,7 +10911,7 @@
             <a:r>
               <a:rPr sz="2000" b="0" i="0">
                 <a:solidFill>
-                  <a:srgbClr val="FFFFFF"/>
+                  <a:srgbClr val="141413"/>
                 </a:solidFill>
                 <a:latin typeface="Arial"/>
               </a:rPr>
@@ -10930,7 +10930,7 @@
             <a:r>
               <a:rPr sz="2000" b="0" i="0">
                 <a:solidFill>
-                  <a:srgbClr val="FFFFFF"/>
+                  <a:srgbClr val="141413"/>
                 </a:solidFill>
                 <a:latin typeface="Arial"/>
               </a:rPr>
@@ -10949,7 +10949,7 @@
             <a:r>
               <a:rPr sz="1200" b="0" i="0">
                 <a:solidFill>
-                  <a:srgbClr val="FFFFFF"/>
+                  <a:srgbClr val="141413"/>
                 </a:solidFill>
                 <a:latin typeface="Arial"/>
               </a:rPr>
@@ -10968,7 +10968,7 @@
             <a:r>
               <a:rPr sz="1800" b="0" i="0">
                 <a:solidFill>
-                  <a:srgbClr val="898989"/>
+                  <a:srgbClr val="5E5D59"/>
                 </a:solidFill>
                 <a:latin typeface="Arial"/>
               </a:rPr>
@@ -10991,7 +10991,7 @@
     <p:bg>
       <p:bgPr>
         <a:solidFill>
-          <a:srgbClr val="000000"/>
+          <a:srgbClr val="F5F4ED"/>
         </a:solidFill>
         <a:effectLst/>
       </p:bgPr>
@@ -11028,9 +11028,9 @@
             <a:r>
               <a:rPr sz="3200" b="1" i="0">
                 <a:solidFill>
-                  <a:srgbClr val="FFFFFF"/>
-                </a:solidFill>
-                <a:latin typeface="Arial"/>
+                  <a:srgbClr val="141413"/>
+                </a:solidFill>
+                <a:latin typeface="Georgia"/>
               </a:rPr>
               <a:t>用 AI 寫程式的 5 個痛點</a:t>
             </a:r>
@@ -11052,7 +11052,7 @@
             <a:avLst/>
           </a:prstGeom>
           <a:solidFill>
-            <a:srgbClr val="76B900"/>
+            <a:srgbClr val="C96442"/>
           </a:solidFill>
           <a:ln>
             <a:noFill/>
@@ -11114,7 +11114,7 @@
             <a:r>
               <a:rPr sz="2200" b="0" i="0">
                 <a:solidFill>
-                  <a:srgbClr val="E52020"/>
+                  <a:srgbClr val="B53333"/>
                 </a:solidFill>
                 <a:latin typeface="Arial"/>
               </a:rPr>
@@ -11133,7 +11133,7 @@
             <a:r>
               <a:rPr sz="2200" b="0" i="0">
                 <a:solidFill>
-                  <a:srgbClr val="E52020"/>
+                  <a:srgbClr val="B53333"/>
                 </a:solidFill>
                 <a:latin typeface="Arial"/>
               </a:rPr>
@@ -11152,7 +11152,7 @@
             <a:r>
               <a:rPr sz="2200" b="0" i="0">
                 <a:solidFill>
-                  <a:srgbClr val="E52020"/>
+                  <a:srgbClr val="B53333"/>
                 </a:solidFill>
                 <a:latin typeface="Arial"/>
               </a:rPr>
@@ -11171,7 +11171,7 @@
             <a:r>
               <a:rPr sz="2200" b="0" i="0">
                 <a:solidFill>
-                  <a:srgbClr val="E52020"/>
+                  <a:srgbClr val="B53333"/>
                 </a:solidFill>
                 <a:latin typeface="Arial"/>
               </a:rPr>
@@ -11190,7 +11190,7 @@
             <a:r>
               <a:rPr sz="2200" b="0" i="0">
                 <a:solidFill>
-                  <a:srgbClr val="E52020"/>
+                  <a:srgbClr val="B53333"/>
                 </a:solidFill>
                 <a:latin typeface="Arial"/>
               </a:rPr>
@@ -11209,7 +11209,7 @@
             <a:r>
               <a:rPr sz="1200" b="0" i="0">
                 <a:solidFill>
-                  <a:srgbClr val="FFFFFF"/>
+                  <a:srgbClr val="141413"/>
                 </a:solidFill>
                 <a:latin typeface="Arial"/>
               </a:rPr>
@@ -11228,7 +11228,7 @@
             <a:r>
               <a:rPr sz="1800" b="0" i="0">
                 <a:solidFill>
-                  <a:srgbClr val="898989"/>
+                  <a:srgbClr val="5E5D59"/>
                 </a:solidFill>
                 <a:latin typeface="Arial"/>
               </a:rPr>
@@ -11251,7 +11251,7 @@
     <p:bg>
       <p:bgPr>
         <a:solidFill>
-          <a:srgbClr val="000000"/>
+          <a:srgbClr val="F5F4ED"/>
         </a:solidFill>
         <a:effectLst/>
       </p:bgPr>
@@ -11288,9 +11288,9 @@
             <a:r>
               <a:rPr sz="3000" b="1" i="0">
                 <a:solidFill>
-                  <a:srgbClr val="FFFFFF"/>
-                </a:solidFill>
-                <a:latin typeface="Arial"/>
+                  <a:srgbClr val="141413"/>
+                </a:solidFill>
+                <a:latin typeface="Georgia"/>
               </a:rPr>
               <a:t>/review-code — AI 審查程式碼</a:t>
             </a:r>
@@ -11312,11 +11312,11 @@
             <a:avLst/>
           </a:prstGeom>
           <a:solidFill>
-            <a:srgbClr val="1A1A1A"/>
+            <a:srgbClr val="FAF9F5"/>
           </a:solidFill>
           <a:ln w="12700">
             <a:solidFill>
-              <a:srgbClr val="1A1A1A"/>
+              <a:srgbClr val="E8E6DC"/>
             </a:solidFill>
           </a:ln>
           <a:effectLst/>
@@ -11376,7 +11376,7 @@
             <a:r>
               <a:rPr sz="1600" b="0" i="0">
                 <a:solidFill>
-                  <a:srgbClr val="76B900"/>
+                  <a:srgbClr val="C96442"/>
                 </a:solidFill>
                 <a:latin typeface="Consolas"/>
               </a:rPr>
@@ -11395,7 +11395,7 @@
             <a:r>
               <a:rPr sz="1600" b="0" i="0">
                 <a:solidFill>
-                  <a:srgbClr val="757575"/>
+                  <a:srgbClr val="87867F"/>
                 </a:solidFill>
                 <a:latin typeface="Consolas"/>
               </a:rPr>
@@ -11414,7 +11414,7 @@
             <a:r>
               <a:rPr sz="1600" b="0" i="0">
                 <a:solidFill>
-                  <a:srgbClr val="76B900"/>
+                  <a:srgbClr val="6B7A3F"/>
                 </a:solidFill>
                 <a:latin typeface="Consolas"/>
               </a:rPr>
@@ -11433,7 +11433,7 @@
             <a:r>
               <a:rPr sz="1600" b="0" i="0">
                 <a:solidFill>
-                  <a:srgbClr val="76B900"/>
+                  <a:srgbClr val="6B7A3F"/>
                 </a:solidFill>
                 <a:latin typeface="Consolas"/>
               </a:rPr>
@@ -11452,7 +11452,7 @@
             <a:r>
               <a:rPr sz="1600" b="0" i="0">
                 <a:solidFill>
-                  <a:srgbClr val="76B900"/>
+                  <a:srgbClr val="6B7A3F"/>
                 </a:solidFill>
                 <a:latin typeface="Consolas"/>
               </a:rPr>
@@ -11471,7 +11471,7 @@
             <a:r>
               <a:rPr sz="1600" b="0" i="0">
                 <a:solidFill>
-                  <a:srgbClr val="EF9100"/>
+                  <a:srgbClr val="D97757"/>
                 </a:solidFill>
                 <a:latin typeface="Consolas"/>
               </a:rPr>
@@ -11490,7 +11490,7 @@
             <a:r>
               <a:rPr sz="1600" b="0" i="0">
                 <a:solidFill>
-                  <a:srgbClr val="76B900"/>
+                  <a:srgbClr val="6B7A3F"/>
                 </a:solidFill>
                 <a:latin typeface="Consolas"/>
               </a:rPr>
@@ -11509,7 +11509,7 @@
             <a:r>
               <a:rPr sz="1600" b="0" i="0">
                 <a:solidFill>
-                  <a:srgbClr val="76B900"/>
+                  <a:srgbClr val="6B7A3F"/>
                 </a:solidFill>
                 <a:latin typeface="Consolas"/>
               </a:rPr>
@@ -11528,7 +11528,7 @@
             <a:r>
               <a:rPr sz="1600" b="0" i="0">
                 <a:solidFill>
-                  <a:srgbClr val="757575"/>
+                  <a:srgbClr val="87867F"/>
                 </a:solidFill>
                 <a:latin typeface="Consolas"/>
               </a:rPr>
@@ -11547,7 +11547,7 @@
             <a:r>
               <a:rPr sz="1600" b="0" i="0">
                 <a:solidFill>
-                  <a:srgbClr val="FFFFFF"/>
+                  <a:srgbClr val="141413"/>
                 </a:solidFill>
                 <a:latin typeface="Consolas"/>
               </a:rPr>
@@ -11566,7 +11566,7 @@
             <a:r>
               <a:rPr sz="1600" b="0" i="0">
                 <a:solidFill>
-                  <a:srgbClr val="EF9100"/>
+                  <a:srgbClr val="D97757"/>
                 </a:solidFill>
                 <a:latin typeface="Consolas"/>
               </a:rPr>
@@ -11589,7 +11589,7 @@
     <p:bg>
       <p:bgPr>
         <a:solidFill>
-          <a:srgbClr val="000000"/>
+          <a:srgbClr val="F5F4ED"/>
         </a:solidFill>
         <a:effectLst/>
       </p:bgPr>
@@ -11627,7 +11627,7 @@
             <a:r>
               <a:rPr sz="2000" b="0" i="0">
                 <a:solidFill>
-                  <a:srgbClr val="76B900"/>
+                  <a:srgbClr val="C96442"/>
                 </a:solidFill>
                 <a:latin typeface="Arial"/>
               </a:rPr>
@@ -11662,9 +11662,9 @@
             <a:r>
               <a:rPr sz="4000" b="1" i="0">
                 <a:solidFill>
-                  <a:srgbClr val="FFFFFF"/>
-                </a:solidFill>
-                <a:latin typeface="Arial"/>
+                  <a:srgbClr val="141413"/>
+                </a:solidFill>
+                <a:latin typeface="Georgia"/>
               </a:rPr>
               <a:t>前端 UI — React + Tailwind</a:t>
             </a:r>
@@ -11685,7 +11685,7 @@
     <p:bg>
       <p:bgPr>
         <a:solidFill>
-          <a:srgbClr val="000000"/>
+          <a:srgbClr val="F5F4ED"/>
         </a:solidFill>
         <a:effectLst/>
       </p:bgPr>
@@ -11722,9 +11722,9 @@
             <a:r>
               <a:rPr sz="3200" b="1" i="0">
                 <a:solidFill>
-                  <a:srgbClr val="FFFFFF"/>
-                </a:solidFill>
-                <a:latin typeface="Arial"/>
+                  <a:srgbClr val="141413"/>
+                </a:solidFill>
+                <a:latin typeface="Georgia"/>
               </a:rPr>
               <a:t>第 2 輪：同樣的流程，加快節奏</a:t>
             </a:r>
@@ -11746,7 +11746,7 @@
             <a:avLst/>
           </a:prstGeom>
           <a:solidFill>
-            <a:srgbClr val="76B900"/>
+            <a:srgbClr val="C96442"/>
           </a:solidFill>
           <a:ln>
             <a:noFill/>
@@ -11808,7 +11808,7 @@
             <a:r>
               <a:rPr sz="2200" b="0" i="0">
                 <a:solidFill>
-                  <a:srgbClr val="FFFFFF"/>
+                  <a:srgbClr val="141413"/>
                 </a:solidFill>
                 <a:latin typeface="Arial"/>
               </a:rPr>
@@ -11827,7 +11827,7 @@
             <a:r>
               <a:rPr sz="2200" b="0" i="0">
                 <a:solidFill>
-                  <a:srgbClr val="FFFFFF"/>
+                  <a:srgbClr val="141413"/>
                 </a:solidFill>
                 <a:latin typeface="Arial"/>
               </a:rPr>
@@ -11846,7 +11846,7 @@
             <a:r>
               <a:rPr sz="800" b="0" i="0">
                 <a:solidFill>
-                  <a:srgbClr val="FFFFFF"/>
+                  <a:srgbClr val="141413"/>
                 </a:solidFill>
                 <a:latin typeface="Arial"/>
               </a:rPr>
@@ -11865,7 +11865,7 @@
             <a:r>
               <a:rPr sz="2200" b="1" i="0">
                 <a:solidFill>
-                  <a:srgbClr val="76B900"/>
+                  <a:srgbClr val="C96442"/>
                 </a:solidFill>
                 <a:latin typeface="Arial"/>
               </a:rPr>
@@ -11884,7 +11884,7 @@
             <a:r>
               <a:rPr sz="400" b="0" i="0">
                 <a:solidFill>
-                  <a:srgbClr val="FFFFFF"/>
+                  <a:srgbClr val="141413"/>
                 </a:solidFill>
                 <a:latin typeface="Arial"/>
               </a:rPr>
@@ -11903,7 +11903,7 @@
             <a:r>
               <a:rPr sz="2000" b="0" i="0">
                 <a:solidFill>
-                  <a:srgbClr val="FFFFFF"/>
+                  <a:srgbClr val="141413"/>
                 </a:solidFill>
                 <a:latin typeface="Arial"/>
               </a:rPr>
@@ -11922,7 +11922,7 @@
             <a:r>
               <a:rPr sz="1600" b="0" i="0">
                 <a:solidFill>
-                  <a:srgbClr val="898989"/>
+                  <a:srgbClr val="5E5D59"/>
                 </a:solidFill>
                 <a:latin typeface="Arial"/>
               </a:rPr>
@@ -11941,7 +11941,7 @@
             <a:r>
               <a:rPr sz="400" b="0" i="0">
                 <a:solidFill>
-                  <a:srgbClr val="FFFFFF"/>
+                  <a:srgbClr val="141413"/>
                 </a:solidFill>
                 <a:latin typeface="Arial"/>
               </a:rPr>
@@ -11960,7 +11960,7 @@
             <a:r>
               <a:rPr sz="2000" b="0" i="0">
                 <a:solidFill>
-                  <a:srgbClr val="FFFFFF"/>
+                  <a:srgbClr val="141413"/>
                 </a:solidFill>
                 <a:latin typeface="Arial"/>
               </a:rPr>
@@ -11979,7 +11979,7 @@
             <a:r>
               <a:rPr sz="1600" b="0" i="0">
                 <a:solidFill>
-                  <a:srgbClr val="898989"/>
+                  <a:srgbClr val="5E5D59"/>
                 </a:solidFill>
                 <a:latin typeface="Arial"/>
               </a:rPr>
@@ -11998,7 +11998,7 @@
             <a:r>
               <a:rPr sz="800" b="0" i="0">
                 <a:solidFill>
-                  <a:srgbClr val="FFFFFF"/>
+                  <a:srgbClr val="141413"/>
                 </a:solidFill>
                 <a:latin typeface="Arial"/>
               </a:rPr>
@@ -12017,7 +12017,7 @@
             <a:r>
               <a:rPr sz="2000" b="0" i="0">
                 <a:solidFill>
-                  <a:srgbClr val="76B900"/>
+                  <a:srgbClr val="6B7A3F"/>
                 </a:solidFill>
                 <a:latin typeface="Arial"/>
               </a:rPr>
@@ -12040,7 +12040,7 @@
     <p:bg>
       <p:bgPr>
         <a:solidFill>
-          <a:srgbClr val="000000"/>
+          <a:srgbClr val="F5F4ED"/>
         </a:solidFill>
         <a:effectLst/>
       </p:bgPr>
@@ -12078,7 +12078,7 @@
             <a:r>
               <a:rPr sz="2000" b="0" i="0">
                 <a:solidFill>
-                  <a:srgbClr val="76B900"/>
+                  <a:srgbClr val="C96442"/>
                 </a:solidFill>
                 <a:latin typeface="Arial"/>
               </a:rPr>
@@ -12113,9 +12113,9 @@
             <a:r>
               <a:rPr sz="4000" b="1" i="0">
                 <a:solidFill>
-                  <a:srgbClr val="FFFFFF"/>
-                </a:solidFill>
-                <a:latin typeface="Arial"/>
+                  <a:srgbClr val="141413"/>
+                </a:solidFill>
+                <a:latin typeface="Georgia"/>
               </a:rPr>
               <a:t>修 Bug — /build-fix</a:t>
             </a:r>
@@ -12136,7 +12136,7 @@
     <p:bg>
       <p:bgPr>
         <a:solidFill>
-          <a:srgbClr val="000000"/>
+          <a:srgbClr val="F5F4ED"/>
         </a:solidFill>
         <a:effectLst/>
       </p:bgPr>
@@ -12173,9 +12173,9 @@
             <a:r>
               <a:rPr sz="3200" b="1" i="0">
                 <a:solidFill>
-                  <a:srgbClr val="FFFFFF"/>
-                </a:solidFill>
-                <a:latin typeface="Arial"/>
+                  <a:srgbClr val="141413"/>
+                </a:solidFill>
+                <a:latin typeface="Georgia"/>
               </a:rPr>
               <a:t>/build-fix — 出錯不可怕</a:t>
             </a:r>
@@ -12197,7 +12197,7 @@
             <a:avLst/>
           </a:prstGeom>
           <a:solidFill>
-            <a:srgbClr val="76B900"/>
+            <a:srgbClr val="C96442"/>
           </a:solidFill>
           <a:ln>
             <a:noFill/>
@@ -12259,7 +12259,7 @@
             <a:r>
               <a:rPr sz="2200" b="0" i="0">
                 <a:solidFill>
-                  <a:srgbClr val="FFFFFF"/>
+                  <a:srgbClr val="141413"/>
                 </a:solidFill>
                 <a:latin typeface="Arial"/>
               </a:rPr>
@@ -12278,7 +12278,7 @@
             <a:r>
               <a:rPr sz="800" b="0" i="0">
                 <a:solidFill>
-                  <a:srgbClr val="FFFFFF"/>
+                  <a:srgbClr val="141413"/>
                 </a:solidFill>
                 <a:latin typeface="Arial"/>
               </a:rPr>
@@ -12297,7 +12297,7 @@
             <a:r>
               <a:rPr sz="2200" b="1" i="0">
                 <a:solidFill>
-                  <a:srgbClr val="76B900"/>
+                  <a:srgbClr val="C96442"/>
                 </a:solidFill>
                 <a:latin typeface="Arial"/>
               </a:rPr>
@@ -12316,7 +12316,7 @@
             <a:r>
               <a:rPr sz="800" b="0" i="0">
                 <a:solidFill>
-                  <a:srgbClr val="FFFFFF"/>
+                  <a:srgbClr val="141413"/>
                 </a:solidFill>
                 <a:latin typeface="Arial"/>
               </a:rPr>
@@ -12335,7 +12335,7 @@
             <a:r>
               <a:rPr sz="2000" b="0" i="0">
                 <a:solidFill>
-                  <a:srgbClr val="FFFFFF"/>
+                  <a:srgbClr val="141413"/>
                 </a:solidFill>
                 <a:latin typeface="Arial"/>
               </a:rPr>
@@ -12354,7 +12354,7 @@
             <a:r>
               <a:rPr sz="2000" b="0" i="0">
                 <a:solidFill>
-                  <a:srgbClr val="FFFFFF"/>
+                  <a:srgbClr val="141413"/>
                 </a:solidFill>
                 <a:latin typeface="Arial"/>
               </a:rPr>
@@ -12373,7 +12373,7 @@
             <a:r>
               <a:rPr sz="2000" b="0" i="0">
                 <a:solidFill>
-                  <a:srgbClr val="FFFFFF"/>
+                  <a:srgbClr val="141413"/>
                 </a:solidFill>
                 <a:latin typeface="Arial"/>
               </a:rPr>
@@ -12392,7 +12392,7 @@
             <a:r>
               <a:rPr sz="2000" b="0" i="0">
                 <a:solidFill>
-                  <a:srgbClr val="FFFFFF"/>
+                  <a:srgbClr val="141413"/>
                 </a:solidFill>
                 <a:latin typeface="Arial"/>
               </a:rPr>
@@ -12411,7 +12411,7 @@
             <a:r>
               <a:rPr sz="1200" b="0" i="0">
                 <a:solidFill>
-                  <a:srgbClr val="FFFFFF"/>
+                  <a:srgbClr val="141413"/>
                 </a:solidFill>
                 <a:latin typeface="Arial"/>
               </a:rPr>
@@ -12430,7 +12430,7 @@
             <a:r>
               <a:rPr sz="2000" b="0" i="0">
                 <a:solidFill>
-                  <a:srgbClr val="76B900"/>
+                  <a:srgbClr val="6B7A3F"/>
                 </a:solidFill>
                 <a:latin typeface="Arial"/>
               </a:rPr>
@@ -12449,7 +12449,7 @@
             <a:r>
               <a:rPr sz="800" b="0" i="0">
                 <a:solidFill>
-                  <a:srgbClr val="FFFFFF"/>
+                  <a:srgbClr val="141413"/>
                 </a:solidFill>
                 <a:latin typeface="Arial"/>
               </a:rPr>
@@ -12468,7 +12468,7 @@
             <a:r>
               <a:rPr sz="1800" b="0" i="0">
                 <a:solidFill>
-                  <a:srgbClr val="898989"/>
+                  <a:srgbClr val="5E5D59"/>
                 </a:solidFill>
                 <a:latin typeface="Arial"/>
               </a:rPr>
@@ -12491,7 +12491,7 @@
     <p:bg>
       <p:bgPr>
         <a:solidFill>
-          <a:srgbClr val="000000"/>
+          <a:srgbClr val="F5F4ED"/>
         </a:solidFill>
         <a:effectLst/>
       </p:bgPr>
@@ -12528,9 +12528,9 @@
             <a:r>
               <a:rPr sz="3200" b="1" i="0">
                 <a:solidFill>
-                  <a:srgbClr val="FFFFFF"/>
-                </a:solidFill>
-                <a:latin typeface="Arial"/>
+                  <a:srgbClr val="141413"/>
+                </a:solidFill>
+                <a:latin typeface="Georgia"/>
               </a:rPr>
               <a:t>Chapter 3 小結 — 3 種 Lane 完成</a:t>
             </a:r>
@@ -12552,7 +12552,7 @@
             <a:avLst/>
           </a:prstGeom>
           <a:solidFill>
-            <a:srgbClr val="76B900"/>
+            <a:srgbClr val="C96442"/>
           </a:solidFill>
           <a:ln>
             <a:noFill/>
@@ -12614,7 +12614,7 @@
             <a:r>
               <a:rPr sz="2200" b="0" i="0">
                 <a:solidFill>
-                  <a:srgbClr val="FFFFFF"/>
+                  <a:srgbClr val="141413"/>
                 </a:solidFill>
                 <a:latin typeface="Arial"/>
               </a:rPr>
@@ -12633,7 +12633,7 @@
             <a:r>
               <a:rPr sz="2200" b="0" i="0">
                 <a:solidFill>
-                  <a:srgbClr val="FFFFFF"/>
+                  <a:srgbClr val="141413"/>
                 </a:solidFill>
                 <a:latin typeface="Arial"/>
               </a:rPr>
@@ -12652,7 +12652,7 @@
             <a:r>
               <a:rPr sz="2200" b="0" i="0">
                 <a:solidFill>
-                  <a:srgbClr val="FFFFFF"/>
+                  <a:srgbClr val="141413"/>
                 </a:solidFill>
                 <a:latin typeface="Arial"/>
               </a:rPr>
@@ -12671,7 +12671,7 @@
             <a:r>
               <a:rPr sz="1200" b="0" i="0">
                 <a:solidFill>
-                  <a:srgbClr val="FFFFFF"/>
+                  <a:srgbClr val="141413"/>
                 </a:solidFill>
                 <a:latin typeface="Arial"/>
               </a:rPr>
@@ -12690,7 +12690,7 @@
             <a:r>
               <a:rPr sz="2000" b="1" i="0">
                 <a:solidFill>
-                  <a:srgbClr val="76B900"/>
+                  <a:srgbClr val="C96442"/>
                 </a:solidFill>
                 <a:latin typeface="Arial"/>
               </a:rPr>
@@ -12709,7 +12709,7 @@
             <a:r>
               <a:rPr sz="2000" b="0" i="0">
                 <a:solidFill>
-                  <a:srgbClr val="76B900"/>
+                  <a:srgbClr val="6B7A3F"/>
                 </a:solidFill>
                 <a:latin typeface="Arial"/>
               </a:rPr>
@@ -12728,7 +12728,7 @@
             <a:r>
               <a:rPr sz="2000" b="0" i="0">
                 <a:solidFill>
-                  <a:srgbClr val="FFFFFF"/>
+                  <a:srgbClr val="141413"/>
                 </a:solidFill>
                 <a:latin typeface="Arial"/>
               </a:rPr>
@@ -12747,7 +12747,7 @@
             <a:r>
               <a:rPr sz="2000" b="0" i="0">
                 <a:solidFill>
-                  <a:srgbClr val="EF9100"/>
+                  <a:srgbClr val="D97757"/>
                 </a:solidFill>
                 <a:latin typeface="Arial"/>
               </a:rPr>
@@ -12766,7 +12766,7 @@
             <a:r>
               <a:rPr sz="1200" b="0" i="0">
                 <a:solidFill>
-                  <a:srgbClr val="FFFFFF"/>
+                  <a:srgbClr val="141413"/>
                 </a:solidFill>
                 <a:latin typeface="Arial"/>
               </a:rPr>
@@ -12785,7 +12785,7 @@
             <a:r>
               <a:rPr sz="1800" b="1" i="0">
                 <a:solidFill>
-                  <a:srgbClr val="76B900"/>
+                  <a:srgbClr val="6B7A3F"/>
                 </a:solidFill>
                 <a:latin typeface="Arial"/>
               </a:rPr>
@@ -12804,7 +12804,7 @@
             <a:r>
               <a:rPr sz="1500" b="0" i="0">
                 <a:solidFill>
-                  <a:srgbClr val="A7A7A7"/>
+                  <a:srgbClr val="3D3D3A"/>
                 </a:solidFill>
                 <a:latin typeface="Arial"/>
               </a:rPr>
@@ -12827,7 +12827,7 @@
     <p:bg>
       <p:bgPr>
         <a:solidFill>
-          <a:srgbClr val="000000"/>
+          <a:srgbClr val="F5F4ED"/>
         </a:solidFill>
         <a:effectLst/>
       </p:bgPr>
@@ -12865,7 +12865,7 @@
             <a:r>
               <a:rPr sz="2000" b="0" i="0">
                 <a:solidFill>
-                  <a:srgbClr val="76B900"/>
+                  <a:srgbClr val="C96442"/>
                 </a:solidFill>
                 <a:latin typeface="Arial"/>
               </a:rPr>
@@ -12900,9 +12900,9 @@
             <a:r>
               <a:rPr sz="4000" b="1" i="0">
                 <a:solidFill>
-                  <a:srgbClr val="FFFFFF"/>
-                </a:solidFill>
-                <a:latin typeface="Arial"/>
+                  <a:srgbClr val="141413"/>
+                </a:solidFill>
+                <a:latin typeface="Georgia"/>
               </a:rPr>
               <a:t>品質驗證</a:t>
             </a:r>
@@ -12923,7 +12923,7 @@
     <p:bg>
       <p:bgPr>
         <a:solidFill>
-          <a:srgbClr val="000000"/>
+          <a:srgbClr val="F5F4ED"/>
         </a:solidFill>
         <a:effectLst/>
       </p:bgPr>
@@ -12960,9 +12960,9 @@
             <a:r>
               <a:rPr sz="3000" b="1" i="0">
                 <a:solidFill>
-                  <a:srgbClr val="FFFFFF"/>
-                </a:solidFill>
-                <a:latin typeface="Arial"/>
+                  <a:srgbClr val="141413"/>
+                </a:solidFill>
+                <a:latin typeface="Georgia"/>
               </a:rPr>
               <a:t>/verify — 三道品質門（依模式自動）</a:t>
             </a:r>
@@ -12984,11 +12984,11 @@
             <a:avLst/>
           </a:prstGeom>
           <a:solidFill>
-            <a:srgbClr val="1A1A1A"/>
+            <a:srgbClr val="FAF9F5"/>
           </a:solidFill>
           <a:ln w="12700">
             <a:solidFill>
-              <a:srgbClr val="1A1A1A"/>
+              <a:srgbClr val="E8E6DC"/>
             </a:solidFill>
           </a:ln>
           <a:effectLst/>
@@ -13048,7 +13048,7 @@
             <a:r>
               <a:rPr sz="1600" b="0" i="0">
                 <a:solidFill>
-                  <a:srgbClr val="76B900"/>
+                  <a:srgbClr val="C96442"/>
                 </a:solidFill>
                 <a:latin typeface="Consolas"/>
               </a:rPr>
@@ -13067,7 +13067,7 @@
             <a:r>
               <a:rPr sz="1600" b="0" i="0">
                 <a:solidFill>
-                  <a:srgbClr val="757575"/>
+                  <a:srgbClr val="87867F"/>
                 </a:solidFill>
                 <a:latin typeface="Consolas"/>
               </a:rPr>
@@ -13086,7 +13086,7 @@
             <a:r>
               <a:rPr sz="1600" b="0" i="0">
                 <a:solidFill>
-                  <a:srgbClr val="FFFFFF"/>
+                  <a:srgbClr val="141413"/>
                 </a:solidFill>
                 <a:latin typeface="Consolas"/>
               </a:rPr>
@@ -13105,7 +13105,7 @@
             <a:r>
               <a:rPr sz="1600" b="0" i="0">
                 <a:solidFill>
-                  <a:srgbClr val="76B900"/>
+                  <a:srgbClr val="6B7A3F"/>
                 </a:solidFill>
                 <a:latin typeface="Consolas"/>
               </a:rPr>
@@ -13124,7 +13124,7 @@
             <a:r>
               <a:rPr sz="1600" b="0" i="0">
                 <a:solidFill>
-                  <a:srgbClr val="76B900"/>
+                  <a:srgbClr val="6B7A3F"/>
                 </a:solidFill>
                 <a:latin typeface="Consolas"/>
               </a:rPr>
@@ -13143,7 +13143,7 @@
             <a:r>
               <a:rPr sz="1600" b="0" i="0">
                 <a:solidFill>
-                  <a:srgbClr val="757575"/>
+                  <a:srgbClr val="87867F"/>
                 </a:solidFill>
                 <a:latin typeface="Consolas"/>
               </a:rPr>
@@ -13162,7 +13162,7 @@
             <a:r>
               <a:rPr sz="1600" b="0" i="0">
                 <a:solidFill>
-                  <a:srgbClr val="FFFFFF"/>
+                  <a:srgbClr val="141413"/>
                 </a:solidFill>
                 <a:latin typeface="Consolas"/>
               </a:rPr>
@@ -13181,7 +13181,7 @@
             <a:r>
               <a:rPr sz="1600" b="0" i="0">
                 <a:solidFill>
-                  <a:srgbClr val="76B900"/>
+                  <a:srgbClr val="6B7A3F"/>
                 </a:solidFill>
                 <a:latin typeface="Consolas"/>
               </a:rPr>
@@ -13200,7 +13200,7 @@
             <a:r>
               <a:rPr sz="1600" b="0" i="0">
                 <a:solidFill>
-                  <a:srgbClr val="76B900"/>
+                  <a:srgbClr val="6B7A3F"/>
                 </a:solidFill>
                 <a:latin typeface="Consolas"/>
               </a:rPr>
@@ -13219,7 +13219,7 @@
             <a:r>
               <a:rPr sz="1600" b="0" i="0">
                 <a:solidFill>
-                  <a:srgbClr val="76B900"/>
+                  <a:srgbClr val="6B7A3F"/>
                 </a:solidFill>
                 <a:latin typeface="Consolas"/>
               </a:rPr>
@@ -13238,7 +13238,7 @@
             <a:r>
               <a:rPr sz="1600" b="0" i="0">
                 <a:solidFill>
-                  <a:srgbClr val="757575"/>
+                  <a:srgbClr val="87867F"/>
                 </a:solidFill>
                 <a:latin typeface="Consolas"/>
               </a:rPr>
@@ -13257,7 +13257,7 @@
             <a:r>
               <a:rPr sz="1600" b="0" i="0">
                 <a:solidFill>
-                  <a:srgbClr val="FFFFFF"/>
+                  <a:srgbClr val="141413"/>
                 </a:solidFill>
                 <a:latin typeface="Consolas"/>
               </a:rPr>
@@ -13276,7 +13276,7 @@
             <a:r>
               <a:rPr sz="1600" b="0" i="0">
                 <a:solidFill>
-                  <a:srgbClr val="76B900"/>
+                  <a:srgbClr val="6B7A3F"/>
                 </a:solidFill>
                 <a:latin typeface="Consolas"/>
               </a:rPr>
@@ -13295,7 +13295,7 @@
             <a:r>
               <a:rPr sz="1600" b="0" i="0">
                 <a:solidFill>
-                  <a:srgbClr val="76B900"/>
+                  <a:srgbClr val="6B7A3F"/>
                 </a:solidFill>
                 <a:latin typeface="Consolas"/>
               </a:rPr>
@@ -13314,7 +13314,7 @@
             <a:r>
               <a:rPr sz="1600" b="0" i="0">
                 <a:solidFill>
-                  <a:srgbClr val="757575"/>
+                  <a:srgbClr val="87867F"/>
                 </a:solidFill>
                 <a:latin typeface="Consolas"/>
               </a:rPr>
@@ -13333,7 +13333,7 @@
             <a:r>
               <a:rPr sz="1600" b="0" i="0">
                 <a:solidFill>
-                  <a:srgbClr val="76B900"/>
+                  <a:srgbClr val="6B7A3F"/>
                 </a:solidFill>
                 <a:latin typeface="Consolas"/>
               </a:rPr>
@@ -13356,7 +13356,7 @@
     <p:bg>
       <p:bgPr>
         <a:solidFill>
-          <a:srgbClr val="000000"/>
+          <a:srgbClr val="F5F4ED"/>
         </a:solidFill>
         <a:effectLst/>
       </p:bgPr>
@@ -13393,9 +13393,9 @@
             <a:r>
               <a:rPr sz="3200" b="1" i="0">
                 <a:solidFill>
-                  <a:srgbClr val="FFFFFF"/>
-                </a:solidFill>
-                <a:latin typeface="Arial"/>
+                  <a:srgbClr val="141413"/>
+                </a:solidFill>
+                <a:latin typeface="Georgia"/>
               </a:rPr>
               <a:t>/e2e — Playwright 自動操作瀏覽器</a:t>
             </a:r>
@@ -13417,7 +13417,7 @@
             <a:avLst/>
           </a:prstGeom>
           <a:solidFill>
-            <a:srgbClr val="76B900"/>
+            <a:srgbClr val="C96442"/>
           </a:solidFill>
           <a:ln>
             <a:noFill/>
@@ -13479,7 +13479,7 @@
             <a:r>
               <a:rPr sz="1800" b="0" i="0">
                 <a:solidFill>
-                  <a:srgbClr val="898989"/>
+                  <a:srgbClr val="5E5D59"/>
                 </a:solidFill>
                 <a:latin typeface="Arial"/>
               </a:rPr>
@@ -13498,7 +13498,7 @@
             <a:r>
               <a:rPr sz="800" b="0" i="0">
                 <a:solidFill>
-                  <a:srgbClr val="FFFFFF"/>
+                  <a:srgbClr val="141413"/>
                 </a:solidFill>
                 <a:latin typeface="Arial"/>
               </a:rPr>
@@ -13517,7 +13517,7 @@
             <a:r>
               <a:rPr sz="2000" b="0" i="0">
                 <a:solidFill>
-                  <a:srgbClr val="FFFFFF"/>
+                  <a:srgbClr val="141413"/>
                 </a:solidFill>
                 <a:latin typeface="Arial"/>
               </a:rPr>
@@ -13536,7 +13536,7 @@
             <a:r>
               <a:rPr sz="2000" b="0" i="0">
                 <a:solidFill>
-                  <a:srgbClr val="FFFFFF"/>
+                  <a:srgbClr val="141413"/>
                 </a:solidFill>
                 <a:latin typeface="Arial"/>
               </a:rPr>
@@ -13555,7 +13555,7 @@
             <a:r>
               <a:rPr sz="400" b="0" i="0">
                 <a:solidFill>
-                  <a:srgbClr val="FFFFFF"/>
+                  <a:srgbClr val="141413"/>
                 </a:solidFill>
                 <a:latin typeface="Arial"/>
               </a:rPr>
@@ -13574,7 +13574,7 @@
             <a:r>
               <a:rPr sz="1800" b="0" i="0">
                 <a:solidFill>
-                  <a:srgbClr val="A7A7A7"/>
+                  <a:srgbClr val="3D3D3A"/>
                 </a:solidFill>
                 <a:latin typeface="Arial"/>
               </a:rPr>
@@ -13593,7 +13593,7 @@
             <a:r>
               <a:rPr sz="1800" b="0" i="0">
                 <a:solidFill>
-                  <a:srgbClr val="A7A7A7"/>
+                  <a:srgbClr val="3D3D3A"/>
                 </a:solidFill>
                 <a:latin typeface="Arial"/>
               </a:rPr>
@@ -13612,7 +13612,7 @@
             <a:r>
               <a:rPr sz="1800" b="0" i="0">
                 <a:solidFill>
-                  <a:srgbClr val="A7A7A7"/>
+                  <a:srgbClr val="3D3D3A"/>
                 </a:solidFill>
                 <a:latin typeface="Arial"/>
               </a:rPr>
@@ -13631,7 +13631,7 @@
             <a:r>
               <a:rPr sz="1800" b="0" i="0">
                 <a:solidFill>
-                  <a:srgbClr val="A7A7A7"/>
+                  <a:srgbClr val="3D3D3A"/>
                 </a:solidFill>
                 <a:latin typeface="Arial"/>
               </a:rPr>
@@ -13650,7 +13650,7 @@
             <a:r>
               <a:rPr sz="1800" b="0" i="0">
                 <a:solidFill>
-                  <a:srgbClr val="A7A7A7"/>
+                  <a:srgbClr val="3D3D3A"/>
                 </a:solidFill>
                 <a:latin typeface="Arial"/>
               </a:rPr>
@@ -13669,7 +13669,7 @@
             <a:r>
               <a:rPr sz="800" b="0" i="0">
                 <a:solidFill>
-                  <a:srgbClr val="FFFFFF"/>
+                  <a:srgbClr val="141413"/>
                 </a:solidFill>
                 <a:latin typeface="Arial"/>
               </a:rPr>
@@ -13688,7 +13688,7 @@
             <a:r>
               <a:rPr sz="2000" b="0" i="0">
                 <a:solidFill>
-                  <a:srgbClr val="76B900"/>
+                  <a:srgbClr val="6B7A3F"/>
                 </a:solidFill>
                 <a:latin typeface="Arial"/>
               </a:rPr>
@@ -13711,7 +13711,7 @@
     <p:bg>
       <p:bgPr>
         <a:solidFill>
-          <a:srgbClr val="000000"/>
+          <a:srgbClr val="F5F4ED"/>
         </a:solidFill>
         <a:effectLst/>
       </p:bgPr>
@@ -13748,9 +13748,9 @@
             <a:r>
               <a:rPr sz="3200" b="1" i="0">
                 <a:solidFill>
-                  <a:srgbClr val="FFFFFF"/>
-                </a:solidFill>
-                <a:latin typeface="Arial"/>
+                  <a:srgbClr val="141413"/>
+                </a:solidFill>
+                <a:latin typeface="Georgia"/>
               </a:rPr>
               <a:t>/time-log — 自動時間追蹤</a:t>
             </a:r>
@@ -13772,7 +13772,7 @@
             <a:avLst/>
           </a:prstGeom>
           <a:solidFill>
-            <a:srgbClr val="76B900"/>
+            <a:srgbClr val="C96442"/>
           </a:solidFill>
           <a:ln>
             <a:noFill/>
@@ -13834,7 +13834,7 @@
             <a:r>
               <a:rPr sz="2400" b="1" i="0">
                 <a:solidFill>
-                  <a:srgbClr val="76B900"/>
+                  <a:srgbClr val="C96442"/>
                 </a:solidFill>
                 <a:latin typeface="Arial"/>
               </a:rPr>
@@ -13853,7 +13853,7 @@
             <a:r>
               <a:rPr sz="1200" b="0" i="0">
                 <a:solidFill>
-                  <a:srgbClr val="FFFFFF"/>
+                  <a:srgbClr val="141413"/>
                 </a:solidFill>
                 <a:latin typeface="Arial"/>
               </a:rPr>
@@ -13872,7 +13872,7 @@
             <a:r>
               <a:rPr sz="2200" b="0" i="0">
                 <a:solidFill>
-                  <a:srgbClr val="FFFFFF"/>
+                  <a:srgbClr val="141413"/>
                 </a:solidFill>
                 <a:latin typeface="Arial"/>
               </a:rPr>
@@ -13891,7 +13891,7 @@
             <a:r>
               <a:rPr sz="2200" b="0" i="0">
                 <a:solidFill>
-                  <a:srgbClr val="FFFFFF"/>
+                  <a:srgbClr val="141413"/>
                 </a:solidFill>
                 <a:latin typeface="Arial"/>
               </a:rPr>
@@ -13910,7 +13910,7 @@
             <a:r>
               <a:rPr sz="2200" b="0" i="0">
                 <a:solidFill>
-                  <a:srgbClr val="FFFFFF"/>
+                  <a:srgbClr val="141413"/>
                 </a:solidFill>
                 <a:latin typeface="Arial"/>
               </a:rPr>
@@ -13929,7 +13929,7 @@
             <a:r>
               <a:rPr sz="2200" b="0" i="0">
                 <a:solidFill>
-                  <a:srgbClr val="FFFFFF"/>
+                  <a:srgbClr val="141413"/>
                 </a:solidFill>
                 <a:latin typeface="Arial"/>
               </a:rPr>
@@ -13948,7 +13948,7 @@
             <a:r>
               <a:rPr sz="2200" b="0" i="0">
                 <a:solidFill>
-                  <a:srgbClr val="FFFFFF"/>
+                  <a:srgbClr val="141413"/>
                 </a:solidFill>
                 <a:latin typeface="Arial"/>
               </a:rPr>
@@ -13967,7 +13967,7 @@
             <a:r>
               <a:rPr sz="2200" b="0" i="0">
                 <a:solidFill>
-                  <a:srgbClr val="757575"/>
+                  <a:srgbClr val="87867F"/>
                 </a:solidFill>
                 <a:latin typeface="Arial"/>
               </a:rPr>
@@ -13986,7 +13986,7 @@
             <a:r>
               <a:rPr sz="2200" b="1" i="0">
                 <a:solidFill>
-                  <a:srgbClr val="76B900"/>
+                  <a:srgbClr val="6B7A3F"/>
                 </a:solidFill>
                 <a:latin typeface="Arial"/>
               </a:rPr>
@@ -14005,7 +14005,7 @@
             <a:r>
               <a:rPr sz="1200" b="0" i="0">
                 <a:solidFill>
-                  <a:srgbClr val="FFFFFF"/>
+                  <a:srgbClr val="141413"/>
                 </a:solidFill>
                 <a:latin typeface="Arial"/>
               </a:rPr>
@@ -14024,7 +14024,7 @@
             <a:r>
               <a:rPr sz="1800" b="0" i="0">
                 <a:solidFill>
-                  <a:srgbClr val="898989"/>
+                  <a:srgbClr val="5E5D59"/>
                 </a:solidFill>
                 <a:latin typeface="Arial"/>
               </a:rPr>
@@ -14047,7 +14047,7 @@
     <p:bg>
       <p:bgPr>
         <a:solidFill>
-          <a:srgbClr val="000000"/>
+          <a:srgbClr val="F5F4ED"/>
         </a:solidFill>
         <a:effectLst/>
       </p:bgPr>
@@ -14084,9 +14084,9 @@
             <a:r>
               <a:rPr sz="3200" b="1" i="0">
                 <a:solidFill>
-                  <a:srgbClr val="FFFFFF"/>
-                </a:solidFill>
-                <a:latin typeface="Arial"/>
+                  <a:srgbClr val="141413"/>
+                </a:solidFill>
+                <a:latin typeface="Georgia"/>
               </a:rPr>
               <a:t>VibeCoding 模板 = AI 開發的標準作業程序</a:t>
             </a:r>
@@ -14108,7 +14108,7 @@
             <a:avLst/>
           </a:prstGeom>
           <a:solidFill>
-            <a:srgbClr val="76B900"/>
+            <a:srgbClr val="C96442"/>
           </a:solidFill>
           <a:ln>
             <a:noFill/>
@@ -14170,7 +14170,7 @@
             <a:r>
               <a:rPr sz="2000" b="0" i="0">
                 <a:solidFill>
-                  <a:srgbClr val="FFFFFF"/>
+                  <a:srgbClr val="141413"/>
                 </a:solidFill>
                 <a:latin typeface="Arial"/>
               </a:rPr>
@@ -14189,7 +14189,7 @@
             <a:r>
               <a:rPr sz="2000" b="0" i="0">
                 <a:solidFill>
-                  <a:srgbClr val="FFFFFF"/>
+                  <a:srgbClr val="141413"/>
                 </a:solidFill>
                 <a:latin typeface="Arial"/>
               </a:rPr>
@@ -14208,7 +14208,7 @@
             <a:r>
               <a:rPr sz="2000" b="0" i="0">
                 <a:solidFill>
-                  <a:srgbClr val="FFFFFF"/>
+                  <a:srgbClr val="141413"/>
                 </a:solidFill>
                 <a:latin typeface="Arial"/>
               </a:rPr>
@@ -14227,7 +14227,7 @@
             <a:r>
               <a:rPr sz="2000" b="0" i="0">
                 <a:solidFill>
-                  <a:srgbClr val="FFFFFF"/>
+                  <a:srgbClr val="141413"/>
                 </a:solidFill>
                 <a:latin typeface="Arial"/>
               </a:rPr>
@@ -14246,7 +14246,7 @@
             <a:r>
               <a:rPr sz="2000" b="0" i="0">
                 <a:solidFill>
-                  <a:srgbClr val="FFFFFF"/>
+                  <a:srgbClr val="141413"/>
                 </a:solidFill>
                 <a:latin typeface="Arial"/>
               </a:rPr>
@@ -14265,7 +14265,7 @@
             <a:r>
               <a:rPr sz="2000" b="0" i="0">
                 <a:solidFill>
-                  <a:srgbClr val="FFFFFF"/>
+                  <a:srgbClr val="141413"/>
                 </a:solidFill>
                 <a:latin typeface="Arial"/>
               </a:rPr>
@@ -14284,7 +14284,7 @@
             <a:r>
               <a:rPr sz="1200" b="0" i="0">
                 <a:solidFill>
-                  <a:srgbClr val="FFFFFF"/>
+                  <a:srgbClr val="141413"/>
                 </a:solidFill>
                 <a:latin typeface="Arial"/>
               </a:rPr>
@@ -14303,7 +14303,7 @@
             <a:r>
               <a:rPr sz="2000" b="1" i="0">
                 <a:solidFill>
-                  <a:srgbClr val="76B900"/>
+                  <a:srgbClr val="C96442"/>
                 </a:solidFill>
                 <a:latin typeface="Arial"/>
               </a:rPr>
@@ -14326,7 +14326,7 @@
     <p:bg>
       <p:bgPr>
         <a:solidFill>
-          <a:srgbClr val="000000"/>
+          <a:srgbClr val="F5F4ED"/>
         </a:solidFill>
         <a:effectLst/>
       </p:bgPr>
@@ -14364,7 +14364,7 @@
             <a:r>
               <a:rPr sz="2000" b="0" i="0">
                 <a:solidFill>
-                  <a:srgbClr val="76B900"/>
+                  <a:srgbClr val="C96442"/>
                 </a:solidFill>
                 <a:latin typeface="Arial"/>
               </a:rPr>
@@ -14399,9 +14399,9 @@
             <a:r>
               <a:rPr sz="4000" b="1" i="0">
                 <a:solidFill>
-                  <a:srgbClr val="FFFFFF"/>
-                </a:solidFill>
-                <a:latin typeface="Arial"/>
+                  <a:srgbClr val="141413"/>
+                </a:solidFill>
+                <a:latin typeface="Georgia"/>
               </a:rPr>
               <a:t>進階技巧與收尾</a:t>
             </a:r>
@@ -14422,7 +14422,7 @@
     <p:bg>
       <p:bgPr>
         <a:solidFill>
-          <a:srgbClr val="000000"/>
+          <a:srgbClr val="F5F4ED"/>
         </a:solidFill>
         <a:effectLst/>
       </p:bgPr>
@@ -14459,9 +14459,9 @@
             <a:r>
               <a:rPr sz="3200" b="1" i="0">
                 <a:solidFill>
-                  <a:srgbClr val="FFFFFF"/>
-                </a:solidFill>
-                <a:latin typeface="Arial"/>
+                  <a:srgbClr val="141413"/>
+                </a:solidFill>
+                <a:latin typeface="Georgia"/>
               </a:rPr>
               <a:t>更多可以探索的功能</a:t>
             </a:r>
@@ -14483,7 +14483,7 @@
             <a:avLst/>
           </a:prstGeom>
           <a:solidFill>
-            <a:srgbClr val="76B900"/>
+            <a:srgbClr val="C96442"/>
           </a:solidFill>
           <a:ln>
             <a:noFill/>
@@ -14545,7 +14545,7 @@
             <a:r>
               <a:rPr sz="2200" b="0" i="0">
                 <a:solidFill>
-                  <a:srgbClr val="FFFFFF"/>
+                  <a:srgbClr val="141413"/>
                 </a:solidFill>
                 <a:latin typeface="Arial"/>
               </a:rPr>
@@ -14564,7 +14564,7 @@
             <a:r>
               <a:rPr sz="1600" b="0" i="0">
                 <a:solidFill>
-                  <a:srgbClr val="898989"/>
+                  <a:srgbClr val="5E5D59"/>
                 </a:solidFill>
                 <a:latin typeface="Arial"/>
               </a:rPr>
@@ -14583,7 +14583,7 @@
             <a:r>
               <a:rPr sz="600" b="0" i="0">
                 <a:solidFill>
-                  <a:srgbClr val="FFFFFF"/>
+                  <a:srgbClr val="141413"/>
                 </a:solidFill>
                 <a:latin typeface="Arial"/>
               </a:rPr>
@@ -14602,7 +14602,7 @@
             <a:r>
               <a:rPr sz="2200" b="0" i="0">
                 <a:solidFill>
-                  <a:srgbClr val="FFFFFF"/>
+                  <a:srgbClr val="141413"/>
                 </a:solidFill>
                 <a:latin typeface="Arial"/>
               </a:rPr>
@@ -14621,7 +14621,7 @@
             <a:r>
               <a:rPr sz="1600" b="0" i="0">
                 <a:solidFill>
-                  <a:srgbClr val="898989"/>
+                  <a:srgbClr val="5E5D59"/>
                 </a:solidFill>
                 <a:latin typeface="Arial"/>
               </a:rPr>
@@ -14640,7 +14640,7 @@
             <a:r>
               <a:rPr sz="600" b="0" i="0">
                 <a:solidFill>
-                  <a:srgbClr val="FFFFFF"/>
+                  <a:srgbClr val="141413"/>
                 </a:solidFill>
                 <a:latin typeface="Arial"/>
               </a:rPr>
@@ -14659,7 +14659,7 @@
             <a:r>
               <a:rPr sz="2200" b="0" i="0">
                 <a:solidFill>
-                  <a:srgbClr val="FFFFFF"/>
+                  <a:srgbClr val="141413"/>
                 </a:solidFill>
                 <a:latin typeface="Arial"/>
               </a:rPr>
@@ -14678,7 +14678,7 @@
             <a:r>
               <a:rPr sz="1600" b="0" i="0">
                 <a:solidFill>
-                  <a:srgbClr val="898989"/>
+                  <a:srgbClr val="5E5D59"/>
                 </a:solidFill>
                 <a:latin typeface="Arial"/>
               </a:rPr>
@@ -14697,7 +14697,7 @@
             <a:r>
               <a:rPr sz="600" b="0" i="0">
                 <a:solidFill>
-                  <a:srgbClr val="FFFFFF"/>
+                  <a:srgbClr val="141413"/>
                 </a:solidFill>
                 <a:latin typeface="Arial"/>
               </a:rPr>
@@ -14716,7 +14716,7 @@
             <a:r>
               <a:rPr sz="2200" b="0" i="0">
                 <a:solidFill>
-                  <a:srgbClr val="FFFFFF"/>
+                  <a:srgbClr val="141413"/>
                 </a:solidFill>
                 <a:latin typeface="Arial"/>
               </a:rPr>
@@ -14735,7 +14735,7 @@
             <a:r>
               <a:rPr sz="1600" b="0" i="0">
                 <a:solidFill>
-                  <a:srgbClr val="898989"/>
+                  <a:srgbClr val="5E5D59"/>
                 </a:solidFill>
                 <a:latin typeface="Arial"/>
               </a:rPr>
@@ -14758,7 +14758,7 @@
     <p:bg>
       <p:bgPr>
         <a:solidFill>
-          <a:srgbClr val="000000"/>
+          <a:srgbClr val="F5F4ED"/>
         </a:solidFill>
         <a:effectLst/>
       </p:bgPr>
@@ -14795,9 +14795,9 @@
             <a:r>
               <a:rPr sz="3200" b="1" i="0">
                 <a:solidFill>
-                  <a:srgbClr val="FFFFFF"/>
-                </a:solidFill>
-                <a:latin typeface="Arial"/>
+                  <a:srgbClr val="141413"/>
+                </a:solidFill>
+                <a:latin typeface="Georgia"/>
               </a:rPr>
               <a:t>完整流程回顧</a:t>
             </a:r>
@@ -14819,7 +14819,7 @@
             <a:avLst/>
           </a:prstGeom>
           <a:solidFill>
-            <a:srgbClr val="76B900"/>
+            <a:srgbClr val="C96442"/>
           </a:solidFill>
           <a:ln>
             <a:noFill/>
@@ -14881,7 +14881,7 @@
             <a:r>
               <a:rPr sz="2000" b="0" i="0">
                 <a:solidFill>
-                  <a:srgbClr val="898989"/>
+                  <a:srgbClr val="5E5D59"/>
                 </a:solidFill>
                 <a:latin typeface="Arial"/>
               </a:rPr>
@@ -14900,7 +14900,7 @@
             <a:r>
               <a:rPr sz="2000" b="0" i="0">
                 <a:solidFill>
-                  <a:srgbClr val="898989"/>
+                  <a:srgbClr val="5E5D59"/>
                 </a:solidFill>
                 <a:latin typeface="Arial"/>
               </a:rPr>
@@ -14919,7 +14919,7 @@
             <a:r>
               <a:rPr sz="2000" b="0" i="0">
                 <a:solidFill>
-                  <a:srgbClr val="FFFFFF"/>
+                  <a:srgbClr val="141413"/>
                 </a:solidFill>
                 <a:latin typeface="Arial"/>
               </a:rPr>
@@ -14938,7 +14938,7 @@
             <a:r>
               <a:rPr sz="2000" b="0" i="0">
                 <a:solidFill>
-                  <a:srgbClr val="FFFFFF"/>
+                  <a:srgbClr val="141413"/>
                 </a:solidFill>
                 <a:latin typeface="Arial"/>
               </a:rPr>
@@ -14957,7 +14957,7 @@
             <a:r>
               <a:rPr sz="2000" b="0" i="0">
                 <a:solidFill>
-                  <a:srgbClr val="898989"/>
+                  <a:srgbClr val="5E5D59"/>
                 </a:solidFill>
                 <a:latin typeface="Arial"/>
               </a:rPr>
@@ -14976,7 +14976,7 @@
             <a:r>
               <a:rPr sz="1600" b="0" i="0">
                 <a:solidFill>
-                  <a:srgbClr val="FFFFFF"/>
+                  <a:srgbClr val="141413"/>
                 </a:solidFill>
                 <a:latin typeface="Arial"/>
               </a:rPr>
@@ -14995,7 +14995,7 @@
             <a:r>
               <a:rPr sz="2200" b="1" i="0">
                 <a:solidFill>
-                  <a:srgbClr val="76B900"/>
+                  <a:srgbClr val="6B7A3F"/>
                 </a:solidFill>
                 <a:latin typeface="Arial"/>
               </a:rPr>
@@ -15018,7 +15018,7 @@
     <p:bg>
       <p:bgPr>
         <a:solidFill>
-          <a:srgbClr val="000000"/>
+          <a:srgbClr val="F5F4ED"/>
         </a:solidFill>
         <a:effectLst/>
       </p:bgPr>
@@ -15055,9 +15055,9 @@
             <a:r>
               <a:rPr sz="3200" b="1" i="0">
                 <a:solidFill>
-                  <a:srgbClr val="FFFFFF"/>
-                </a:solidFill>
-                <a:latin typeface="Arial"/>
+                  <a:srgbClr val="141413"/>
+                </a:solidFill>
+                <a:latin typeface="Georgia"/>
               </a:rPr>
               <a:t>課後作業 — 選一個挑戰</a:t>
             </a:r>
@@ -15079,7 +15079,7 @@
             <a:avLst/>
           </a:prstGeom>
           <a:solidFill>
-            <a:srgbClr val="76B900"/>
+            <a:srgbClr val="C96442"/>
           </a:solidFill>
           <a:ln>
             <a:noFill/>
@@ -15141,7 +15141,7 @@
             <a:r>
               <a:rPr sz="2400" b="1" i="0">
                 <a:solidFill>
-                  <a:srgbClr val="76B900"/>
+                  <a:srgbClr val="6B7A3F"/>
                 </a:solidFill>
                 <a:latin typeface="Arial"/>
               </a:rPr>
@@ -15160,7 +15160,7 @@
             <a:r>
               <a:rPr sz="1800" b="0" i="0">
                 <a:solidFill>
-                  <a:srgbClr val="FFFFFF"/>
+                  <a:srgbClr val="141413"/>
                 </a:solidFill>
                 <a:latin typeface="Arial"/>
               </a:rPr>
@@ -15179,7 +15179,7 @@
             <a:r>
               <a:rPr sz="800" b="0" i="0">
                 <a:solidFill>
-                  <a:srgbClr val="FFFFFF"/>
+                  <a:srgbClr val="141413"/>
                 </a:solidFill>
                 <a:latin typeface="Arial"/>
               </a:rPr>
@@ -15198,7 +15198,7 @@
             <a:r>
               <a:rPr sz="2400" b="1" i="0">
                 <a:solidFill>
-                  <a:srgbClr val="76B900"/>
+                  <a:srgbClr val="C96442"/>
                 </a:solidFill>
                 <a:latin typeface="Arial"/>
               </a:rPr>
@@ -15217,7 +15217,7 @@
             <a:r>
               <a:rPr sz="1800" b="0" i="0">
                 <a:solidFill>
-                  <a:srgbClr val="FFFFFF"/>
+                  <a:srgbClr val="141413"/>
                 </a:solidFill>
                 <a:latin typeface="Arial"/>
               </a:rPr>
@@ -15236,7 +15236,7 @@
             <a:r>
               <a:rPr sz="800" b="0" i="0">
                 <a:solidFill>
-                  <a:srgbClr val="FFFFFF"/>
+                  <a:srgbClr val="141413"/>
                 </a:solidFill>
                 <a:latin typeface="Arial"/>
               </a:rPr>
@@ -15255,7 +15255,7 @@
             <a:r>
               <a:rPr sz="2400" b="1" i="0">
                 <a:solidFill>
-                  <a:srgbClr val="EF9100"/>
+                  <a:srgbClr val="D97757"/>
                 </a:solidFill>
                 <a:latin typeface="Arial"/>
               </a:rPr>
@@ -15274,7 +15274,7 @@
             <a:r>
               <a:rPr sz="1800" b="0" i="0">
                 <a:solidFill>
-                  <a:srgbClr val="FFFFFF"/>
+                  <a:srgbClr val="141413"/>
                 </a:solidFill>
                 <a:latin typeface="Arial"/>
               </a:rPr>
@@ -15297,7 +15297,7 @@
     <p:bg>
       <p:bgPr>
         <a:solidFill>
-          <a:srgbClr val="000000"/>
+          <a:srgbClr val="F5F4ED"/>
         </a:solidFill>
         <a:effectLst/>
       </p:bgPr>
@@ -15334,9 +15334,9 @@
             <a:r>
               <a:rPr sz="3200" b="1" i="0">
                 <a:solidFill>
-                  <a:srgbClr val="FFFFFF"/>
-                </a:solidFill>
-                <a:latin typeface="Arial"/>
+                  <a:srgbClr val="141413"/>
+                </a:solidFill>
+                <a:latin typeface="Georgia"/>
               </a:rPr>
               <a:t>推薦探索路徑</a:t>
             </a:r>
@@ -15358,7 +15358,7 @@
             <a:avLst/>
           </a:prstGeom>
           <a:solidFill>
-            <a:srgbClr val="76B900"/>
+            <a:srgbClr val="C96442"/>
           </a:solidFill>
           <a:ln>
             <a:noFill/>
@@ -15420,7 +15420,7 @@
             <a:r>
               <a:rPr sz="2000" b="0" i="0">
                 <a:solidFill>
-                  <a:srgbClr val="FFFFFF"/>
+                  <a:srgbClr val="141413"/>
                 </a:solidFill>
                 <a:latin typeface="Arial"/>
               </a:rPr>
@@ -15439,7 +15439,7 @@
             <a:r>
               <a:rPr sz="2000" b="0" i="0">
                 <a:solidFill>
-                  <a:srgbClr val="FFFFFF"/>
+                  <a:srgbClr val="141413"/>
                 </a:solidFill>
                 <a:latin typeface="Arial"/>
               </a:rPr>
@@ -15458,7 +15458,7 @@
             <a:r>
               <a:rPr sz="2000" b="0" i="0">
                 <a:solidFill>
-                  <a:srgbClr val="FFFFFF"/>
+                  <a:srgbClr val="141413"/>
                 </a:solidFill>
                 <a:latin typeface="Arial"/>
               </a:rPr>
@@ -15477,7 +15477,7 @@
             <a:r>
               <a:rPr sz="2000" b="0" i="0">
                 <a:solidFill>
-                  <a:srgbClr val="FFFFFF"/>
+                  <a:srgbClr val="141413"/>
                 </a:solidFill>
                 <a:latin typeface="Arial"/>
               </a:rPr>
@@ -15496,7 +15496,7 @@
             <a:r>
               <a:rPr sz="2000" b="0" i="0">
                 <a:solidFill>
-                  <a:srgbClr val="FFFFFF"/>
+                  <a:srgbClr val="141413"/>
                 </a:solidFill>
                 <a:latin typeface="Arial"/>
               </a:rPr>
@@ -15515,7 +15515,7 @@
             <a:r>
               <a:rPr sz="2000" b="0" i="0">
                 <a:solidFill>
-                  <a:srgbClr val="FFFFFF"/>
+                  <a:srgbClr val="141413"/>
                 </a:solidFill>
                 <a:latin typeface="Arial"/>
               </a:rPr>
@@ -15534,7 +15534,7 @@
             <a:r>
               <a:rPr sz="1600" b="0" i="0">
                 <a:solidFill>
-                  <a:srgbClr val="FFFFFF"/>
+                  <a:srgbClr val="141413"/>
                 </a:solidFill>
                 <a:latin typeface="Arial"/>
               </a:rPr>
@@ -15553,7 +15553,7 @@
             <a:r>
               <a:rPr sz="1800" b="0" i="0">
                 <a:solidFill>
-                  <a:srgbClr val="76B900"/>
+                  <a:srgbClr val="C96442"/>
                 </a:solidFill>
                 <a:latin typeface="Arial"/>
               </a:rPr>
@@ -15576,7 +15576,7 @@
     <p:bg>
       <p:bgPr>
         <a:solidFill>
-          <a:srgbClr val="000000"/>
+          <a:srgbClr val="F5F4ED"/>
         </a:solidFill>
         <a:effectLst/>
       </p:bgPr>
@@ -15614,9 +15614,9 @@
             <a:r>
               <a:rPr sz="4400" b="1" i="0">
                 <a:solidFill>
-                  <a:srgbClr val="FFFFFF"/>
-                </a:solidFill>
-                <a:latin typeface="Arial"/>
+                  <a:srgbClr val="141413"/>
+                </a:solidFill>
+                <a:latin typeface="Georgia"/>
               </a:rPr>
               <a:t>Q &amp; A</a:t>
             </a:r>
@@ -15633,7 +15633,7 @@
             <a:r>
               <a:rPr sz="2200" b="0" i="0">
                 <a:solidFill>
-                  <a:srgbClr val="898989"/>
+                  <a:srgbClr val="5E5D59"/>
                 </a:solidFill>
                 <a:latin typeface="Arial"/>
               </a:rPr>
@@ -15657,7 +15657,7 @@
             <a:avLst/>
           </a:prstGeom>
           <a:solidFill>
-            <a:srgbClr val="76B900"/>
+            <a:srgbClr val="C96442"/>
           </a:solidFill>
           <a:ln>
             <a:noFill/>
@@ -15699,7 +15699,7 @@
     <p:bg>
       <p:bgPr>
         <a:solidFill>
-          <a:srgbClr val="000000"/>
+          <a:srgbClr val="F5F4ED"/>
         </a:solidFill>
         <a:effectLst/>
       </p:bgPr>
@@ -15737,9 +15737,9 @@
             <a:r>
               <a:rPr sz="4400" b="1" i="0">
                 <a:solidFill>
-                  <a:srgbClr val="FFFFFF"/>
-                </a:solidFill>
-                <a:latin typeface="Arial"/>
+                  <a:srgbClr val="141413"/>
+                </a:solidFill>
+                <a:latin typeface="Georgia"/>
               </a:rPr>
               <a:t>Thank You</a:t>
             </a:r>
@@ -15756,7 +15756,7 @@
             <a:r>
               <a:rPr sz="2200" b="0" i="0">
                 <a:solidFill>
-                  <a:srgbClr val="898989"/>
+                  <a:srgbClr val="5E5D59"/>
                 </a:solidFill>
                 <a:latin typeface="Arial"/>
               </a:rPr>
@@ -15780,7 +15780,7 @@
             <a:avLst/>
           </a:prstGeom>
           <a:solidFill>
-            <a:srgbClr val="76B900"/>
+            <a:srgbClr val="C96442"/>
           </a:solidFill>
           <a:ln>
             <a:noFill/>
@@ -15822,7 +15822,7 @@
     <p:bg>
       <p:bgPr>
         <a:solidFill>
-          <a:srgbClr val="000000"/>
+          <a:srgbClr val="F5F4ED"/>
         </a:solidFill>
         <a:effectLst/>
       </p:bgPr>
@@ -15859,9 +15859,9 @@
             <a:r>
               <a:rPr sz="3200" b="1" i="0">
                 <a:solidFill>
-                  <a:srgbClr val="FFFFFF"/>
-                </a:solidFill>
-                <a:latin typeface="Arial"/>
+                  <a:srgbClr val="141413"/>
+                </a:solidFill>
+                <a:latin typeface="Georgia"/>
               </a:rPr>
               <a:t>對比 — 沒模板 vs 有模板</a:t>
             </a:r>
@@ -15883,7 +15883,7 @@
             <a:avLst/>
           </a:prstGeom>
           <a:solidFill>
-            <a:srgbClr val="76B900"/>
+            <a:srgbClr val="C96442"/>
           </a:solidFill>
           <a:ln>
             <a:noFill/>
@@ -15936,7 +15936,7 @@
             <a:r>
               <a:rPr sz="2200" b="1" i="0">
                 <a:solidFill>
-                  <a:srgbClr val="76B900"/>
+                  <a:srgbClr val="C96442"/>
                 </a:solidFill>
                 <a:latin typeface="Arial"/>
               </a:rPr>
@@ -15955,7 +15955,7 @@
             <a:r>
               <a:rPr sz="1800" b="0" i="0">
                 <a:solidFill>
-                  <a:srgbClr val="FFFFFF"/>
+                  <a:srgbClr val="141413"/>
                 </a:solidFill>
                 <a:latin typeface="Arial"/>
               </a:rPr>
@@ -15974,7 +15974,7 @@
             <a:r>
               <a:rPr sz="1800" b="0" i="0">
                 <a:solidFill>
-                  <a:srgbClr val="FFFFFF"/>
+                  <a:srgbClr val="141413"/>
                 </a:solidFill>
                 <a:latin typeface="Arial"/>
               </a:rPr>
@@ -15993,7 +15993,7 @@
             <a:r>
               <a:rPr sz="1800" b="0" i="0">
                 <a:solidFill>
-                  <a:srgbClr val="FFFFFF"/>
+                  <a:srgbClr val="141413"/>
                 </a:solidFill>
                 <a:latin typeface="Arial"/>
               </a:rPr>
@@ -16012,7 +16012,7 @@
             <a:r>
               <a:rPr sz="1800" b="0" i="0">
                 <a:solidFill>
-                  <a:srgbClr val="FFFFFF"/>
+                  <a:srgbClr val="141413"/>
                 </a:solidFill>
                 <a:latin typeface="Arial"/>
               </a:rPr>
@@ -16031,7 +16031,7 @@
             <a:r>
               <a:rPr sz="1800" b="0" i="0">
                 <a:solidFill>
-                  <a:srgbClr val="FFFFFF"/>
+                  <a:srgbClr val="141413"/>
                 </a:solidFill>
                 <a:latin typeface="Arial"/>
               </a:rPr>
@@ -16050,7 +16050,7 @@
             <a:r>
               <a:rPr sz="1800" b="0" i="0">
                 <a:solidFill>
-                  <a:srgbClr val="FFFFFF"/>
+                  <a:srgbClr val="141413"/>
                 </a:solidFill>
                 <a:latin typeface="Arial"/>
               </a:rPr>
@@ -16084,7 +16084,7 @@
             <a:r>
               <a:rPr sz="2200" b="1" i="0">
                 <a:solidFill>
-                  <a:srgbClr val="76B900"/>
+                  <a:srgbClr val="6B7A3F"/>
                 </a:solidFill>
                 <a:latin typeface="Arial"/>
               </a:rPr>
@@ -16103,7 +16103,7 @@
             <a:r>
               <a:rPr sz="1800" b="0" i="0">
                 <a:solidFill>
-                  <a:srgbClr val="FFFFFF"/>
+                  <a:srgbClr val="141413"/>
                 </a:solidFill>
                 <a:latin typeface="Arial"/>
               </a:rPr>
@@ -16122,7 +16122,7 @@
             <a:r>
               <a:rPr sz="1800" b="0" i="0">
                 <a:solidFill>
-                  <a:srgbClr val="FFFFFF"/>
+                  <a:srgbClr val="141413"/>
                 </a:solidFill>
                 <a:latin typeface="Arial"/>
               </a:rPr>
@@ -16141,7 +16141,7 @@
             <a:r>
               <a:rPr sz="1800" b="0" i="0">
                 <a:solidFill>
-                  <a:srgbClr val="FFFFFF"/>
+                  <a:srgbClr val="141413"/>
                 </a:solidFill>
                 <a:latin typeface="Arial"/>
               </a:rPr>
@@ -16160,7 +16160,7 @@
             <a:r>
               <a:rPr sz="1800" b="0" i="0">
                 <a:solidFill>
-                  <a:srgbClr val="FFFFFF"/>
+                  <a:srgbClr val="141413"/>
                 </a:solidFill>
                 <a:latin typeface="Arial"/>
               </a:rPr>
@@ -16179,7 +16179,7 @@
             <a:r>
               <a:rPr sz="1800" b="0" i="0">
                 <a:solidFill>
-                  <a:srgbClr val="FFFFFF"/>
+                  <a:srgbClr val="141413"/>
                 </a:solidFill>
                 <a:latin typeface="Arial"/>
               </a:rPr>
@@ -16198,7 +16198,7 @@
             <a:r>
               <a:rPr sz="1800" b="0" i="0">
                 <a:solidFill>
-                  <a:srgbClr val="FFFFFF"/>
+                  <a:srgbClr val="141413"/>
                 </a:solidFill>
                 <a:latin typeface="Arial"/>
               </a:rPr>
@@ -16221,7 +16221,7 @@
     <p:bg>
       <p:bgPr>
         <a:solidFill>
-          <a:srgbClr val="000000"/>
+          <a:srgbClr val="F5F4ED"/>
         </a:solidFill>
         <a:effectLst/>
       </p:bgPr>
@@ -16258,9 +16258,9 @@
             <a:r>
               <a:rPr sz="3200" b="1" i="0">
                 <a:solidFill>
-                  <a:srgbClr val="FFFFFF"/>
-                </a:solidFill>
-                <a:latin typeface="Arial"/>
+                  <a:srgbClr val="141413"/>
+                </a:solidFill>
+                <a:latin typeface="Georgia"/>
               </a:rPr>
               <a:t>.claude/ 是專案的「AI 大腦」 — 6 大設定觀念</a:t>
             </a:r>
@@ -16282,7 +16282,7 @@
             <a:avLst/>
           </a:prstGeom>
           <a:solidFill>
-            <a:srgbClr val="76B900"/>
+            <a:srgbClr val="C96442"/>
           </a:solidFill>
           <a:ln>
             <a:noFill/>
@@ -16344,7 +16344,7 @@
             <a:r>
               <a:rPr sz="2000" b="1" i="0">
                 <a:solidFill>
-                  <a:srgbClr val="76B900"/>
+                  <a:srgbClr val="C96442"/>
                 </a:solidFill>
                 <a:latin typeface="Arial"/>
               </a:rPr>
@@ -16363,7 +16363,7 @@
             <a:r>
               <a:rPr sz="2000" b="0" i="0">
                 <a:solidFill>
-                  <a:srgbClr val="FFFFFF"/>
+                  <a:srgbClr val="141413"/>
                 </a:solidFill>
                 <a:latin typeface="Arial"/>
               </a:rPr>
@@ -16382,7 +16382,7 @@
             <a:r>
               <a:rPr sz="2000" b="0" i="0">
                 <a:solidFill>
-                  <a:srgbClr val="FFFFFF"/>
+                  <a:srgbClr val="141413"/>
                 </a:solidFill>
                 <a:latin typeface="Arial"/>
               </a:rPr>
@@ -16401,7 +16401,7 @@
             <a:r>
               <a:rPr sz="2000" b="0" i="0">
                 <a:solidFill>
-                  <a:srgbClr val="FFFFFF"/>
+                  <a:srgbClr val="141413"/>
                 </a:solidFill>
                 <a:latin typeface="Arial"/>
               </a:rPr>
@@ -16420,7 +16420,7 @@
             <a:r>
               <a:rPr sz="2000" b="0" i="0">
                 <a:solidFill>
-                  <a:srgbClr val="FFFFFF"/>
+                  <a:srgbClr val="141413"/>
                 </a:solidFill>
                 <a:latin typeface="Arial"/>
               </a:rPr>
@@ -16439,7 +16439,7 @@
             <a:r>
               <a:rPr sz="2000" b="0" i="0">
                 <a:solidFill>
-                  <a:srgbClr val="FFFFFF"/>
+                  <a:srgbClr val="141413"/>
                 </a:solidFill>
                 <a:latin typeface="Arial"/>
               </a:rPr>
@@ -16458,7 +16458,7 @@
             <a:r>
               <a:rPr sz="2000" b="0" i="0">
                 <a:solidFill>
-                  <a:srgbClr val="FFFFFF"/>
+                  <a:srgbClr val="141413"/>
                 </a:solidFill>
                 <a:latin typeface="Arial"/>
               </a:rPr>
@@ -16477,7 +16477,7 @@
             <a:r>
               <a:rPr sz="1200" b="0" i="0">
                 <a:solidFill>
-                  <a:srgbClr val="FFFFFF"/>
+                  <a:srgbClr val="141413"/>
                 </a:solidFill>
                 <a:latin typeface="Arial"/>
               </a:rPr>
@@ -16496,7 +16496,7 @@
             <a:r>
               <a:rPr sz="1800" b="0" i="0">
                 <a:solidFill>
-                  <a:srgbClr val="898989"/>
+                  <a:srgbClr val="5E5D59"/>
                 </a:solidFill>
                 <a:latin typeface="Arial"/>
               </a:rPr>
@@ -16519,7 +16519,7 @@
     <p:bg>
       <p:bgPr>
         <a:solidFill>
-          <a:srgbClr val="000000"/>
+          <a:srgbClr val="F5F4ED"/>
         </a:solidFill>
         <a:effectLst/>
       </p:bgPr>
@@ -16556,9 +16556,9 @@
             <a:r>
               <a:rPr sz="3200" b="1" i="0">
                 <a:solidFill>
-                  <a:srgbClr val="FFFFFF"/>
-                </a:solidFill>
-                <a:latin typeface="Arial"/>
+                  <a:srgbClr val="141413"/>
+                </a:solidFill>
+                <a:latin typeface="Georgia"/>
               </a:rPr>
               <a:t>CLAUDE.md — 專案說明書</a:t>
             </a:r>
@@ -16580,7 +16580,7 @@
             <a:avLst/>
           </a:prstGeom>
           <a:solidFill>
-            <a:srgbClr val="76B900"/>
+            <a:srgbClr val="C96442"/>
           </a:solidFill>
           <a:ln>
             <a:noFill/>
@@ -16642,7 +16642,7 @@
             <a:r>
               <a:rPr sz="2000" b="1" i="0">
                 <a:solidFill>
-                  <a:srgbClr val="76B900"/>
+                  <a:srgbClr val="C96442"/>
                 </a:solidFill>
                 <a:latin typeface="Arial"/>
               </a:rPr>
@@ -16661,7 +16661,7 @@
             <a:r>
               <a:rPr sz="1800" b="0" i="0">
                 <a:solidFill>
-                  <a:srgbClr val="A7A7A7"/>
+                  <a:srgbClr val="3D3D3A"/>
                 </a:solidFill>
                 <a:latin typeface="Arial"/>
               </a:rPr>
@@ -16680,7 +16680,7 @@
             <a:r>
               <a:rPr sz="1000" b="0" i="0">
                 <a:solidFill>
-                  <a:srgbClr val="FFFFFF"/>
+                  <a:srgbClr val="141413"/>
                 </a:solidFill>
                 <a:latin typeface="Arial"/>
               </a:rPr>
@@ -16699,7 +16699,7 @@
             <a:r>
               <a:rPr sz="2000" b="1" i="0">
                 <a:solidFill>
-                  <a:srgbClr val="FFFFFF"/>
+                  <a:srgbClr val="141413"/>
                 </a:solidFill>
                 <a:latin typeface="Arial"/>
               </a:rPr>
@@ -16718,7 +16718,7 @@
             <a:r>
               <a:rPr sz="1800" b="0" i="0">
                 <a:solidFill>
-                  <a:srgbClr val="FFFFFF"/>
+                  <a:srgbClr val="141413"/>
                 </a:solidFill>
                 <a:latin typeface="Arial"/>
               </a:rPr>
@@ -16737,7 +16737,7 @@
             <a:r>
               <a:rPr sz="1800" b="0" i="0">
                 <a:solidFill>
-                  <a:srgbClr val="FFFFFF"/>
+                  <a:srgbClr val="141413"/>
                 </a:solidFill>
                 <a:latin typeface="Arial"/>
               </a:rPr>
@@ -16756,7 +16756,7 @@
             <a:r>
               <a:rPr sz="1800" b="0" i="0">
                 <a:solidFill>
-                  <a:srgbClr val="FFFFFF"/>
+                  <a:srgbClr val="141413"/>
                 </a:solidFill>
                 <a:latin typeface="Arial"/>
               </a:rPr>
@@ -16775,7 +16775,7 @@
             <a:r>
               <a:rPr sz="1800" b="0" i="0">
                 <a:solidFill>
-                  <a:srgbClr val="FFFFFF"/>
+                  <a:srgbClr val="141413"/>
                 </a:solidFill>
                 <a:latin typeface="Arial"/>
               </a:rPr>
@@ -16794,7 +16794,7 @@
             <a:r>
               <a:rPr sz="1800" b="0" i="0">
                 <a:solidFill>
-                  <a:srgbClr val="FFFFFF"/>
+                  <a:srgbClr val="141413"/>
                 </a:solidFill>
                 <a:latin typeface="Arial"/>
               </a:rPr>
@@ -16813,7 +16813,7 @@
             <a:r>
               <a:rPr sz="1000" b="0" i="0">
                 <a:solidFill>
-                  <a:srgbClr val="FFFFFF"/>
+                  <a:srgbClr val="141413"/>
                 </a:solidFill>
                 <a:latin typeface="Arial"/>
               </a:rPr>
@@ -16832,7 +16832,7 @@
             <a:r>
               <a:rPr sz="1800" b="1" i="0">
                 <a:solidFill>
-                  <a:srgbClr val="76B900"/>
+                  <a:srgbClr val="6B7A3F"/>
                 </a:solidFill>
                 <a:latin typeface="Arial"/>
               </a:rPr>
@@ -16855,7 +16855,7 @@
     <p:bg>
       <p:bgPr>
         <a:solidFill>
-          <a:srgbClr val="000000"/>
+          <a:srgbClr val="F5F4ED"/>
         </a:solidFill>
         <a:effectLst/>
       </p:bgPr>
@@ -16892,9 +16892,9 @@
             <a:r>
               <a:rPr sz="3200" b="1" i="0">
                 <a:solidFill>
-                  <a:srgbClr val="FFFFFF"/>
-                </a:solidFill>
-                <a:latin typeface="Arial"/>
+                  <a:srgbClr val="141413"/>
+                </a:solidFill>
+                <a:latin typeface="Georgia"/>
               </a:rPr>
               <a:t>rules/ — 永遠載入的規則（13 條）</a:t>
             </a:r>
@@ -16916,7 +16916,7 @@
             <a:avLst/>
           </a:prstGeom>
           <a:solidFill>
-            <a:srgbClr val="76B900"/>
+            <a:srgbClr val="C96442"/>
           </a:solidFill>
           <a:ln>
             <a:noFill/>
@@ -16978,7 +16978,7 @@
             <a:r>
               <a:rPr sz="2000" b="1" i="0">
                 <a:solidFill>
-                  <a:srgbClr val="76B900"/>
+                  <a:srgbClr val="C96442"/>
                 </a:solidFill>
                 <a:latin typeface="Arial"/>
               </a:rPr>
@@ -16997,7 +16997,7 @@
             <a:r>
               <a:rPr sz="1800" b="0" i="0">
                 <a:solidFill>
-                  <a:srgbClr val="A7A7A7"/>
+                  <a:srgbClr val="3D3D3A"/>
                 </a:solidFill>
                 <a:latin typeface="Arial"/>
               </a:rPr>
@@ -17016,7 +17016,7 @@
             <a:r>
               <a:rPr sz="1000" b="0" i="0">
                 <a:solidFill>
-                  <a:srgbClr val="FFFFFF"/>
+                  <a:srgbClr val="141413"/>
                 </a:solidFill>
                 <a:latin typeface="Arial"/>
               </a:rPr>
@@ -17035,7 +17035,7 @@
             <a:r>
               <a:rPr sz="2000" b="1" i="0">
                 <a:solidFill>
-                  <a:srgbClr val="FFFFFF"/>
+                  <a:srgbClr val="141413"/>
                 </a:solidFill>
                 <a:latin typeface="Arial"/>
               </a:rPr>
@@ -17054,7 +17054,7 @@
             <a:r>
               <a:rPr sz="1800" b="0" i="0">
                 <a:solidFill>
-                  <a:srgbClr val="FFFFFF"/>
+                  <a:srgbClr val="141413"/>
                 </a:solidFill>
                 <a:latin typeface="Arial"/>
               </a:rPr>
@@ -17073,7 +17073,7 @@
             <a:r>
               <a:rPr sz="1800" b="0" i="0">
                 <a:solidFill>
-                  <a:srgbClr val="FFFFFF"/>
+                  <a:srgbClr val="141413"/>
                 </a:solidFill>
                 <a:latin typeface="Arial"/>
               </a:rPr>
@@ -17092,7 +17092,7 @@
             <a:r>
               <a:rPr sz="1800" b="0" i="0">
                 <a:solidFill>
-                  <a:srgbClr val="FFFFFF"/>
+                  <a:srgbClr val="141413"/>
                 </a:solidFill>
                 <a:latin typeface="Arial"/>
               </a:rPr>
@@ -17111,7 +17111,7 @@
             <a:r>
               <a:rPr sz="1800" b="0" i="0">
                 <a:solidFill>
-                  <a:srgbClr val="FFFFFF"/>
+                  <a:srgbClr val="141413"/>
                 </a:solidFill>
                 <a:latin typeface="Arial"/>
               </a:rPr>
@@ -17130,7 +17130,7 @@
             <a:r>
               <a:rPr sz="1800" b="0" i="0">
                 <a:solidFill>
-                  <a:srgbClr val="FFFFFF"/>
+                  <a:srgbClr val="141413"/>
                 </a:solidFill>
                 <a:latin typeface="Arial"/>
               </a:rPr>
@@ -17149,7 +17149,7 @@
             <a:r>
               <a:rPr sz="1000" b="0" i="0">
                 <a:solidFill>
-                  <a:srgbClr val="FFFFFF"/>
+                  <a:srgbClr val="141413"/>
                 </a:solidFill>
                 <a:latin typeface="Arial"/>
               </a:rPr>
@@ -17168,7 +17168,7 @@
             <a:r>
               <a:rPr sz="1800" b="1" i="0">
                 <a:solidFill>
-                  <a:srgbClr val="76B900"/>
+                  <a:srgbClr val="6B7A3F"/>
                 </a:solidFill>
                 <a:latin typeface="Arial"/>
               </a:rPr>
@@ -17191,7 +17191,7 @@
     <p:bg>
       <p:bgPr>
         <a:solidFill>
-          <a:srgbClr val="000000"/>
+          <a:srgbClr val="F5F4ED"/>
         </a:solidFill>
         <a:effectLst/>
       </p:bgPr>
@@ -17228,9 +17228,9 @@
             <a:r>
               <a:rPr sz="3200" b="1" i="0">
                 <a:solidFill>
-                  <a:srgbClr val="FFFFFF"/>
-                </a:solidFill>
-                <a:latin typeface="Arial"/>
+                  <a:srgbClr val="141413"/>
+                </a:solidFill>
+                <a:latin typeface="Georgia"/>
               </a:rPr>
               <a:t>commands/ — 你的快捷指令（23 個）</a:t>
             </a:r>
@@ -17252,7 +17252,7 @@
             <a:avLst/>
           </a:prstGeom>
           <a:solidFill>
-            <a:srgbClr val="76B900"/>
+            <a:srgbClr val="C96442"/>
           </a:solidFill>
           <a:ln>
             <a:noFill/>
@@ -17314,7 +17314,7 @@
             <a:r>
               <a:rPr sz="2000" b="1" i="0">
                 <a:solidFill>
-                  <a:srgbClr val="76B900"/>
+                  <a:srgbClr val="C96442"/>
                 </a:solidFill>
                 <a:latin typeface="Arial"/>
               </a:rPr>
@@ -17333,7 +17333,7 @@
             <a:r>
               <a:rPr sz="1800" b="0" i="0">
                 <a:solidFill>
-                  <a:srgbClr val="A7A7A7"/>
+                  <a:srgbClr val="3D3D3A"/>
                 </a:solidFill>
                 <a:latin typeface="Arial"/>
               </a:rPr>
@@ -17352,7 +17352,7 @@
             <a:r>
               <a:rPr sz="1000" b="0" i="0">
                 <a:solidFill>
-                  <a:srgbClr val="FFFFFF"/>
+                  <a:srgbClr val="141413"/>
                 </a:solidFill>
                 <a:latin typeface="Arial"/>
               </a:rPr>
@@ -17371,7 +17371,7 @@
             <a:r>
               <a:rPr sz="1800" b="0" i="0">
                 <a:solidFill>
-                  <a:srgbClr val="FFFFFF"/>
+                  <a:srgbClr val="141413"/>
                 </a:solidFill>
                 <a:latin typeface="Arial"/>
               </a:rPr>
@@ -17390,7 +17390,7 @@
             <a:r>
               <a:rPr sz="1800" b="0" i="0">
                 <a:solidFill>
-                  <a:srgbClr val="FFFFFF"/>
+                  <a:srgbClr val="141413"/>
                 </a:solidFill>
                 <a:latin typeface="Arial"/>
               </a:rPr>
@@ -17409,7 +17409,7 @@
             <a:r>
               <a:rPr sz="1800" b="0" i="0">
                 <a:solidFill>
-                  <a:srgbClr val="FFFFFF"/>
+                  <a:srgbClr val="141413"/>
                 </a:solidFill>
                 <a:latin typeface="Arial"/>
               </a:rPr>
@@ -17428,7 +17428,7 @@
             <a:r>
               <a:rPr sz="1800" b="0" i="0">
                 <a:solidFill>
-                  <a:srgbClr val="FFFFFF"/>
+                  <a:srgbClr val="141413"/>
                 </a:solidFill>
                 <a:latin typeface="Arial"/>
               </a:rPr>
@@ -17447,7 +17447,7 @@
             <a:r>
               <a:rPr sz="1800" b="0" i="0">
                 <a:solidFill>
-                  <a:srgbClr val="FFFFFF"/>
+                  <a:srgbClr val="141413"/>
                 </a:solidFill>
                 <a:latin typeface="Arial"/>
               </a:rPr>
@@ -17466,7 +17466,7 @@
             <a:r>
               <a:rPr sz="1800" b="0" i="0">
                 <a:solidFill>
-                  <a:srgbClr val="FFFFFF"/>
+                  <a:srgbClr val="141413"/>
                 </a:solidFill>
                 <a:latin typeface="Arial"/>
               </a:rPr>
@@ -17485,7 +17485,7 @@
             <a:r>
               <a:rPr sz="1800" b="0" i="0">
                 <a:solidFill>
-                  <a:srgbClr val="898989"/>
+                  <a:srgbClr val="5E5D59"/>
                 </a:solidFill>
                 <a:latin typeface="Arial"/>
               </a:rPr>
@@ -17504,7 +17504,7 @@
             <a:r>
               <a:rPr sz="1000" b="0" i="0">
                 <a:solidFill>
-                  <a:srgbClr val="FFFFFF"/>
+                  <a:srgbClr val="141413"/>
                 </a:solidFill>
                 <a:latin typeface="Arial"/>
               </a:rPr>
@@ -17523,7 +17523,7 @@
             <a:r>
               <a:rPr sz="1800" b="1" i="0">
                 <a:solidFill>
-                  <a:srgbClr val="76B900"/>
+                  <a:srgbClr val="6B7A3F"/>
                 </a:solidFill>
                 <a:latin typeface="Arial"/>
               </a:rPr>

--- a/workshop/docs/slides/VibeCoding_Workshop.pptx
+++ b/workshop/docs/slides/VibeCoding_Workshop.pptx
@@ -11691,7 +11691,7 @@
                 <a:latin typeface="Consolas"/>
                 <a:ea typeface="Microsoft JhengHei"/>
               </a:rPr>
-              <a:t>├── commands/        ← 25 個快捷指令</a:t>
+              <a:t>├── commands/        ← 24 個快捷指令</a:t>
             </a:r>
           </a:p>
           <a:p>
@@ -31081,7 +31081,7 @@
                 <a:latin typeface="Arial"/>
                 <a:ea typeface="Microsoft JhengHei"/>
               </a:rPr>
-              <a:t>⚡  25 個快捷指令        一行啟動完整流程</a:t>
+              <a:t>⚡  24 個快捷指令        一行啟動完整流程</a:t>
             </a:r>
           </a:p>
           <a:p>
@@ -40563,7 +40563,7 @@
                 <a:latin typeface="Georgia"/>
                 <a:ea typeface="Microsoft JhengHei"/>
               </a:rPr>
-              <a:t>commands/ — 你的快捷指令（25 個）</a:t>
+              <a:t>commands/ — 你的快捷指令（24 個）</a:t>
             </a:r>
           </a:p>
         </p:txBody>

--- a/workshop/docs/slides/VibeCoding_Workshop.pptx
+++ b/workshop/docs/slides/VibeCoding_Workshop.pptx
@@ -11691,7 +11691,7 @@
                 <a:latin typeface="Consolas"/>
                 <a:ea typeface="Microsoft JhengHei"/>
               </a:rPr>
-              <a:t>├── commands/        ← 24 個快捷指令</a:t>
+              <a:t>├── commands/        ← 25 個快捷指令</a:t>
             </a:r>
           </a:p>
           <a:p>
@@ -31081,7 +31081,7 @@
                 <a:latin typeface="Arial"/>
                 <a:ea typeface="Microsoft JhengHei"/>
               </a:rPr>
-              <a:t>⚡  24 個快捷指令        一行啟動完整流程</a:t>
+              <a:t>⚡  25 個快捷指令        一行啟動完整流程</a:t>
             </a:r>
           </a:p>
           <a:p>
@@ -40563,7 +40563,7 @@
                 <a:latin typeface="Georgia"/>
                 <a:ea typeface="Microsoft JhengHei"/>
               </a:rPr>
-              <a:t>commands/ — 你的快捷指令（24 個）</a:t>
+              <a:t>commands/ — 你的快捷指令（25 個）</a:t>
             </a:r>
           </a:p>
         </p:txBody>
